--- a/Amator_Telsizcilik_Uzlasi_Oy_Pusulasi_Sunum_v1.3.pptx
+++ b/Amator_Telsizcilik_Uzlasi_Oy_Pusulasi_Sunum_v1.3.pptx
@@ -5,46 +5,46 @@
     <p:sldMasterId id="2147483648" r:id="rId1"/>
   </p:sldMasterIdLst>
   <p:sldIdLst>
-    <p:sldId id="256" r:id="rId7"/>
-    <p:sldId id="257" r:id="rId8"/>
-    <p:sldId id="258" r:id="rId9"/>
-    <p:sldId id="259" r:id="rId10"/>
-    <p:sldId id="260" r:id="rId11"/>
-    <p:sldId id="261" r:id="rId12"/>
-    <p:sldId id="262" r:id="rId13"/>
-    <p:sldId id="263" r:id="rId14"/>
-    <p:sldId id="264" r:id="rId15"/>
-    <p:sldId id="265" r:id="rId16"/>
-    <p:sldId id="266" r:id="rId17"/>
-    <p:sldId id="267" r:id="rId18"/>
-    <p:sldId id="268" r:id="rId19"/>
-    <p:sldId id="269" r:id="rId20"/>
-    <p:sldId id="270" r:id="rId21"/>
-    <p:sldId id="271" r:id="rId22"/>
-    <p:sldId id="272" r:id="rId23"/>
-    <p:sldId id="273" r:id="rId24"/>
-    <p:sldId id="274" r:id="rId25"/>
-    <p:sldId id="275" r:id="rId26"/>
-    <p:sldId id="276" r:id="rId27"/>
-    <p:sldId id="277" r:id="rId28"/>
-    <p:sldId id="278" r:id="rId29"/>
-    <p:sldId id="279" r:id="rId30"/>
-    <p:sldId id="280" r:id="rId31"/>
-    <p:sldId id="281" r:id="rId32"/>
-    <p:sldId id="282" r:id="rId33"/>
-    <p:sldId id="283" r:id="rId34"/>
-    <p:sldId id="284" r:id="rId35"/>
-    <p:sldId id="285" r:id="rId36"/>
-    <p:sldId id="286" r:id="rId37"/>
-    <p:sldId id="287" r:id="rId38"/>
-    <p:sldId id="288" r:id="rId39"/>
-    <p:sldId id="289" r:id="rId40"/>
-    <p:sldId id="290" r:id="rId41"/>
-    <p:sldId id="291" r:id="rId42"/>
-    <p:sldId id="292" r:id="rId43"/>
-    <p:sldId id="293" r:id="rId44"/>
+    <p:sldId id="256" r:id="rId2"/>
+    <p:sldId id="257" r:id="rId3"/>
+    <p:sldId id="258" r:id="rId4"/>
+    <p:sldId id="259" r:id="rId5"/>
+    <p:sldId id="260" r:id="rId6"/>
+    <p:sldId id="261" r:id="rId7"/>
+    <p:sldId id="262" r:id="rId8"/>
+    <p:sldId id="263" r:id="rId9"/>
+    <p:sldId id="264" r:id="rId10"/>
+    <p:sldId id="265" r:id="rId11"/>
+    <p:sldId id="266" r:id="rId12"/>
+    <p:sldId id="267" r:id="rId13"/>
+    <p:sldId id="268" r:id="rId14"/>
+    <p:sldId id="269" r:id="rId15"/>
+    <p:sldId id="270" r:id="rId16"/>
+    <p:sldId id="271" r:id="rId17"/>
+    <p:sldId id="272" r:id="rId18"/>
+    <p:sldId id="273" r:id="rId19"/>
+    <p:sldId id="274" r:id="rId20"/>
+    <p:sldId id="275" r:id="rId21"/>
+    <p:sldId id="276" r:id="rId22"/>
+    <p:sldId id="277" r:id="rId23"/>
+    <p:sldId id="278" r:id="rId24"/>
+    <p:sldId id="279" r:id="rId25"/>
+    <p:sldId id="280" r:id="rId26"/>
+    <p:sldId id="281" r:id="rId27"/>
+    <p:sldId id="282" r:id="rId28"/>
+    <p:sldId id="283" r:id="rId29"/>
+    <p:sldId id="284" r:id="rId30"/>
+    <p:sldId id="285" r:id="rId31"/>
+    <p:sldId id="286" r:id="rId32"/>
+    <p:sldId id="287" r:id="rId33"/>
+    <p:sldId id="288" r:id="rId34"/>
+    <p:sldId id="289" r:id="rId35"/>
+    <p:sldId id="290" r:id="rId36"/>
+    <p:sldId id="291" r:id="rId37"/>
+    <p:sldId id="292" r:id="rId38"/>
+    <p:sldId id="293" r:id="rId39"/>
   </p:sldIdLst>
-  <p:sldSz cx="12191695" cy="6858000" type="screen4x3"/>
+  <p:sldSz cx="12192000" cy="6858000"/>
   <p:notesSz cx="6858000" cy="9144000"/>
   <p:defaultTextStyle>
     <a:defPPr>
@@ -325,7 +325,8 @@
           <a:p>
             <a:fld id="{5BCAD085-E8A6-8845-BD4E-CB4CCA059FC4}" type="datetimeFigureOut">
               <a:rPr lang="en-US" smtClean="0"/>
-              <a:t>1/27/13</a:t>
+              <a:pPr/>
+              <a:t>8/8/2026</a:t>
             </a:fld>
             <a:endParaRPr lang="en-US"/>
           </a:p>
@@ -367,6 +368,7 @@
           <a:p>
             <a:fld id="{C1FF6DA9-008F-8B48-92A6-B652298478BF}" type="slidenum">
               <a:rPr lang="en-US" smtClean="0"/>
+              <a:pPr/>
               <a:t>‹#›</a:t>
             </a:fld>
             <a:endParaRPr lang="en-US"/>
@@ -376,7 +378,7 @@
     </p:spTree>
     <p:extLst>
       <p:ext uri="{BB962C8B-B14F-4D97-AF65-F5344CB8AC3E}">
-        <p14:creationId xmlns:p14="http://schemas.microsoft.com/office/powerpoint/2010/main" val="3168075583"/>
+        <p14:creationId xmlns:p14="http://schemas.microsoft.com/office/powerpoint/2010/main" xmlns="" val="3168075583"/>
       </p:ext>
     </p:extLst>
   </p:cSld>
@@ -495,7 +497,8 @@
           <a:p>
             <a:fld id="{5BCAD085-E8A6-8845-BD4E-CB4CCA059FC4}" type="datetimeFigureOut">
               <a:rPr lang="en-US" smtClean="0"/>
-              <a:t>1/27/13</a:t>
+              <a:pPr/>
+              <a:t>8/8/2026</a:t>
             </a:fld>
             <a:endParaRPr lang="en-US"/>
           </a:p>
@@ -537,6 +540,7 @@
           <a:p>
             <a:fld id="{C1FF6DA9-008F-8B48-92A6-B652298478BF}" type="slidenum">
               <a:rPr lang="en-US" smtClean="0"/>
+              <a:pPr/>
               <a:t>‹#›</a:t>
             </a:fld>
             <a:endParaRPr lang="en-US"/>
@@ -546,7 +550,7 @@
     </p:spTree>
     <p:extLst>
       <p:ext uri="{BB962C8B-B14F-4D97-AF65-F5344CB8AC3E}">
-        <p14:creationId xmlns:p14="http://schemas.microsoft.com/office/powerpoint/2010/main" val="2910927964"/>
+        <p14:creationId xmlns:p14="http://schemas.microsoft.com/office/powerpoint/2010/main" xmlns="" val="2910927964"/>
       </p:ext>
     </p:extLst>
   </p:cSld>
@@ -675,7 +679,8 @@
           <a:p>
             <a:fld id="{5BCAD085-E8A6-8845-BD4E-CB4CCA059FC4}" type="datetimeFigureOut">
               <a:rPr lang="en-US" smtClean="0"/>
-              <a:t>1/27/13</a:t>
+              <a:pPr/>
+              <a:t>8/8/2026</a:t>
             </a:fld>
             <a:endParaRPr lang="en-US"/>
           </a:p>
@@ -717,6 +722,7 @@
           <a:p>
             <a:fld id="{C1FF6DA9-008F-8B48-92A6-B652298478BF}" type="slidenum">
               <a:rPr lang="en-US" smtClean="0"/>
+              <a:pPr/>
               <a:t>‹#›</a:t>
             </a:fld>
             <a:endParaRPr lang="en-US"/>
@@ -726,7 +732,7 @@
     </p:spTree>
     <p:extLst>
       <p:ext uri="{BB962C8B-B14F-4D97-AF65-F5344CB8AC3E}">
-        <p14:creationId xmlns:p14="http://schemas.microsoft.com/office/powerpoint/2010/main" val="3612223792"/>
+        <p14:creationId xmlns:p14="http://schemas.microsoft.com/office/powerpoint/2010/main" xmlns="" val="3612223792"/>
       </p:ext>
     </p:extLst>
   </p:cSld>
@@ -845,7 +851,8 @@
           <a:p>
             <a:fld id="{5BCAD085-E8A6-8845-BD4E-CB4CCA059FC4}" type="datetimeFigureOut">
               <a:rPr lang="en-US" smtClean="0"/>
-              <a:t>1/27/13</a:t>
+              <a:pPr/>
+              <a:t>8/8/2026</a:t>
             </a:fld>
             <a:endParaRPr lang="en-US"/>
           </a:p>
@@ -887,6 +894,7 @@
           <a:p>
             <a:fld id="{C1FF6DA9-008F-8B48-92A6-B652298478BF}" type="slidenum">
               <a:rPr lang="en-US" smtClean="0"/>
+              <a:pPr/>
               <a:t>‹#›</a:t>
             </a:fld>
             <a:endParaRPr lang="en-US"/>
@@ -896,7 +904,7 @@
     </p:spTree>
     <p:extLst>
       <p:ext uri="{BB962C8B-B14F-4D97-AF65-F5344CB8AC3E}">
-        <p14:creationId xmlns:p14="http://schemas.microsoft.com/office/powerpoint/2010/main" val="2614314258"/>
+        <p14:creationId xmlns:p14="http://schemas.microsoft.com/office/powerpoint/2010/main" xmlns="" val="2614314258"/>
       </p:ext>
     </p:extLst>
   </p:cSld>
@@ -1091,7 +1099,8 @@
           <a:p>
             <a:fld id="{5BCAD085-E8A6-8845-BD4E-CB4CCA059FC4}" type="datetimeFigureOut">
               <a:rPr lang="en-US" smtClean="0"/>
-              <a:t>1/27/13</a:t>
+              <a:pPr/>
+              <a:t>8/8/2026</a:t>
             </a:fld>
             <a:endParaRPr lang="en-US"/>
           </a:p>
@@ -1133,6 +1142,7 @@
           <a:p>
             <a:fld id="{C1FF6DA9-008F-8B48-92A6-B652298478BF}" type="slidenum">
               <a:rPr lang="en-US" smtClean="0"/>
+              <a:pPr/>
               <a:t>‹#›</a:t>
             </a:fld>
             <a:endParaRPr lang="en-US"/>
@@ -1142,7 +1152,7 @@
     </p:spTree>
     <p:extLst>
       <p:ext uri="{BB962C8B-B14F-4D97-AF65-F5344CB8AC3E}">
-        <p14:creationId xmlns:p14="http://schemas.microsoft.com/office/powerpoint/2010/main" val="960648375"/>
+        <p14:creationId xmlns:p14="http://schemas.microsoft.com/office/powerpoint/2010/main" xmlns="" val="960648375"/>
       </p:ext>
     </p:extLst>
   </p:cSld>
@@ -1379,7 +1389,8 @@
           <a:p>
             <a:fld id="{5BCAD085-E8A6-8845-BD4E-CB4CCA059FC4}" type="datetimeFigureOut">
               <a:rPr lang="en-US" smtClean="0"/>
-              <a:t>1/27/13</a:t>
+              <a:pPr/>
+              <a:t>8/8/2026</a:t>
             </a:fld>
             <a:endParaRPr lang="en-US"/>
           </a:p>
@@ -1421,6 +1432,7 @@
           <a:p>
             <a:fld id="{C1FF6DA9-008F-8B48-92A6-B652298478BF}" type="slidenum">
               <a:rPr lang="en-US" smtClean="0"/>
+              <a:pPr/>
               <a:t>‹#›</a:t>
             </a:fld>
             <a:endParaRPr lang="en-US"/>
@@ -1430,7 +1442,7 @@
     </p:spTree>
     <p:extLst>
       <p:ext uri="{BB962C8B-B14F-4D97-AF65-F5344CB8AC3E}">
-        <p14:creationId xmlns:p14="http://schemas.microsoft.com/office/powerpoint/2010/main" val="2782244947"/>
+        <p14:creationId xmlns:p14="http://schemas.microsoft.com/office/powerpoint/2010/main" xmlns="" val="2782244947"/>
       </p:ext>
     </p:extLst>
   </p:cSld>
@@ -1801,7 +1813,8 @@
           <a:p>
             <a:fld id="{5BCAD085-E8A6-8845-BD4E-CB4CCA059FC4}" type="datetimeFigureOut">
               <a:rPr lang="en-US" smtClean="0"/>
-              <a:t>1/27/13</a:t>
+              <a:pPr/>
+              <a:t>8/8/2026</a:t>
             </a:fld>
             <a:endParaRPr lang="en-US"/>
           </a:p>
@@ -1843,6 +1856,7 @@
           <a:p>
             <a:fld id="{C1FF6DA9-008F-8B48-92A6-B652298478BF}" type="slidenum">
               <a:rPr lang="en-US" smtClean="0"/>
+              <a:pPr/>
               <a:t>‹#›</a:t>
             </a:fld>
             <a:endParaRPr lang="en-US"/>
@@ -1852,7 +1866,7 @@
     </p:spTree>
     <p:extLst>
       <p:ext uri="{BB962C8B-B14F-4D97-AF65-F5344CB8AC3E}">
-        <p14:creationId xmlns:p14="http://schemas.microsoft.com/office/powerpoint/2010/main" val="990158736"/>
+        <p14:creationId xmlns:p14="http://schemas.microsoft.com/office/powerpoint/2010/main" xmlns="" val="990158736"/>
       </p:ext>
     </p:extLst>
   </p:cSld>
@@ -1919,7 +1933,8 @@
           <a:p>
             <a:fld id="{5BCAD085-E8A6-8845-BD4E-CB4CCA059FC4}" type="datetimeFigureOut">
               <a:rPr lang="en-US" smtClean="0"/>
-              <a:t>1/27/13</a:t>
+              <a:pPr/>
+              <a:t>8/8/2026</a:t>
             </a:fld>
             <a:endParaRPr lang="en-US"/>
           </a:p>
@@ -1961,6 +1976,7 @@
           <a:p>
             <a:fld id="{C1FF6DA9-008F-8B48-92A6-B652298478BF}" type="slidenum">
               <a:rPr lang="en-US" smtClean="0"/>
+              <a:pPr/>
               <a:t>‹#›</a:t>
             </a:fld>
             <a:endParaRPr lang="en-US"/>
@@ -1970,7 +1986,7 @@
     </p:spTree>
     <p:extLst>
       <p:ext uri="{BB962C8B-B14F-4D97-AF65-F5344CB8AC3E}">
-        <p14:creationId xmlns:p14="http://schemas.microsoft.com/office/powerpoint/2010/main" val="727027711"/>
+        <p14:creationId xmlns:p14="http://schemas.microsoft.com/office/powerpoint/2010/main" xmlns="" val="727027711"/>
       </p:ext>
     </p:extLst>
   </p:cSld>
@@ -2014,7 +2030,8 @@
           <a:p>
             <a:fld id="{5BCAD085-E8A6-8845-BD4E-CB4CCA059FC4}" type="datetimeFigureOut">
               <a:rPr lang="en-US" smtClean="0"/>
-              <a:t>1/27/13</a:t>
+              <a:pPr/>
+              <a:t>8/8/2026</a:t>
             </a:fld>
             <a:endParaRPr lang="en-US"/>
           </a:p>
@@ -2056,6 +2073,7 @@
           <a:p>
             <a:fld id="{C1FF6DA9-008F-8B48-92A6-B652298478BF}" type="slidenum">
               <a:rPr lang="en-US" smtClean="0"/>
+              <a:pPr/>
               <a:t>‹#›</a:t>
             </a:fld>
             <a:endParaRPr lang="en-US"/>
@@ -2065,7 +2083,7 @@
     </p:spTree>
     <p:extLst>
       <p:ext uri="{BB962C8B-B14F-4D97-AF65-F5344CB8AC3E}">
-        <p14:creationId xmlns:p14="http://schemas.microsoft.com/office/powerpoint/2010/main" val="1212999818"/>
+        <p14:creationId xmlns:p14="http://schemas.microsoft.com/office/powerpoint/2010/main" xmlns="" val="1212999818"/>
       </p:ext>
     </p:extLst>
   </p:cSld>
@@ -2291,7 +2309,8 @@
           <a:p>
             <a:fld id="{5BCAD085-E8A6-8845-BD4E-CB4CCA059FC4}" type="datetimeFigureOut">
               <a:rPr lang="en-US" smtClean="0"/>
-              <a:t>1/27/13</a:t>
+              <a:pPr/>
+              <a:t>8/8/2026</a:t>
             </a:fld>
             <a:endParaRPr lang="en-US"/>
           </a:p>
@@ -2333,6 +2352,7 @@
           <a:p>
             <a:fld id="{C1FF6DA9-008F-8B48-92A6-B652298478BF}" type="slidenum">
               <a:rPr lang="en-US" smtClean="0"/>
+              <a:pPr/>
               <a:t>‹#›</a:t>
             </a:fld>
             <a:endParaRPr lang="en-US"/>
@@ -2342,7 +2362,7 @@
     </p:spTree>
     <p:extLst>
       <p:ext uri="{BB962C8B-B14F-4D97-AF65-F5344CB8AC3E}">
-        <p14:creationId xmlns:p14="http://schemas.microsoft.com/office/powerpoint/2010/main" val="1840726560"/>
+        <p14:creationId xmlns:p14="http://schemas.microsoft.com/office/powerpoint/2010/main" xmlns="" val="1840726560"/>
       </p:ext>
     </p:extLst>
   </p:cSld>
@@ -2544,7 +2564,8 @@
           <a:p>
             <a:fld id="{5BCAD085-E8A6-8845-BD4E-CB4CCA059FC4}" type="datetimeFigureOut">
               <a:rPr lang="en-US" smtClean="0"/>
-              <a:t>1/27/13</a:t>
+              <a:pPr/>
+              <a:t>8/8/2026</a:t>
             </a:fld>
             <a:endParaRPr lang="en-US"/>
           </a:p>
@@ -2586,6 +2607,7 @@
           <a:p>
             <a:fld id="{C1FF6DA9-008F-8B48-92A6-B652298478BF}" type="slidenum">
               <a:rPr lang="en-US" smtClean="0"/>
+              <a:pPr/>
               <a:t>‹#›</a:t>
             </a:fld>
             <a:endParaRPr lang="en-US"/>
@@ -2595,7 +2617,7 @@
     </p:spTree>
     <p:extLst>
       <p:ext uri="{BB962C8B-B14F-4D97-AF65-F5344CB8AC3E}">
-        <p14:creationId xmlns:p14="http://schemas.microsoft.com/office/powerpoint/2010/main" val="3889236939"/>
+        <p14:creationId xmlns:p14="http://schemas.microsoft.com/office/powerpoint/2010/main" xmlns="" val="3889236939"/>
       </p:ext>
     </p:extLst>
   </p:cSld>
@@ -2757,7 +2779,8 @@
           <a:p>
             <a:fld id="{5BCAD085-E8A6-8845-BD4E-CB4CCA059FC4}" type="datetimeFigureOut">
               <a:rPr lang="en-US" smtClean="0"/>
-              <a:t>1/27/13</a:t>
+              <a:pPr/>
+              <a:t>8/8/2026</a:t>
             </a:fld>
             <a:endParaRPr lang="en-US"/>
           </a:p>
@@ -2835,6 +2858,7 @@
           <a:p>
             <a:fld id="{C1FF6DA9-008F-8B48-92A6-B652298478BF}" type="slidenum">
               <a:rPr lang="en-US" smtClean="0"/>
+              <a:pPr/>
               <a:t>‹#›</a:t>
             </a:fld>
             <a:endParaRPr lang="en-US"/>
@@ -2844,7 +2868,7 @@
     </p:spTree>
     <p:extLst>
       <p:ext uri="{BB962C8B-B14F-4D97-AF65-F5344CB8AC3E}">
-        <p14:creationId xmlns:p14="http://schemas.microsoft.com/office/powerpoint/2010/main" val="2209977519"/>
+        <p14:creationId xmlns:p14="http://schemas.microsoft.com/office/powerpoint/2010/main" xmlns="" val="2209977519"/>
       </p:ext>
     </p:extLst>
   </p:cSld>
@@ -3116,7 +3140,7 @@
 </file>
 
 <file path=ppt/slides/slide1.xml><?xml version="1.0" encoding="utf-8"?>
-<p:sld xmlns:a="http://schemas.openxmlformats.org/drawingml/2006/main" xmlns:p="http://schemas.openxmlformats.org/presentationml/2006/main" xmlns:r="http://schemas.openxmlformats.org/officeDocument/2006/relationships">
+<p:sld xmlns:a="http://schemas.openxmlformats.org/drawingml/2006/main" xmlns:r="http://schemas.openxmlformats.org/officeDocument/2006/relationships" xmlns:p="http://schemas.openxmlformats.org/presentationml/2006/main">
   <p:cSld>
     <p:spTree>
       <p:nvGrpSpPr>
@@ -3124,7 +3148,14 @@
         <p:cNvGrpSpPr/>
         <p:nvPr/>
       </p:nvGrpSpPr>
-      <p:grpSpPr/>
+      <p:grpSpPr>
+        <a:xfrm>
+          <a:off x="0" y="0"/>
+          <a:ext cx="0" cy="0"/>
+          <a:chOff x="0" y="0"/>
+          <a:chExt cx="0" cy="0"/>
+        </a:xfrm>
+      </p:grpSpPr>
       <p:sp>
         <p:nvSpPr>
           <p:cNvPr id="2" name="Rectangle 1"/>
@@ -3166,6 +3197,7 @@
           <a:lstStyle/>
           <a:p>
             <a:pPr algn="ctr"/>
+            <a:endParaRPr/>
           </a:p>
         </p:txBody>
       </p:sp>
@@ -3210,6 +3242,7 @@
           <a:lstStyle/>
           <a:p>
             <a:pPr algn="ctr"/>
+            <a:endParaRPr/>
           </a:p>
         </p:txBody>
       </p:sp>
@@ -3254,6 +3287,7 @@
           <a:lstStyle/>
           <a:p>
             <a:pPr algn="ctr"/>
+            <a:endParaRPr/>
           </a:p>
         </p:txBody>
       </p:sp>
@@ -3434,6 +3468,7 @@
           <a:lstStyle/>
           <a:p>
             <a:pPr algn="ctr"/>
+            <a:endParaRPr/>
           </a:p>
         </p:txBody>
       </p:sp>
@@ -3579,11 +3614,18 @@
   <p:clrMapOvr>
     <a:masterClrMapping/>
   </p:clrMapOvr>
+  <p:timing>
+    <p:tnLst>
+      <p:par>
+        <p:cTn id="1" dur="indefinite" restart="never" nodeType="tmRoot"/>
+      </p:par>
+    </p:tnLst>
+  </p:timing>
 </p:sld>
 </file>
 
 <file path=ppt/slides/slide10.xml><?xml version="1.0" encoding="utf-8"?>
-<p:sld xmlns:a="http://schemas.openxmlformats.org/drawingml/2006/main" xmlns:p="http://schemas.openxmlformats.org/presentationml/2006/main" xmlns:r="http://schemas.openxmlformats.org/officeDocument/2006/relationships">
+<p:sld xmlns:a="http://schemas.openxmlformats.org/drawingml/2006/main" xmlns:r="http://schemas.openxmlformats.org/officeDocument/2006/relationships" xmlns:p="http://schemas.openxmlformats.org/presentationml/2006/main">
   <p:cSld>
     <p:spTree>
       <p:nvGrpSpPr>
@@ -3591,7 +3633,14 @@
         <p:cNvGrpSpPr/>
         <p:nvPr/>
       </p:nvGrpSpPr>
-      <p:grpSpPr/>
+      <p:grpSpPr>
+        <a:xfrm>
+          <a:off x="0" y="0"/>
+          <a:ext cx="0" cy="0"/>
+          <a:chOff x="0" y="0"/>
+          <a:chExt cx="0" cy="0"/>
+        </a:xfrm>
+      </p:grpSpPr>
       <p:sp>
         <p:nvSpPr>
           <p:cNvPr id="2" name="Rectangle 1"/>
@@ -3633,6 +3682,7 @@
           <a:lstStyle/>
           <a:p>
             <a:pPr algn="ctr"/>
+            <a:endParaRPr/>
           </a:p>
         </p:txBody>
       </p:sp>
@@ -3677,6 +3727,7 @@
           <a:lstStyle/>
           <a:p>
             <a:pPr algn="ctr"/>
+            <a:endParaRPr/>
           </a:p>
         </p:txBody>
       </p:sp>
@@ -3721,6 +3772,7 @@
           <a:lstStyle/>
           <a:p>
             <a:pPr algn="ctr"/>
+            <a:endParaRPr/>
           </a:p>
         </p:txBody>
       </p:sp>
@@ -3765,6 +3817,7 @@
           <a:lstStyle/>
           <a:p>
             <a:pPr algn="ctr"/>
+            <a:endParaRPr/>
           </a:p>
         </p:txBody>
       </p:sp>
@@ -3975,6 +4028,7 @@
           <a:lstStyle/>
           <a:p>
             <a:pPr algn="ctr"/>
+            <a:endParaRPr/>
           </a:p>
         </p:txBody>
       </p:sp>
@@ -4063,7 +4117,7 @@
           </a:fontRef>
         </p:style>
         <p:txBody>
-          <a:bodyPr rtlCol="0" anchor="ctr" wrap="none" lIns="0" rIns="0" tIns="0" bIns="0"/>
+          <a:bodyPr wrap="none" lIns="0" tIns="0" rIns="0" bIns="0" rtlCol="0" anchor="ctr"/>
           <a:lstStyle/>
           <a:p>
             <a:pPr algn="ctr">
@@ -4091,7 +4145,7 @@
         <p:spPr>
           <a:xfrm>
             <a:off x="502920" y="2148840"/>
-            <a:ext cx="11201400" cy="1481328"/>
+            <a:ext cx="7850505" cy="1481328"/>
           </a:xfrm>
           <a:prstGeom prst="rect">
             <a:avLst/>
@@ -4125,6 +4179,7 @@
           <a:lstStyle/>
           <a:p>
             <a:pPr algn="ctr"/>
+            <a:endParaRPr/>
           </a:p>
         </p:txBody>
       </p:sp>
@@ -4136,8 +4191,8 @@
         </p:nvSpPr>
         <p:spPr>
           <a:xfrm>
-            <a:off x="713232" y="2231136"/>
-            <a:ext cx="10789920" cy="1353312"/>
+            <a:off x="713233" y="2231136"/>
+            <a:ext cx="7562119" cy="1184940"/>
           </a:xfrm>
           <a:prstGeom prst="rect">
             <a:avLst/>
@@ -4196,7 +4251,7 @@
         <p:spPr>
           <a:xfrm>
             <a:off x="502920" y="3767328"/>
-            <a:ext cx="11201400" cy="470916"/>
+            <a:ext cx="7850505" cy="470916"/>
           </a:xfrm>
           <a:prstGeom prst="rect">
             <a:avLst/>
@@ -4230,6 +4285,7 @@
           <a:lstStyle/>
           <a:p>
             <a:pPr algn="ctr"/>
+            <a:endParaRPr/>
           </a:p>
         </p:txBody>
       </p:sp>
@@ -4274,6 +4330,7 @@
           <a:lstStyle/>
           <a:p>
             <a:pPr algn="ctr"/>
+            <a:endParaRPr/>
           </a:p>
         </p:txBody>
       </p:sp>
@@ -4326,8 +4383,8 @@
         </p:nvSpPr>
         <p:spPr>
           <a:xfrm>
-            <a:off x="1170432" y="3858768"/>
-            <a:ext cx="10424160" cy="411480"/>
+            <a:off x="1170433" y="3858768"/>
+            <a:ext cx="7305776" cy="284693"/>
           </a:xfrm>
           <a:prstGeom prst="rect">
             <a:avLst/>
@@ -4368,7 +4425,7 @@
         <p:spPr>
           <a:xfrm>
             <a:off x="502920" y="4293108"/>
-            <a:ext cx="11201400" cy="470916"/>
+            <a:ext cx="7850505" cy="470916"/>
           </a:xfrm>
           <a:prstGeom prst="rect">
             <a:avLst/>
@@ -4402,6 +4459,7 @@
           <a:lstStyle/>
           <a:p>
             <a:pPr algn="ctr"/>
+            <a:endParaRPr/>
           </a:p>
         </p:txBody>
       </p:sp>
@@ -4446,6 +4504,7 @@
           <a:lstStyle/>
           <a:p>
             <a:pPr algn="ctr"/>
+            <a:endParaRPr/>
           </a:p>
         </p:txBody>
       </p:sp>
@@ -4498,8 +4557,8 @@
         </p:nvSpPr>
         <p:spPr>
           <a:xfrm>
-            <a:off x="1170432" y="4384548"/>
-            <a:ext cx="10424160" cy="411480"/>
+            <a:off x="1170433" y="4384548"/>
+            <a:ext cx="7305776" cy="284693"/>
           </a:xfrm>
           <a:prstGeom prst="rect">
             <a:avLst/>
@@ -4540,7 +4599,7 @@
         <p:spPr>
           <a:xfrm>
             <a:off x="502920" y="4818888"/>
-            <a:ext cx="11201400" cy="470916"/>
+            <a:ext cx="7850505" cy="470916"/>
           </a:xfrm>
           <a:prstGeom prst="rect">
             <a:avLst/>
@@ -4574,6 +4633,7 @@
           <a:lstStyle/>
           <a:p>
             <a:pPr algn="ctr"/>
+            <a:endParaRPr/>
           </a:p>
         </p:txBody>
       </p:sp>
@@ -4618,6 +4678,7 @@
           <a:lstStyle/>
           <a:p>
             <a:pPr algn="ctr"/>
+            <a:endParaRPr/>
           </a:p>
         </p:txBody>
       </p:sp>
@@ -4670,8 +4731,8 @@
         </p:nvSpPr>
         <p:spPr>
           <a:xfrm>
-            <a:off x="1170432" y="4910328"/>
-            <a:ext cx="10424160" cy="411480"/>
+            <a:off x="1170433" y="4910328"/>
+            <a:ext cx="7305776" cy="477054"/>
           </a:xfrm>
           <a:prstGeom prst="rect">
             <a:avLst/>
@@ -4712,7 +4773,7 @@
         <p:spPr>
           <a:xfrm>
             <a:off x="502920" y="5344668"/>
-            <a:ext cx="11201400" cy="470916"/>
+            <a:ext cx="7850505" cy="470916"/>
           </a:xfrm>
           <a:prstGeom prst="rect">
             <a:avLst/>
@@ -4746,6 +4807,7 @@
           <a:lstStyle/>
           <a:p>
             <a:pPr algn="ctr"/>
+            <a:endParaRPr/>
           </a:p>
         </p:txBody>
       </p:sp>
@@ -4790,6 +4852,7 @@
           <a:lstStyle/>
           <a:p>
             <a:pPr algn="ctr"/>
+            <a:endParaRPr/>
           </a:p>
         </p:txBody>
       </p:sp>
@@ -4842,8 +4905,8 @@
         </p:nvSpPr>
         <p:spPr>
           <a:xfrm>
-            <a:off x="1170432" y="5436108"/>
-            <a:ext cx="10424160" cy="411480"/>
+            <a:off x="1170433" y="5436108"/>
+            <a:ext cx="7305776" cy="477054"/>
           </a:xfrm>
           <a:prstGeom prst="rect">
             <a:avLst/>
@@ -4884,7 +4947,7 @@
         <p:spPr>
           <a:xfrm>
             <a:off x="502920" y="5870448"/>
-            <a:ext cx="11201400" cy="470916"/>
+            <a:ext cx="7850505" cy="470916"/>
           </a:xfrm>
           <a:prstGeom prst="rect">
             <a:avLst/>
@@ -4918,6 +4981,7 @@
           <a:lstStyle/>
           <a:p>
             <a:pPr algn="ctr"/>
+            <a:endParaRPr/>
           </a:p>
         </p:txBody>
       </p:sp>
@@ -4962,6 +5026,7 @@
           <a:lstStyle/>
           <a:p>
             <a:pPr algn="ctr"/>
+            <a:endParaRPr/>
           </a:p>
         </p:txBody>
       </p:sp>
@@ -5014,8 +5079,8 @@
         </p:nvSpPr>
         <p:spPr>
           <a:xfrm>
-            <a:off x="1170432" y="5961888"/>
-            <a:ext cx="10424160" cy="411480"/>
+            <a:off x="1170433" y="5961888"/>
+            <a:ext cx="7305776" cy="284693"/>
           </a:xfrm>
           <a:prstGeom prst="rect">
             <a:avLst/>
@@ -5085,6 +5150,153 @@
               </a:rPr>
               <a:t>GA-BAND-1 · Ulusal Değerlendirme Toplantısı · 09.08.2026</a:t>
             </a:r>
+          </a:p>
+        </p:txBody>
+      </p:sp>
+      <p:pic>
+        <p:nvPicPr>
+          <p:cNvPr id="36" name="Picture 3"/>
+          <p:cNvPicPr>
+            <a:picLocks noChangeAspect="1" noChangeArrowheads="1"/>
+          </p:cNvPicPr>
+          <p:nvPr/>
+        </p:nvPicPr>
+        <p:blipFill>
+          <a:blip r:embed="rId3"/>
+          <a:srcRect/>
+          <a:stretch>
+            <a:fillRect/>
+          </a:stretch>
+        </p:blipFill>
+        <p:spPr bwMode="auto">
+          <a:xfrm>
+            <a:off x="8495857" y="2143125"/>
+            <a:ext cx="3626299" cy="3847424"/>
+          </a:xfrm>
+          <a:prstGeom prst="rect">
+            <a:avLst/>
+          </a:prstGeom>
+          <a:noFill/>
+          <a:ln w="9525">
+            <a:noFill/>
+            <a:miter lim="800000"/>
+            <a:headEnd/>
+            <a:tailEnd/>
+          </a:ln>
+          <a:effectLst/>
+        </p:spPr>
+      </p:pic>
+      <p:sp>
+        <p:nvSpPr>
+          <p:cNvPr id="37" name="36 Sağ Ok"/>
+          <p:cNvSpPr/>
+          <p:nvPr/>
+        </p:nvSpPr>
+        <p:spPr>
+          <a:xfrm rot="4052593">
+            <a:off x="11610532" y="4332965"/>
+            <a:ext cx="258216" cy="241087"/>
+          </a:xfrm>
+          <a:prstGeom prst="rightArrow">
+            <a:avLst/>
+          </a:prstGeom>
+        </p:spPr>
+        <p:style>
+          <a:lnRef idx="1">
+            <a:schemeClr val="accent2"/>
+          </a:lnRef>
+          <a:fillRef idx="3">
+            <a:schemeClr val="accent2"/>
+          </a:fillRef>
+          <a:effectRef idx="2">
+            <a:schemeClr val="accent2"/>
+          </a:effectRef>
+          <a:fontRef idx="minor">
+            <a:schemeClr val="lt1"/>
+          </a:fontRef>
+        </p:style>
+        <p:txBody>
+          <a:bodyPr rtlCol="0" anchor="ctr"/>
+          <a:lstStyle/>
+          <a:p>
+            <a:pPr algn="ctr"/>
+            <a:endParaRPr lang="tr-TR"/>
+          </a:p>
+        </p:txBody>
+      </p:sp>
+      <p:sp>
+        <p:nvSpPr>
+          <p:cNvPr id="38" name="37 Sağ Ok"/>
+          <p:cNvSpPr/>
+          <p:nvPr/>
+        </p:nvSpPr>
+        <p:spPr>
+          <a:xfrm rot="4052593">
+            <a:off x="10221189" y="3961490"/>
+            <a:ext cx="258216" cy="241087"/>
+          </a:xfrm>
+          <a:prstGeom prst="rightArrow">
+            <a:avLst/>
+          </a:prstGeom>
+        </p:spPr>
+        <p:style>
+          <a:lnRef idx="1">
+            <a:schemeClr val="accent2"/>
+          </a:lnRef>
+          <a:fillRef idx="3">
+            <a:schemeClr val="accent2"/>
+          </a:fillRef>
+          <a:effectRef idx="2">
+            <a:schemeClr val="accent2"/>
+          </a:effectRef>
+          <a:fontRef idx="minor">
+            <a:schemeClr val="lt1"/>
+          </a:fontRef>
+        </p:style>
+        <p:txBody>
+          <a:bodyPr rtlCol="0" anchor="ctr"/>
+          <a:lstStyle/>
+          <a:p>
+            <a:pPr algn="ctr"/>
+            <a:endParaRPr lang="tr-TR"/>
+          </a:p>
+        </p:txBody>
+      </p:sp>
+      <p:sp>
+        <p:nvSpPr>
+          <p:cNvPr id="39" name="38 Sağ Ok"/>
+          <p:cNvSpPr/>
+          <p:nvPr/>
+        </p:nvSpPr>
+        <p:spPr>
+          <a:xfrm rot="4052593">
+            <a:off x="10221189" y="4892507"/>
+            <a:ext cx="258216" cy="241087"/>
+          </a:xfrm>
+          <a:prstGeom prst="rightArrow">
+            <a:avLst/>
+          </a:prstGeom>
+        </p:spPr>
+        <p:style>
+          <a:lnRef idx="1">
+            <a:schemeClr val="accent2"/>
+          </a:lnRef>
+          <a:fillRef idx="3">
+            <a:schemeClr val="accent2"/>
+          </a:fillRef>
+          <a:effectRef idx="2">
+            <a:schemeClr val="accent2"/>
+          </a:effectRef>
+          <a:fontRef idx="minor">
+            <a:schemeClr val="lt1"/>
+          </a:fontRef>
+        </p:style>
+        <p:txBody>
+          <a:bodyPr rtlCol="0" anchor="ctr"/>
+          <a:lstStyle/>
+          <a:p>
+            <a:pPr algn="ctr"/>
+            <a:endParaRPr lang="tr-TR"/>
           </a:p>
         </p:txBody>
       </p:sp>
@@ -5093,11 +5305,18 @@
   <p:clrMapOvr>
     <a:masterClrMapping/>
   </p:clrMapOvr>
+  <p:timing>
+    <p:tnLst>
+      <p:par>
+        <p:cTn id="1" dur="indefinite" restart="never" nodeType="tmRoot"/>
+      </p:par>
+    </p:tnLst>
+  </p:timing>
 </p:sld>
 </file>
 
 <file path=ppt/slides/slide11.xml><?xml version="1.0" encoding="utf-8"?>
-<p:sld xmlns:a="http://schemas.openxmlformats.org/drawingml/2006/main" xmlns:p="http://schemas.openxmlformats.org/presentationml/2006/main" xmlns:r="http://schemas.openxmlformats.org/officeDocument/2006/relationships">
+<p:sld xmlns:a="http://schemas.openxmlformats.org/drawingml/2006/main" xmlns:r="http://schemas.openxmlformats.org/officeDocument/2006/relationships" xmlns:p="http://schemas.openxmlformats.org/presentationml/2006/main">
   <p:cSld>
     <p:spTree>
       <p:nvGrpSpPr>
@@ -5105,7 +5324,14 @@
         <p:cNvGrpSpPr/>
         <p:nvPr/>
       </p:nvGrpSpPr>
-      <p:grpSpPr/>
+      <p:grpSpPr>
+        <a:xfrm>
+          <a:off x="0" y="0"/>
+          <a:ext cx="0" cy="0"/>
+          <a:chOff x="0" y="0"/>
+          <a:chExt cx="0" cy="0"/>
+        </a:xfrm>
+      </p:grpSpPr>
       <p:sp>
         <p:nvSpPr>
           <p:cNvPr id="2" name="Rectangle 1"/>
@@ -5147,6 +5373,7 @@
           <a:lstStyle/>
           <a:p>
             <a:pPr algn="ctr"/>
+            <a:endParaRPr/>
           </a:p>
         </p:txBody>
       </p:sp>
@@ -5191,6 +5418,7 @@
           <a:lstStyle/>
           <a:p>
             <a:pPr algn="ctr"/>
+            <a:endParaRPr/>
           </a:p>
         </p:txBody>
       </p:sp>
@@ -5235,6 +5463,7 @@
           <a:lstStyle/>
           <a:p>
             <a:pPr algn="ctr"/>
+            <a:endParaRPr/>
           </a:p>
         </p:txBody>
       </p:sp>
@@ -5279,6 +5508,7 @@
           <a:lstStyle/>
           <a:p>
             <a:pPr algn="ctr"/>
+            <a:endParaRPr/>
           </a:p>
         </p:txBody>
       </p:sp>
@@ -5489,6 +5719,7 @@
           <a:lstStyle/>
           <a:p>
             <a:pPr algn="ctr"/>
+            <a:endParaRPr/>
           </a:p>
         </p:txBody>
       </p:sp>
@@ -5577,7 +5808,7 @@
           </a:fontRef>
         </p:style>
         <p:txBody>
-          <a:bodyPr rtlCol="0" anchor="ctr" wrap="none" lIns="0" rIns="0" tIns="0" bIns="0"/>
+          <a:bodyPr wrap="none" lIns="0" tIns="0" rIns="0" bIns="0" rtlCol="0" anchor="ctr"/>
           <a:lstStyle/>
           <a:p>
             <a:pPr algn="ctr">
@@ -5605,7 +5836,7 @@
         <p:spPr>
           <a:xfrm>
             <a:off x="502920" y="2148840"/>
-            <a:ext cx="11201400" cy="1115568"/>
+            <a:ext cx="7728802" cy="1115568"/>
           </a:xfrm>
           <a:prstGeom prst="rect">
             <a:avLst/>
@@ -5639,6 +5870,7 @@
           <a:lstStyle/>
           <a:p>
             <a:pPr algn="ctr"/>
+            <a:endParaRPr/>
           </a:p>
         </p:txBody>
       </p:sp>
@@ -5650,8 +5882,8 @@
         </p:nvSpPr>
         <p:spPr>
           <a:xfrm>
-            <a:off x="713232" y="2231136"/>
-            <a:ext cx="10789920" cy="987552"/>
+            <a:off x="713231" y="2231136"/>
+            <a:ext cx="7444887" cy="684803"/>
           </a:xfrm>
           <a:prstGeom prst="rect">
             <a:avLst/>
@@ -5710,7 +5942,7 @@
         <p:spPr>
           <a:xfrm>
             <a:off x="502920" y="3429000"/>
-            <a:ext cx="11201400" cy="548640"/>
+            <a:ext cx="7728802" cy="548640"/>
           </a:xfrm>
           <a:prstGeom prst="rect">
             <a:avLst/>
@@ -5744,6 +5976,7 @@
           <a:lstStyle/>
           <a:p>
             <a:pPr algn="ctr"/>
+            <a:endParaRPr/>
           </a:p>
         </p:txBody>
       </p:sp>
@@ -5788,6 +6021,7 @@
           <a:lstStyle/>
           <a:p>
             <a:pPr algn="ctr"/>
+            <a:endParaRPr/>
           </a:p>
         </p:txBody>
       </p:sp>
@@ -5841,7 +6075,7 @@
         <p:spPr>
           <a:xfrm>
             <a:off x="1170432" y="3520440"/>
-            <a:ext cx="10424160" cy="411480"/>
+            <a:ext cx="7192518" cy="284693"/>
           </a:xfrm>
           <a:prstGeom prst="rect">
             <a:avLst/>
@@ -5882,7 +6116,7 @@
         <p:spPr>
           <a:xfrm>
             <a:off x="502920" y="4032504"/>
-            <a:ext cx="11201400" cy="548640"/>
+            <a:ext cx="7728802" cy="548640"/>
           </a:xfrm>
           <a:prstGeom prst="rect">
             <a:avLst/>
@@ -5916,6 +6150,7 @@
           <a:lstStyle/>
           <a:p>
             <a:pPr algn="ctr"/>
+            <a:endParaRPr/>
           </a:p>
         </p:txBody>
       </p:sp>
@@ -5960,6 +6195,7 @@
           <a:lstStyle/>
           <a:p>
             <a:pPr algn="ctr"/>
+            <a:endParaRPr/>
           </a:p>
         </p:txBody>
       </p:sp>
@@ -6013,7 +6249,7 @@
         <p:spPr>
           <a:xfrm>
             <a:off x="1170432" y="4123944"/>
-            <a:ext cx="10424160" cy="411480"/>
+            <a:ext cx="7192518" cy="284693"/>
           </a:xfrm>
           <a:prstGeom prst="rect">
             <a:avLst/>
@@ -6054,7 +6290,7 @@
         <p:spPr>
           <a:xfrm>
             <a:off x="502920" y="4636008"/>
-            <a:ext cx="11201400" cy="548640"/>
+            <a:ext cx="7728802" cy="548640"/>
           </a:xfrm>
           <a:prstGeom prst="rect">
             <a:avLst/>
@@ -6088,6 +6324,7 @@
           <a:lstStyle/>
           <a:p>
             <a:pPr algn="ctr"/>
+            <a:endParaRPr/>
           </a:p>
         </p:txBody>
       </p:sp>
@@ -6132,6 +6369,7 @@
           <a:lstStyle/>
           <a:p>
             <a:pPr algn="ctr"/>
+            <a:endParaRPr/>
           </a:p>
         </p:txBody>
       </p:sp>
@@ -6185,7 +6423,7 @@
         <p:spPr>
           <a:xfrm>
             <a:off x="1170432" y="4727448"/>
-            <a:ext cx="10424160" cy="411480"/>
+            <a:ext cx="7192518" cy="477054"/>
           </a:xfrm>
           <a:prstGeom prst="rect">
             <a:avLst/>
@@ -6226,7 +6464,7 @@
         <p:spPr>
           <a:xfrm>
             <a:off x="502920" y="5239512"/>
-            <a:ext cx="11201400" cy="548640"/>
+            <a:ext cx="7728802" cy="548640"/>
           </a:xfrm>
           <a:prstGeom prst="rect">
             <a:avLst/>
@@ -6260,6 +6498,7 @@
           <a:lstStyle/>
           <a:p>
             <a:pPr algn="ctr"/>
+            <a:endParaRPr/>
           </a:p>
         </p:txBody>
       </p:sp>
@@ -6304,6 +6543,7 @@
           <a:lstStyle/>
           <a:p>
             <a:pPr algn="ctr"/>
+            <a:endParaRPr/>
           </a:p>
         </p:txBody>
       </p:sp>
@@ -6357,7 +6597,7 @@
         <p:spPr>
           <a:xfrm>
             <a:off x="1170432" y="5330952"/>
-            <a:ext cx="10424160" cy="411480"/>
+            <a:ext cx="7192518" cy="477054"/>
           </a:xfrm>
           <a:prstGeom prst="rect">
             <a:avLst/>
@@ -6398,7 +6638,7 @@
         <p:spPr>
           <a:xfrm>
             <a:off x="502920" y="5843016"/>
-            <a:ext cx="11201400" cy="548640"/>
+            <a:ext cx="7728802" cy="548640"/>
           </a:xfrm>
           <a:prstGeom prst="rect">
             <a:avLst/>
@@ -6432,6 +6672,7 @@
           <a:lstStyle/>
           <a:p>
             <a:pPr algn="ctr"/>
+            <a:endParaRPr/>
           </a:p>
         </p:txBody>
       </p:sp>
@@ -6476,6 +6717,7 @@
           <a:lstStyle/>
           <a:p>
             <a:pPr algn="ctr"/>
+            <a:endParaRPr/>
           </a:p>
         </p:txBody>
       </p:sp>
@@ -6529,7 +6771,7 @@
         <p:spPr>
           <a:xfrm>
             <a:off x="1170432" y="5934456"/>
-            <a:ext cx="10424160" cy="411480"/>
+            <a:ext cx="7192518" cy="284693"/>
           </a:xfrm>
           <a:prstGeom prst="rect">
             <a:avLst/>
@@ -6599,6 +6841,77 @@
               </a:rPr>
               <a:t>GA-RX · Ulusal Değerlendirme Toplantısı · 09.08.2026</a:t>
             </a:r>
+          </a:p>
+        </p:txBody>
+      </p:sp>
+      <p:pic>
+        <p:nvPicPr>
+          <p:cNvPr id="38" name="Picture 3"/>
+          <p:cNvPicPr>
+            <a:picLocks noChangeAspect="1" noChangeArrowheads="1"/>
+          </p:cNvPicPr>
+          <p:nvPr/>
+        </p:nvPicPr>
+        <p:blipFill>
+          <a:blip r:embed="rId3"/>
+          <a:srcRect/>
+          <a:stretch>
+            <a:fillRect/>
+          </a:stretch>
+        </p:blipFill>
+        <p:spPr bwMode="auto">
+          <a:xfrm>
+            <a:off x="8495857" y="2143125"/>
+            <a:ext cx="3626299" cy="3847424"/>
+          </a:xfrm>
+          <a:prstGeom prst="rect">
+            <a:avLst/>
+          </a:prstGeom>
+          <a:noFill/>
+          <a:ln w="9525">
+            <a:noFill/>
+            <a:miter lim="800000"/>
+            <a:headEnd/>
+            <a:tailEnd/>
+          </a:ln>
+          <a:effectLst/>
+        </p:spPr>
+      </p:pic>
+      <p:sp>
+        <p:nvSpPr>
+          <p:cNvPr id="39" name="38 Sağ Ok"/>
+          <p:cNvSpPr/>
+          <p:nvPr/>
+        </p:nvSpPr>
+        <p:spPr>
+          <a:xfrm rot="4052593">
+            <a:off x="8673568" y="3261965"/>
+            <a:ext cx="258216" cy="241087"/>
+          </a:xfrm>
+          <a:prstGeom prst="rightArrow">
+            <a:avLst/>
+          </a:prstGeom>
+        </p:spPr>
+        <p:style>
+          <a:lnRef idx="1">
+            <a:schemeClr val="accent2"/>
+          </a:lnRef>
+          <a:fillRef idx="3">
+            <a:schemeClr val="accent2"/>
+          </a:fillRef>
+          <a:effectRef idx="2">
+            <a:schemeClr val="accent2"/>
+          </a:effectRef>
+          <a:fontRef idx="minor">
+            <a:schemeClr val="lt1"/>
+          </a:fontRef>
+        </p:style>
+        <p:txBody>
+          <a:bodyPr rtlCol="0" anchor="ctr"/>
+          <a:lstStyle/>
+          <a:p>
+            <a:pPr algn="ctr"/>
+            <a:endParaRPr lang="tr-TR"/>
           </a:p>
         </p:txBody>
       </p:sp>
@@ -6607,11 +6920,18 @@
   <p:clrMapOvr>
     <a:masterClrMapping/>
   </p:clrMapOvr>
+  <p:timing>
+    <p:tnLst>
+      <p:par>
+        <p:cTn id="1" dur="indefinite" restart="never" nodeType="tmRoot"/>
+      </p:par>
+    </p:tnLst>
+  </p:timing>
 </p:sld>
 </file>
 
 <file path=ppt/slides/slide12.xml><?xml version="1.0" encoding="utf-8"?>
-<p:sld xmlns:a="http://schemas.openxmlformats.org/drawingml/2006/main" xmlns:p="http://schemas.openxmlformats.org/presentationml/2006/main" xmlns:r="http://schemas.openxmlformats.org/officeDocument/2006/relationships">
+<p:sld xmlns:a="http://schemas.openxmlformats.org/drawingml/2006/main" xmlns:r="http://schemas.openxmlformats.org/officeDocument/2006/relationships" xmlns:p="http://schemas.openxmlformats.org/presentationml/2006/main">
   <p:cSld>
     <p:spTree>
       <p:nvGrpSpPr>
@@ -6619,7 +6939,14 @@
         <p:cNvGrpSpPr/>
         <p:nvPr/>
       </p:nvGrpSpPr>
-      <p:grpSpPr/>
+      <p:grpSpPr>
+        <a:xfrm>
+          <a:off x="0" y="0"/>
+          <a:ext cx="0" cy="0"/>
+          <a:chOff x="0" y="0"/>
+          <a:chExt cx="0" cy="0"/>
+        </a:xfrm>
+      </p:grpSpPr>
       <p:sp>
         <p:nvSpPr>
           <p:cNvPr id="2" name="Rectangle 1"/>
@@ -6661,6 +6988,7 @@
           <a:lstStyle/>
           <a:p>
             <a:pPr algn="ctr"/>
+            <a:endParaRPr/>
           </a:p>
         </p:txBody>
       </p:sp>
@@ -6705,6 +7033,7 @@
           <a:lstStyle/>
           <a:p>
             <a:pPr algn="ctr"/>
+            <a:endParaRPr/>
           </a:p>
         </p:txBody>
       </p:sp>
@@ -6749,6 +7078,7 @@
           <a:lstStyle/>
           <a:p>
             <a:pPr algn="ctr"/>
+            <a:endParaRPr/>
           </a:p>
         </p:txBody>
       </p:sp>
@@ -6793,6 +7123,7 @@
           <a:lstStyle/>
           <a:p>
             <a:pPr algn="ctr"/>
+            <a:endParaRPr/>
           </a:p>
         </p:txBody>
       </p:sp>
@@ -7003,6 +7334,7 @@
           <a:lstStyle/>
           <a:p>
             <a:pPr algn="ctr"/>
+            <a:endParaRPr/>
           </a:p>
         </p:txBody>
       </p:sp>
@@ -7091,7 +7423,7 @@
           </a:fontRef>
         </p:style>
         <p:txBody>
-          <a:bodyPr rtlCol="0" anchor="ctr" wrap="none" lIns="0" rIns="0" tIns="0" bIns="0"/>
+          <a:bodyPr wrap="none" lIns="0" tIns="0" rIns="0" bIns="0" rtlCol="0" anchor="ctr"/>
           <a:lstStyle/>
           <a:p>
             <a:pPr algn="ctr">
@@ -7119,7 +7451,7 @@
         <p:spPr>
           <a:xfrm>
             <a:off x="502920" y="2148840"/>
-            <a:ext cx="11201400" cy="1298448"/>
+            <a:ext cx="7936230" cy="1298448"/>
           </a:xfrm>
           <a:prstGeom prst="rect">
             <a:avLst/>
@@ -7153,6 +7485,7 @@
           <a:lstStyle/>
           <a:p>
             <a:pPr algn="ctr"/>
+            <a:endParaRPr/>
           </a:p>
         </p:txBody>
       </p:sp>
@@ -7165,7 +7498,7 @@
         <p:spPr>
           <a:xfrm>
             <a:off x="713232" y="2231136"/>
-            <a:ext cx="10789920" cy="1170432"/>
+            <a:ext cx="7644695" cy="854080"/>
           </a:xfrm>
           <a:prstGeom prst="rect">
             <a:avLst/>
@@ -7224,7 +7557,7 @@
         <p:spPr>
           <a:xfrm>
             <a:off x="502920" y="3584448"/>
-            <a:ext cx="11201400" cy="507492"/>
+            <a:ext cx="7936230" cy="507492"/>
           </a:xfrm>
           <a:prstGeom prst="rect">
             <a:avLst/>
@@ -7258,6 +7591,7 @@
           <a:lstStyle/>
           <a:p>
             <a:pPr algn="ctr"/>
+            <a:endParaRPr/>
           </a:p>
         </p:txBody>
       </p:sp>
@@ -7302,6 +7636,7 @@
           <a:lstStyle/>
           <a:p>
             <a:pPr algn="ctr"/>
+            <a:endParaRPr/>
           </a:p>
         </p:txBody>
       </p:sp>
@@ -7355,7 +7690,7 @@
         <p:spPr>
           <a:xfrm>
             <a:off x="1170432" y="3675888"/>
-            <a:ext cx="10424160" cy="411480"/>
+            <a:ext cx="7385553" cy="284693"/>
           </a:xfrm>
           <a:prstGeom prst="rect">
             <a:avLst/>
@@ -7396,7 +7731,7 @@
         <p:spPr>
           <a:xfrm>
             <a:off x="502920" y="4146804"/>
-            <a:ext cx="11201400" cy="507492"/>
+            <a:ext cx="7936230" cy="507492"/>
           </a:xfrm>
           <a:prstGeom prst="rect">
             <a:avLst/>
@@ -7430,6 +7765,7 @@
           <a:lstStyle/>
           <a:p>
             <a:pPr algn="ctr"/>
+            <a:endParaRPr/>
           </a:p>
         </p:txBody>
       </p:sp>
@@ -7474,6 +7810,7 @@
           <a:lstStyle/>
           <a:p>
             <a:pPr algn="ctr"/>
+            <a:endParaRPr/>
           </a:p>
         </p:txBody>
       </p:sp>
@@ -7527,7 +7864,7 @@
         <p:spPr>
           <a:xfrm>
             <a:off x="1170432" y="4238244"/>
-            <a:ext cx="10424160" cy="411480"/>
+            <a:ext cx="7385553" cy="477054"/>
           </a:xfrm>
           <a:prstGeom prst="rect">
             <a:avLst/>
@@ -7568,7 +7905,7 @@
         <p:spPr>
           <a:xfrm>
             <a:off x="502920" y="4709160"/>
-            <a:ext cx="11201400" cy="507492"/>
+            <a:ext cx="7936230" cy="507492"/>
           </a:xfrm>
           <a:prstGeom prst="rect">
             <a:avLst/>
@@ -7602,6 +7939,7 @@
           <a:lstStyle/>
           <a:p>
             <a:pPr algn="ctr"/>
+            <a:endParaRPr/>
           </a:p>
         </p:txBody>
       </p:sp>
@@ -7646,6 +7984,7 @@
           <a:lstStyle/>
           <a:p>
             <a:pPr algn="ctr"/>
+            <a:endParaRPr/>
           </a:p>
         </p:txBody>
       </p:sp>
@@ -7699,7 +8038,7 @@
         <p:spPr>
           <a:xfrm>
             <a:off x="1170432" y="4800600"/>
-            <a:ext cx="10424160" cy="411480"/>
+            <a:ext cx="7385553" cy="477054"/>
           </a:xfrm>
           <a:prstGeom prst="rect">
             <a:avLst/>
@@ -7740,7 +8079,7 @@
         <p:spPr>
           <a:xfrm>
             <a:off x="502920" y="5271516"/>
-            <a:ext cx="11201400" cy="507492"/>
+            <a:ext cx="7936230" cy="507492"/>
           </a:xfrm>
           <a:prstGeom prst="rect">
             <a:avLst/>
@@ -7774,6 +8113,7 @@
           <a:lstStyle/>
           <a:p>
             <a:pPr algn="ctr"/>
+            <a:endParaRPr/>
           </a:p>
         </p:txBody>
       </p:sp>
@@ -7818,6 +8158,7 @@
           <a:lstStyle/>
           <a:p>
             <a:pPr algn="ctr"/>
+            <a:endParaRPr/>
           </a:p>
         </p:txBody>
       </p:sp>
@@ -7871,7 +8212,7 @@
         <p:spPr>
           <a:xfrm>
             <a:off x="1170432" y="5362956"/>
-            <a:ext cx="10424160" cy="411480"/>
+            <a:ext cx="7385553" cy="477054"/>
           </a:xfrm>
           <a:prstGeom prst="rect">
             <a:avLst/>
@@ -7912,7 +8253,7 @@
         <p:spPr>
           <a:xfrm>
             <a:off x="502920" y="5833872"/>
-            <a:ext cx="11201400" cy="507492"/>
+            <a:ext cx="7936230" cy="507492"/>
           </a:xfrm>
           <a:prstGeom prst="rect">
             <a:avLst/>
@@ -7946,6 +8287,7 @@
           <a:lstStyle/>
           <a:p>
             <a:pPr algn="ctr"/>
+            <a:endParaRPr/>
           </a:p>
         </p:txBody>
       </p:sp>
@@ -7990,6 +8332,7 @@
           <a:lstStyle/>
           <a:p>
             <a:pPr algn="ctr"/>
+            <a:endParaRPr/>
           </a:p>
         </p:txBody>
       </p:sp>
@@ -8043,7 +8386,7 @@
         <p:spPr>
           <a:xfrm>
             <a:off x="1170432" y="5925312"/>
-            <a:ext cx="10424160" cy="411480"/>
+            <a:ext cx="7385553" cy="284693"/>
           </a:xfrm>
           <a:prstGeom prst="rect">
             <a:avLst/>
@@ -8113,6 +8456,153 @@
               </a:rPr>
               <a:t>GA-DIG · Ulusal Değerlendirme Toplantısı · 09.08.2026</a:t>
             </a:r>
+          </a:p>
+        </p:txBody>
+      </p:sp>
+      <p:pic>
+        <p:nvPicPr>
+          <p:cNvPr id="37" name="Picture 3"/>
+          <p:cNvPicPr>
+            <a:picLocks noChangeAspect="1" noChangeArrowheads="1"/>
+          </p:cNvPicPr>
+          <p:nvPr/>
+        </p:nvPicPr>
+        <p:blipFill>
+          <a:blip r:embed="rId3"/>
+          <a:srcRect/>
+          <a:stretch>
+            <a:fillRect/>
+          </a:stretch>
+        </p:blipFill>
+        <p:spPr bwMode="auto">
+          <a:xfrm>
+            <a:off x="8495857" y="2143125"/>
+            <a:ext cx="3626299" cy="3847424"/>
+          </a:xfrm>
+          <a:prstGeom prst="rect">
+            <a:avLst/>
+          </a:prstGeom>
+          <a:noFill/>
+          <a:ln w="9525">
+            <a:noFill/>
+            <a:miter lim="800000"/>
+            <a:headEnd/>
+            <a:tailEnd/>
+          </a:ln>
+          <a:effectLst/>
+        </p:spPr>
+      </p:pic>
+      <p:sp>
+        <p:nvSpPr>
+          <p:cNvPr id="38" name="37 Sağ Ok"/>
+          <p:cNvSpPr/>
+          <p:nvPr/>
+        </p:nvSpPr>
+        <p:spPr>
+          <a:xfrm rot="4052593">
+            <a:off x="11654894" y="4308953"/>
+            <a:ext cx="258216" cy="241087"/>
+          </a:xfrm>
+          <a:prstGeom prst="rightArrow">
+            <a:avLst/>
+          </a:prstGeom>
+        </p:spPr>
+        <p:style>
+          <a:lnRef idx="1">
+            <a:schemeClr val="accent2"/>
+          </a:lnRef>
+          <a:fillRef idx="3">
+            <a:schemeClr val="accent2"/>
+          </a:fillRef>
+          <a:effectRef idx="2">
+            <a:schemeClr val="accent2"/>
+          </a:effectRef>
+          <a:fontRef idx="minor">
+            <a:schemeClr val="lt1"/>
+          </a:fontRef>
+        </p:style>
+        <p:txBody>
+          <a:bodyPr rtlCol="0" anchor="ctr"/>
+          <a:lstStyle/>
+          <a:p>
+            <a:pPr algn="ctr"/>
+            <a:endParaRPr lang="tr-TR"/>
+          </a:p>
+        </p:txBody>
+      </p:sp>
+      <p:sp>
+        <p:nvSpPr>
+          <p:cNvPr id="39" name="38 Sağ Ok"/>
+          <p:cNvSpPr/>
+          <p:nvPr/>
+        </p:nvSpPr>
+        <p:spPr>
+          <a:xfrm rot="4052593">
+            <a:off x="9899513" y="4327241"/>
+            <a:ext cx="258216" cy="241087"/>
+          </a:xfrm>
+          <a:prstGeom prst="rightArrow">
+            <a:avLst/>
+          </a:prstGeom>
+        </p:spPr>
+        <p:style>
+          <a:lnRef idx="1">
+            <a:schemeClr val="accent2"/>
+          </a:lnRef>
+          <a:fillRef idx="3">
+            <a:schemeClr val="accent2"/>
+          </a:fillRef>
+          <a:effectRef idx="2">
+            <a:schemeClr val="accent2"/>
+          </a:effectRef>
+          <a:fontRef idx="minor">
+            <a:schemeClr val="lt1"/>
+          </a:fontRef>
+        </p:style>
+        <p:txBody>
+          <a:bodyPr rtlCol="0" anchor="ctr"/>
+          <a:lstStyle/>
+          <a:p>
+            <a:pPr algn="ctr"/>
+            <a:endParaRPr lang="tr-TR"/>
+          </a:p>
+        </p:txBody>
+      </p:sp>
+      <p:sp>
+        <p:nvSpPr>
+          <p:cNvPr id="40" name="39 Sağ Ok"/>
+          <p:cNvSpPr/>
+          <p:nvPr/>
+        </p:nvSpPr>
+        <p:spPr>
+          <a:xfrm rot="4052593">
+            <a:off x="8901797" y="2400143"/>
+            <a:ext cx="258216" cy="241087"/>
+          </a:xfrm>
+          <a:prstGeom prst="rightArrow">
+            <a:avLst/>
+          </a:prstGeom>
+        </p:spPr>
+        <p:style>
+          <a:lnRef idx="1">
+            <a:schemeClr val="accent2"/>
+          </a:lnRef>
+          <a:fillRef idx="3">
+            <a:schemeClr val="accent2"/>
+          </a:fillRef>
+          <a:effectRef idx="2">
+            <a:schemeClr val="accent2"/>
+          </a:effectRef>
+          <a:fontRef idx="minor">
+            <a:schemeClr val="lt1"/>
+          </a:fontRef>
+        </p:style>
+        <p:txBody>
+          <a:bodyPr rtlCol="0" anchor="ctr"/>
+          <a:lstStyle/>
+          <a:p>
+            <a:pPr algn="ctr"/>
+            <a:endParaRPr lang="tr-TR"/>
           </a:p>
         </p:txBody>
       </p:sp>
@@ -8121,11 +8611,18 @@
   <p:clrMapOvr>
     <a:masterClrMapping/>
   </p:clrMapOvr>
+  <p:timing>
+    <p:tnLst>
+      <p:par>
+        <p:cTn id="1" dur="indefinite" restart="never" nodeType="tmRoot"/>
+      </p:par>
+    </p:tnLst>
+  </p:timing>
 </p:sld>
 </file>
 
 <file path=ppt/slides/slide13.xml><?xml version="1.0" encoding="utf-8"?>
-<p:sld xmlns:a="http://schemas.openxmlformats.org/drawingml/2006/main" xmlns:p="http://schemas.openxmlformats.org/presentationml/2006/main" xmlns:r="http://schemas.openxmlformats.org/officeDocument/2006/relationships">
+<p:sld xmlns:a="http://schemas.openxmlformats.org/drawingml/2006/main" xmlns:r="http://schemas.openxmlformats.org/officeDocument/2006/relationships" xmlns:p="http://schemas.openxmlformats.org/presentationml/2006/main">
   <p:cSld>
     <p:spTree>
       <p:nvGrpSpPr>
@@ -8133,7 +8630,14 @@
         <p:cNvGrpSpPr/>
         <p:nvPr/>
       </p:nvGrpSpPr>
-      <p:grpSpPr/>
+      <p:grpSpPr>
+        <a:xfrm>
+          <a:off x="0" y="0"/>
+          <a:ext cx="0" cy="0"/>
+          <a:chOff x="0" y="0"/>
+          <a:chExt cx="0" cy="0"/>
+        </a:xfrm>
+      </p:grpSpPr>
       <p:sp>
         <p:nvSpPr>
           <p:cNvPr id="2" name="Rectangle 1"/>
@@ -8175,6 +8679,7 @@
           <a:lstStyle/>
           <a:p>
             <a:pPr algn="ctr"/>
+            <a:endParaRPr/>
           </a:p>
         </p:txBody>
       </p:sp>
@@ -8219,6 +8724,7 @@
           <a:lstStyle/>
           <a:p>
             <a:pPr algn="ctr"/>
+            <a:endParaRPr/>
           </a:p>
         </p:txBody>
       </p:sp>
@@ -8263,6 +8769,7 @@
           <a:lstStyle/>
           <a:p>
             <a:pPr algn="ctr"/>
+            <a:endParaRPr/>
           </a:p>
         </p:txBody>
       </p:sp>
@@ -8307,6 +8814,7 @@
           <a:lstStyle/>
           <a:p>
             <a:pPr algn="ctr"/>
+            <a:endParaRPr/>
           </a:p>
         </p:txBody>
       </p:sp>
@@ -8517,6 +9025,7 @@
           <a:lstStyle/>
           <a:p>
             <a:pPr algn="ctr"/>
+            <a:endParaRPr/>
           </a:p>
         </p:txBody>
       </p:sp>
@@ -8605,7 +9114,7 @@
           </a:fontRef>
         </p:style>
         <p:txBody>
-          <a:bodyPr rtlCol="0" anchor="ctr" wrap="none" lIns="0" rIns="0" tIns="0" bIns="0"/>
+          <a:bodyPr wrap="none" lIns="0" tIns="0" rIns="0" bIns="0" rtlCol="0" anchor="ctr"/>
           <a:lstStyle/>
           <a:p>
             <a:pPr algn="ctr">
@@ -8633,7 +9142,7 @@
         <p:spPr>
           <a:xfrm>
             <a:off x="502920" y="2148840"/>
-            <a:ext cx="11201400" cy="1115568"/>
+            <a:ext cx="7802880" cy="1115568"/>
           </a:xfrm>
           <a:prstGeom prst="rect">
             <a:avLst/>
@@ -8667,6 +9176,7 @@
           <a:lstStyle/>
           <a:p>
             <a:pPr algn="ctr"/>
+            <a:endParaRPr/>
           </a:p>
         </p:txBody>
       </p:sp>
@@ -8679,7 +9189,7 @@
         <p:spPr>
           <a:xfrm>
             <a:off x="713232" y="2231136"/>
-            <a:ext cx="10789920" cy="987552"/>
+            <a:ext cx="7516244" cy="877163"/>
           </a:xfrm>
           <a:prstGeom prst="rect">
             <a:avLst/>
@@ -8738,7 +9248,7 @@
         <p:spPr>
           <a:xfrm>
             <a:off x="502920" y="3429000"/>
-            <a:ext cx="11201400" cy="548640"/>
+            <a:ext cx="7802880" cy="548640"/>
           </a:xfrm>
           <a:prstGeom prst="rect">
             <a:avLst/>
@@ -8772,6 +9282,7 @@
           <a:lstStyle/>
           <a:p>
             <a:pPr algn="ctr"/>
+            <a:endParaRPr/>
           </a:p>
         </p:txBody>
       </p:sp>
@@ -8816,6 +9327,7 @@
           <a:lstStyle/>
           <a:p>
             <a:pPr algn="ctr"/>
+            <a:endParaRPr/>
           </a:p>
         </p:txBody>
       </p:sp>
@@ -8869,7 +9381,7 @@
         <p:spPr>
           <a:xfrm>
             <a:off x="1170432" y="3520440"/>
-            <a:ext cx="10424160" cy="411480"/>
+            <a:ext cx="7261456" cy="284693"/>
           </a:xfrm>
           <a:prstGeom prst="rect">
             <a:avLst/>
@@ -8910,7 +9422,7 @@
         <p:spPr>
           <a:xfrm>
             <a:off x="502920" y="4032504"/>
-            <a:ext cx="11201400" cy="548640"/>
+            <a:ext cx="7802880" cy="548640"/>
           </a:xfrm>
           <a:prstGeom prst="rect">
             <a:avLst/>
@@ -8944,6 +9456,7 @@
           <a:lstStyle/>
           <a:p>
             <a:pPr algn="ctr"/>
+            <a:endParaRPr/>
           </a:p>
         </p:txBody>
       </p:sp>
@@ -8988,6 +9501,7 @@
           <a:lstStyle/>
           <a:p>
             <a:pPr algn="ctr"/>
+            <a:endParaRPr/>
           </a:p>
         </p:txBody>
       </p:sp>
@@ -9041,7 +9555,7 @@
         <p:spPr>
           <a:xfrm>
             <a:off x="1170432" y="4123944"/>
-            <a:ext cx="10424160" cy="411480"/>
+            <a:ext cx="7261456" cy="477054"/>
           </a:xfrm>
           <a:prstGeom prst="rect">
             <a:avLst/>
@@ -9082,7 +9596,7 @@
         <p:spPr>
           <a:xfrm>
             <a:off x="502920" y="4636008"/>
-            <a:ext cx="11201400" cy="548640"/>
+            <a:ext cx="7802880" cy="548640"/>
           </a:xfrm>
           <a:prstGeom prst="rect">
             <a:avLst/>
@@ -9116,6 +9630,7 @@
           <a:lstStyle/>
           <a:p>
             <a:pPr algn="ctr"/>
+            <a:endParaRPr/>
           </a:p>
         </p:txBody>
       </p:sp>
@@ -9160,6 +9675,7 @@
           <a:lstStyle/>
           <a:p>
             <a:pPr algn="ctr"/>
+            <a:endParaRPr/>
           </a:p>
         </p:txBody>
       </p:sp>
@@ -9213,7 +9729,7 @@
         <p:spPr>
           <a:xfrm>
             <a:off x="1170432" y="4727448"/>
-            <a:ext cx="10424160" cy="411480"/>
+            <a:ext cx="7261456" cy="477054"/>
           </a:xfrm>
           <a:prstGeom prst="rect">
             <a:avLst/>
@@ -9254,7 +9770,7 @@
         <p:spPr>
           <a:xfrm>
             <a:off x="502920" y="5239512"/>
-            <a:ext cx="11201400" cy="548640"/>
+            <a:ext cx="7802880" cy="548640"/>
           </a:xfrm>
           <a:prstGeom prst="rect">
             <a:avLst/>
@@ -9288,6 +9804,7 @@
           <a:lstStyle/>
           <a:p>
             <a:pPr algn="ctr"/>
+            <a:endParaRPr/>
           </a:p>
         </p:txBody>
       </p:sp>
@@ -9332,6 +9849,7 @@
           <a:lstStyle/>
           <a:p>
             <a:pPr algn="ctr"/>
+            <a:endParaRPr/>
           </a:p>
         </p:txBody>
       </p:sp>
@@ -9385,7 +9903,7 @@
         <p:spPr>
           <a:xfrm>
             <a:off x="1170432" y="5330952"/>
-            <a:ext cx="10424160" cy="411480"/>
+            <a:ext cx="7261456" cy="477054"/>
           </a:xfrm>
           <a:prstGeom prst="rect">
             <a:avLst/>
@@ -9426,7 +9944,7 @@
         <p:spPr>
           <a:xfrm>
             <a:off x="502920" y="5843016"/>
-            <a:ext cx="11201400" cy="548640"/>
+            <a:ext cx="7802880" cy="548640"/>
           </a:xfrm>
           <a:prstGeom prst="rect">
             <a:avLst/>
@@ -9460,6 +9978,7 @@
           <a:lstStyle/>
           <a:p>
             <a:pPr algn="ctr"/>
+            <a:endParaRPr/>
           </a:p>
         </p:txBody>
       </p:sp>
@@ -9504,6 +10023,7 @@
           <a:lstStyle/>
           <a:p>
             <a:pPr algn="ctr"/>
+            <a:endParaRPr/>
           </a:p>
         </p:txBody>
       </p:sp>
@@ -9557,7 +10077,7 @@
         <p:spPr>
           <a:xfrm>
             <a:off x="1170432" y="5934456"/>
-            <a:ext cx="10424160" cy="411480"/>
+            <a:ext cx="7261456" cy="284693"/>
           </a:xfrm>
           <a:prstGeom prst="rect">
             <a:avLst/>
@@ -9627,6 +10147,77 @@
               </a:rPr>
               <a:t>GA-6 · Ulusal Değerlendirme Toplantısı · 09.08.2026</a:t>
             </a:r>
+          </a:p>
+        </p:txBody>
+      </p:sp>
+      <p:pic>
+        <p:nvPicPr>
+          <p:cNvPr id="36" name="Picture 3"/>
+          <p:cNvPicPr>
+            <a:picLocks noChangeAspect="1" noChangeArrowheads="1"/>
+          </p:cNvPicPr>
+          <p:nvPr/>
+        </p:nvPicPr>
+        <p:blipFill>
+          <a:blip r:embed="rId3"/>
+          <a:srcRect/>
+          <a:stretch>
+            <a:fillRect/>
+          </a:stretch>
+        </p:blipFill>
+        <p:spPr bwMode="auto">
+          <a:xfrm>
+            <a:off x="8495857" y="2143125"/>
+            <a:ext cx="3626299" cy="3847424"/>
+          </a:xfrm>
+          <a:prstGeom prst="rect">
+            <a:avLst/>
+          </a:prstGeom>
+          <a:noFill/>
+          <a:ln w="9525">
+            <a:noFill/>
+            <a:miter lim="800000"/>
+            <a:headEnd/>
+            <a:tailEnd/>
+          </a:ln>
+          <a:effectLst/>
+        </p:spPr>
+      </p:pic>
+      <p:sp>
+        <p:nvSpPr>
+          <p:cNvPr id="37" name="36 Sağ Ok"/>
+          <p:cNvSpPr/>
+          <p:nvPr/>
+        </p:nvSpPr>
+        <p:spPr>
+          <a:xfrm rot="4052593">
+            <a:off x="11191102" y="3225389"/>
+            <a:ext cx="258216" cy="241087"/>
+          </a:xfrm>
+          <a:prstGeom prst="rightArrow">
+            <a:avLst/>
+          </a:prstGeom>
+        </p:spPr>
+        <p:style>
+          <a:lnRef idx="1">
+            <a:schemeClr val="accent2"/>
+          </a:lnRef>
+          <a:fillRef idx="3">
+            <a:schemeClr val="accent2"/>
+          </a:fillRef>
+          <a:effectRef idx="2">
+            <a:schemeClr val="accent2"/>
+          </a:effectRef>
+          <a:fontRef idx="minor">
+            <a:schemeClr val="lt1"/>
+          </a:fontRef>
+        </p:style>
+        <p:txBody>
+          <a:bodyPr rtlCol="0" anchor="ctr"/>
+          <a:lstStyle/>
+          <a:p>
+            <a:pPr algn="ctr"/>
+            <a:endParaRPr lang="tr-TR"/>
           </a:p>
         </p:txBody>
       </p:sp>
@@ -9635,11 +10226,18 @@
   <p:clrMapOvr>
     <a:masterClrMapping/>
   </p:clrMapOvr>
+  <p:timing>
+    <p:tnLst>
+      <p:par>
+        <p:cTn id="1" dur="indefinite" restart="never" nodeType="tmRoot"/>
+      </p:par>
+    </p:tnLst>
+  </p:timing>
 </p:sld>
 </file>
 
 <file path=ppt/slides/slide14.xml><?xml version="1.0" encoding="utf-8"?>
-<p:sld xmlns:a="http://schemas.openxmlformats.org/drawingml/2006/main" xmlns:p="http://schemas.openxmlformats.org/presentationml/2006/main" xmlns:r="http://schemas.openxmlformats.org/officeDocument/2006/relationships">
+<p:sld xmlns:a="http://schemas.openxmlformats.org/drawingml/2006/main" xmlns:r="http://schemas.openxmlformats.org/officeDocument/2006/relationships" xmlns:p="http://schemas.openxmlformats.org/presentationml/2006/main">
   <p:cSld>
     <p:spTree>
       <p:nvGrpSpPr>
@@ -9647,7 +10245,14 @@
         <p:cNvGrpSpPr/>
         <p:nvPr/>
       </p:nvGrpSpPr>
-      <p:grpSpPr/>
+      <p:grpSpPr>
+        <a:xfrm>
+          <a:off x="0" y="0"/>
+          <a:ext cx="0" cy="0"/>
+          <a:chOff x="0" y="0"/>
+          <a:chExt cx="0" cy="0"/>
+        </a:xfrm>
+      </p:grpSpPr>
       <p:sp>
         <p:nvSpPr>
           <p:cNvPr id="2" name="Rectangle 1"/>
@@ -9689,6 +10294,7 @@
           <a:lstStyle/>
           <a:p>
             <a:pPr algn="ctr"/>
+            <a:endParaRPr/>
           </a:p>
         </p:txBody>
       </p:sp>
@@ -9733,6 +10339,7 @@
           <a:lstStyle/>
           <a:p>
             <a:pPr algn="ctr"/>
+            <a:endParaRPr/>
           </a:p>
         </p:txBody>
       </p:sp>
@@ -9777,6 +10384,7 @@
           <a:lstStyle/>
           <a:p>
             <a:pPr algn="ctr"/>
+            <a:endParaRPr/>
           </a:p>
         </p:txBody>
       </p:sp>
@@ -9821,6 +10429,7 @@
           <a:lstStyle/>
           <a:p>
             <a:pPr algn="ctr"/>
+            <a:endParaRPr/>
           </a:p>
         </p:txBody>
       </p:sp>
@@ -10031,6 +10640,7 @@
           <a:lstStyle/>
           <a:p>
             <a:pPr algn="ctr"/>
+            <a:endParaRPr/>
           </a:p>
         </p:txBody>
       </p:sp>
@@ -10119,7 +10729,7 @@
           </a:fontRef>
         </p:style>
         <p:txBody>
-          <a:bodyPr rtlCol="0" anchor="ctr" wrap="none" lIns="0" rIns="0" tIns="0" bIns="0"/>
+          <a:bodyPr wrap="none" lIns="0" tIns="0" rIns="0" bIns="0" rtlCol="0" anchor="ctr"/>
           <a:lstStyle/>
           <a:p>
             <a:pPr algn="ctr">
@@ -10147,7 +10757,7 @@
         <p:spPr>
           <a:xfrm>
             <a:off x="502920" y="2148840"/>
-            <a:ext cx="11201400" cy="1115568"/>
+            <a:ext cx="7871619" cy="1115568"/>
           </a:xfrm>
           <a:prstGeom prst="rect">
             <a:avLst/>
@@ -10181,6 +10791,7 @@
           <a:lstStyle/>
           <a:p>
             <a:pPr algn="ctr"/>
+            <a:endParaRPr/>
           </a:p>
         </p:txBody>
       </p:sp>
@@ -10192,8 +10803,8 @@
         </p:nvSpPr>
         <p:spPr>
           <a:xfrm>
-            <a:off x="713232" y="2231136"/>
-            <a:ext cx="10789920" cy="987552"/>
+            <a:off x="713231" y="2231136"/>
+            <a:ext cx="7582459" cy="684803"/>
           </a:xfrm>
           <a:prstGeom prst="rect">
             <a:avLst/>
@@ -10252,7 +10863,7 @@
         <p:spPr>
           <a:xfrm>
             <a:off x="502920" y="3429000"/>
-            <a:ext cx="11201400" cy="548640"/>
+            <a:ext cx="7871619" cy="548640"/>
           </a:xfrm>
           <a:prstGeom prst="rect">
             <a:avLst/>
@@ -10286,6 +10897,7 @@
           <a:lstStyle/>
           <a:p>
             <a:pPr algn="ctr"/>
+            <a:endParaRPr/>
           </a:p>
         </p:txBody>
       </p:sp>
@@ -10330,6 +10942,7 @@
           <a:lstStyle/>
           <a:p>
             <a:pPr algn="ctr"/>
+            <a:endParaRPr/>
           </a:p>
         </p:txBody>
       </p:sp>
@@ -10383,7 +10996,7 @@
         <p:spPr>
           <a:xfrm>
             <a:off x="1170432" y="3520440"/>
-            <a:ext cx="10424160" cy="411480"/>
+            <a:ext cx="7325425" cy="284693"/>
           </a:xfrm>
           <a:prstGeom prst="rect">
             <a:avLst/>
@@ -10424,7 +11037,7 @@
         <p:spPr>
           <a:xfrm>
             <a:off x="502920" y="4032504"/>
-            <a:ext cx="11201400" cy="548640"/>
+            <a:ext cx="7871619" cy="548640"/>
           </a:xfrm>
           <a:prstGeom prst="rect">
             <a:avLst/>
@@ -10458,6 +11071,7 @@
           <a:lstStyle/>
           <a:p>
             <a:pPr algn="ctr"/>
+            <a:endParaRPr/>
           </a:p>
         </p:txBody>
       </p:sp>
@@ -10502,6 +11116,7 @@
           <a:lstStyle/>
           <a:p>
             <a:pPr algn="ctr"/>
+            <a:endParaRPr/>
           </a:p>
         </p:txBody>
       </p:sp>
@@ -10555,7 +11170,7 @@
         <p:spPr>
           <a:xfrm>
             <a:off x="1170432" y="4123944"/>
-            <a:ext cx="10424160" cy="411480"/>
+            <a:ext cx="7325425" cy="284693"/>
           </a:xfrm>
           <a:prstGeom prst="rect">
             <a:avLst/>
@@ -10596,7 +11211,7 @@
         <p:spPr>
           <a:xfrm>
             <a:off x="502920" y="4636008"/>
-            <a:ext cx="11201400" cy="548640"/>
+            <a:ext cx="7871619" cy="548640"/>
           </a:xfrm>
           <a:prstGeom prst="rect">
             <a:avLst/>
@@ -10630,6 +11245,7 @@
           <a:lstStyle/>
           <a:p>
             <a:pPr algn="ctr"/>
+            <a:endParaRPr/>
           </a:p>
         </p:txBody>
       </p:sp>
@@ -10674,6 +11290,7 @@
           <a:lstStyle/>
           <a:p>
             <a:pPr algn="ctr"/>
+            <a:endParaRPr/>
           </a:p>
         </p:txBody>
       </p:sp>
@@ -10727,7 +11344,7 @@
         <p:spPr>
           <a:xfrm>
             <a:off x="1170432" y="4727448"/>
-            <a:ext cx="10424160" cy="411480"/>
+            <a:ext cx="7325425" cy="477054"/>
           </a:xfrm>
           <a:prstGeom prst="rect">
             <a:avLst/>
@@ -10768,7 +11385,7 @@
         <p:spPr>
           <a:xfrm>
             <a:off x="502920" y="5239512"/>
-            <a:ext cx="11201400" cy="548640"/>
+            <a:ext cx="7871619" cy="548640"/>
           </a:xfrm>
           <a:prstGeom prst="rect">
             <a:avLst/>
@@ -10802,6 +11419,7 @@
           <a:lstStyle/>
           <a:p>
             <a:pPr algn="ctr"/>
+            <a:endParaRPr/>
           </a:p>
         </p:txBody>
       </p:sp>
@@ -10846,6 +11464,7 @@
           <a:lstStyle/>
           <a:p>
             <a:pPr algn="ctr"/>
+            <a:endParaRPr/>
           </a:p>
         </p:txBody>
       </p:sp>
@@ -10899,7 +11518,7 @@
         <p:spPr>
           <a:xfrm>
             <a:off x="1170432" y="5330952"/>
-            <a:ext cx="10424160" cy="411480"/>
+            <a:ext cx="7325425" cy="284693"/>
           </a:xfrm>
           <a:prstGeom prst="rect">
             <a:avLst/>
@@ -10940,7 +11559,7 @@
         <p:spPr>
           <a:xfrm>
             <a:off x="502920" y="5843016"/>
-            <a:ext cx="11201400" cy="548640"/>
+            <a:ext cx="7871619" cy="548640"/>
           </a:xfrm>
           <a:prstGeom prst="rect">
             <a:avLst/>
@@ -10974,6 +11593,7 @@
           <a:lstStyle/>
           <a:p>
             <a:pPr algn="ctr"/>
+            <a:endParaRPr/>
           </a:p>
         </p:txBody>
       </p:sp>
@@ -11018,6 +11638,7 @@
           <a:lstStyle/>
           <a:p>
             <a:pPr algn="ctr"/>
+            <a:endParaRPr/>
           </a:p>
         </p:txBody>
       </p:sp>
@@ -11071,7 +11692,7 @@
         <p:spPr>
           <a:xfrm>
             <a:off x="1170432" y="5934456"/>
-            <a:ext cx="10424160" cy="411480"/>
+            <a:ext cx="7325425" cy="284693"/>
           </a:xfrm>
           <a:prstGeom prst="rect">
             <a:avLst/>
@@ -11141,6 +11762,77 @@
               </a:rPr>
               <a:t>GA-3 · Ulusal Değerlendirme Toplantısı · 09.08.2026</a:t>
             </a:r>
+          </a:p>
+        </p:txBody>
+      </p:sp>
+      <p:pic>
+        <p:nvPicPr>
+          <p:cNvPr id="36" name="Picture 3"/>
+          <p:cNvPicPr>
+            <a:picLocks noChangeAspect="1" noChangeArrowheads="1"/>
+          </p:cNvPicPr>
+          <p:nvPr/>
+        </p:nvPicPr>
+        <p:blipFill>
+          <a:blip r:embed="rId3"/>
+          <a:srcRect/>
+          <a:stretch>
+            <a:fillRect/>
+          </a:stretch>
+        </p:blipFill>
+        <p:spPr bwMode="auto">
+          <a:xfrm>
+            <a:off x="8495857" y="2143125"/>
+            <a:ext cx="3626299" cy="3847424"/>
+          </a:xfrm>
+          <a:prstGeom prst="rect">
+            <a:avLst/>
+          </a:prstGeom>
+          <a:noFill/>
+          <a:ln w="9525">
+            <a:noFill/>
+            <a:miter lim="800000"/>
+            <a:headEnd/>
+            <a:tailEnd/>
+          </a:ln>
+          <a:effectLst/>
+        </p:spPr>
+      </p:pic>
+      <p:sp>
+        <p:nvSpPr>
+          <p:cNvPr id="37" name="36 Sağ Ok"/>
+          <p:cNvSpPr/>
+          <p:nvPr/>
+        </p:nvSpPr>
+        <p:spPr>
+          <a:xfrm rot="4052593">
+            <a:off x="10501492" y="2404630"/>
+            <a:ext cx="258216" cy="241087"/>
+          </a:xfrm>
+          <a:prstGeom prst="rightArrow">
+            <a:avLst/>
+          </a:prstGeom>
+        </p:spPr>
+        <p:style>
+          <a:lnRef idx="1">
+            <a:schemeClr val="accent2"/>
+          </a:lnRef>
+          <a:fillRef idx="3">
+            <a:schemeClr val="accent2"/>
+          </a:fillRef>
+          <a:effectRef idx="2">
+            <a:schemeClr val="accent2"/>
+          </a:effectRef>
+          <a:fontRef idx="minor">
+            <a:schemeClr val="lt1"/>
+          </a:fontRef>
+        </p:style>
+        <p:txBody>
+          <a:bodyPr rtlCol="0" anchor="ctr"/>
+          <a:lstStyle/>
+          <a:p>
+            <a:pPr algn="ctr"/>
+            <a:endParaRPr lang="tr-TR"/>
           </a:p>
         </p:txBody>
       </p:sp>
@@ -11149,11 +11841,18 @@
   <p:clrMapOvr>
     <a:masterClrMapping/>
   </p:clrMapOvr>
+  <p:timing>
+    <p:tnLst>
+      <p:par>
+        <p:cTn id="1" dur="indefinite" restart="never" nodeType="tmRoot"/>
+      </p:par>
+    </p:tnLst>
+  </p:timing>
 </p:sld>
 </file>
 
 <file path=ppt/slides/slide15.xml><?xml version="1.0" encoding="utf-8"?>
-<p:sld xmlns:a="http://schemas.openxmlformats.org/drawingml/2006/main" xmlns:p="http://schemas.openxmlformats.org/presentationml/2006/main" xmlns:r="http://schemas.openxmlformats.org/officeDocument/2006/relationships">
+<p:sld xmlns:a="http://schemas.openxmlformats.org/drawingml/2006/main" xmlns:r="http://schemas.openxmlformats.org/officeDocument/2006/relationships" xmlns:p="http://schemas.openxmlformats.org/presentationml/2006/main">
   <p:cSld>
     <p:spTree>
       <p:nvGrpSpPr>
@@ -11161,7 +11860,14 @@
         <p:cNvGrpSpPr/>
         <p:nvPr/>
       </p:nvGrpSpPr>
-      <p:grpSpPr/>
+      <p:grpSpPr>
+        <a:xfrm>
+          <a:off x="0" y="0"/>
+          <a:ext cx="0" cy="0"/>
+          <a:chOff x="0" y="0"/>
+          <a:chExt cx="0" cy="0"/>
+        </a:xfrm>
+      </p:grpSpPr>
       <p:sp>
         <p:nvSpPr>
           <p:cNvPr id="2" name="Rectangle 1"/>
@@ -11203,6 +11909,7 @@
           <a:lstStyle/>
           <a:p>
             <a:pPr algn="ctr"/>
+            <a:endParaRPr/>
           </a:p>
         </p:txBody>
       </p:sp>
@@ -11247,6 +11954,7 @@
           <a:lstStyle/>
           <a:p>
             <a:pPr algn="ctr"/>
+            <a:endParaRPr/>
           </a:p>
         </p:txBody>
       </p:sp>
@@ -11291,6 +11999,7 @@
           <a:lstStyle/>
           <a:p>
             <a:pPr algn="ctr"/>
+            <a:endParaRPr/>
           </a:p>
         </p:txBody>
       </p:sp>
@@ -11335,6 +12044,7 @@
           <a:lstStyle/>
           <a:p>
             <a:pPr algn="ctr"/>
+            <a:endParaRPr/>
           </a:p>
         </p:txBody>
       </p:sp>
@@ -11545,6 +12255,7 @@
           <a:lstStyle/>
           <a:p>
             <a:pPr algn="ctr"/>
+            <a:endParaRPr/>
           </a:p>
         </p:txBody>
       </p:sp>
@@ -11633,7 +12344,7 @@
           </a:fontRef>
         </p:style>
         <p:txBody>
-          <a:bodyPr rtlCol="0" anchor="ctr" wrap="none" lIns="0" rIns="0" tIns="0" bIns="0"/>
+          <a:bodyPr wrap="none" lIns="0" tIns="0" rIns="0" bIns="0" rtlCol="0" anchor="ctr"/>
           <a:lstStyle/>
           <a:p>
             <a:pPr algn="ctr">
@@ -11661,7 +12372,7 @@
         <p:spPr>
           <a:xfrm>
             <a:off x="502920" y="2148840"/>
-            <a:ext cx="11201400" cy="1298448"/>
+            <a:ext cx="7923271" cy="1298448"/>
           </a:xfrm>
           <a:prstGeom prst="rect">
             <a:avLst/>
@@ -11695,6 +12406,7 @@
           <a:lstStyle/>
           <a:p>
             <a:pPr algn="ctr"/>
+            <a:endParaRPr/>
           </a:p>
         </p:txBody>
       </p:sp>
@@ -11706,8 +12418,8 @@
         </p:nvSpPr>
         <p:spPr>
           <a:xfrm>
-            <a:off x="713232" y="2231136"/>
-            <a:ext cx="10789920" cy="1170432"/>
+            <a:off x="713233" y="2231136"/>
+            <a:ext cx="7632212" cy="854080"/>
           </a:xfrm>
           <a:prstGeom prst="rect">
             <a:avLst/>
@@ -11766,7 +12478,7 @@
         <p:spPr>
           <a:xfrm>
             <a:off x="502920" y="3584448"/>
-            <a:ext cx="11201400" cy="507492"/>
+            <a:ext cx="7923271" cy="507492"/>
           </a:xfrm>
           <a:prstGeom prst="rect">
             <a:avLst/>
@@ -11800,6 +12512,7 @@
           <a:lstStyle/>
           <a:p>
             <a:pPr algn="ctr"/>
+            <a:endParaRPr/>
           </a:p>
         </p:txBody>
       </p:sp>
@@ -11844,6 +12557,7 @@
           <a:lstStyle/>
           <a:p>
             <a:pPr algn="ctr"/>
+            <a:endParaRPr/>
           </a:p>
         </p:txBody>
       </p:sp>
@@ -11897,7 +12611,7 @@
         <p:spPr>
           <a:xfrm>
             <a:off x="1170432" y="3675888"/>
-            <a:ext cx="10424160" cy="411480"/>
+            <a:ext cx="7373493" cy="284693"/>
           </a:xfrm>
           <a:prstGeom prst="rect">
             <a:avLst/>
@@ -11938,7 +12652,7 @@
         <p:spPr>
           <a:xfrm>
             <a:off x="502920" y="4146804"/>
-            <a:ext cx="11201400" cy="507492"/>
+            <a:ext cx="7923271" cy="507492"/>
           </a:xfrm>
           <a:prstGeom prst="rect">
             <a:avLst/>
@@ -11972,6 +12686,7 @@
           <a:lstStyle/>
           <a:p>
             <a:pPr algn="ctr"/>
+            <a:endParaRPr/>
           </a:p>
         </p:txBody>
       </p:sp>
@@ -12016,6 +12731,7 @@
           <a:lstStyle/>
           <a:p>
             <a:pPr algn="ctr"/>
+            <a:endParaRPr/>
           </a:p>
         </p:txBody>
       </p:sp>
@@ -12069,7 +12785,7 @@
         <p:spPr>
           <a:xfrm>
             <a:off x="1170432" y="4238244"/>
-            <a:ext cx="10424160" cy="411480"/>
+            <a:ext cx="7373493" cy="284693"/>
           </a:xfrm>
           <a:prstGeom prst="rect">
             <a:avLst/>
@@ -12110,7 +12826,7 @@
         <p:spPr>
           <a:xfrm>
             <a:off x="502920" y="4709160"/>
-            <a:ext cx="11201400" cy="507492"/>
+            <a:ext cx="7923271" cy="507492"/>
           </a:xfrm>
           <a:prstGeom prst="rect">
             <a:avLst/>
@@ -12144,6 +12860,7 @@
           <a:lstStyle/>
           <a:p>
             <a:pPr algn="ctr"/>
+            <a:endParaRPr/>
           </a:p>
         </p:txBody>
       </p:sp>
@@ -12188,6 +12905,7 @@
           <a:lstStyle/>
           <a:p>
             <a:pPr algn="ctr"/>
+            <a:endParaRPr/>
           </a:p>
         </p:txBody>
       </p:sp>
@@ -12241,7 +12959,7 @@
         <p:spPr>
           <a:xfrm>
             <a:off x="1170432" y="4800600"/>
-            <a:ext cx="10424160" cy="411480"/>
+            <a:ext cx="7373493" cy="284693"/>
           </a:xfrm>
           <a:prstGeom prst="rect">
             <a:avLst/>
@@ -12282,7 +13000,7 @@
         <p:spPr>
           <a:xfrm>
             <a:off x="502920" y="5271516"/>
-            <a:ext cx="11201400" cy="507492"/>
+            <a:ext cx="7923271" cy="507492"/>
           </a:xfrm>
           <a:prstGeom prst="rect">
             <a:avLst/>
@@ -12316,6 +13034,7 @@
           <a:lstStyle/>
           <a:p>
             <a:pPr algn="ctr"/>
+            <a:endParaRPr/>
           </a:p>
         </p:txBody>
       </p:sp>
@@ -12360,6 +13079,7 @@
           <a:lstStyle/>
           <a:p>
             <a:pPr algn="ctr"/>
+            <a:endParaRPr/>
           </a:p>
         </p:txBody>
       </p:sp>
@@ -12413,7 +13133,7 @@
         <p:spPr>
           <a:xfrm>
             <a:off x="1170432" y="5362956"/>
-            <a:ext cx="10424160" cy="411480"/>
+            <a:ext cx="7373493" cy="284693"/>
           </a:xfrm>
           <a:prstGeom prst="rect">
             <a:avLst/>
@@ -12454,7 +13174,7 @@
         <p:spPr>
           <a:xfrm>
             <a:off x="502920" y="5833872"/>
-            <a:ext cx="11201400" cy="507492"/>
+            <a:ext cx="7923271" cy="507492"/>
           </a:xfrm>
           <a:prstGeom prst="rect">
             <a:avLst/>
@@ -12488,6 +13208,7 @@
           <a:lstStyle/>
           <a:p>
             <a:pPr algn="ctr"/>
+            <a:endParaRPr/>
           </a:p>
         </p:txBody>
       </p:sp>
@@ -12532,6 +13253,7 @@
           <a:lstStyle/>
           <a:p>
             <a:pPr algn="ctr"/>
+            <a:endParaRPr/>
           </a:p>
         </p:txBody>
       </p:sp>
@@ -12585,7 +13307,7 @@
         <p:spPr>
           <a:xfrm>
             <a:off x="1170432" y="5925312"/>
-            <a:ext cx="10424160" cy="411480"/>
+            <a:ext cx="7373493" cy="284693"/>
           </a:xfrm>
           <a:prstGeom prst="rect">
             <a:avLst/>
@@ -12655,6 +13377,77 @@
               </a:rPr>
               <a:t>GA-CIHAZ · Ulusal Değerlendirme Toplantısı · 09.08.2026</a:t>
             </a:r>
+          </a:p>
+        </p:txBody>
+      </p:sp>
+      <p:pic>
+        <p:nvPicPr>
+          <p:cNvPr id="36" name="Picture 3"/>
+          <p:cNvPicPr>
+            <a:picLocks noChangeAspect="1" noChangeArrowheads="1"/>
+          </p:cNvPicPr>
+          <p:nvPr/>
+        </p:nvPicPr>
+        <p:blipFill>
+          <a:blip r:embed="rId3"/>
+          <a:srcRect/>
+          <a:stretch>
+            <a:fillRect/>
+          </a:stretch>
+        </p:blipFill>
+        <p:spPr bwMode="auto">
+          <a:xfrm>
+            <a:off x="8495857" y="2143125"/>
+            <a:ext cx="3626299" cy="3847424"/>
+          </a:xfrm>
+          <a:prstGeom prst="rect">
+            <a:avLst/>
+          </a:prstGeom>
+          <a:noFill/>
+          <a:ln w="9525">
+            <a:noFill/>
+            <a:miter lim="800000"/>
+            <a:headEnd/>
+            <a:tailEnd/>
+          </a:ln>
+          <a:effectLst/>
+        </p:spPr>
+      </p:pic>
+      <p:sp>
+        <p:nvSpPr>
+          <p:cNvPr id="37" name="36 Sağ Ok"/>
+          <p:cNvSpPr/>
+          <p:nvPr/>
+        </p:nvSpPr>
+        <p:spPr>
+          <a:xfrm rot="4052593">
+            <a:off x="8685102" y="4327239"/>
+            <a:ext cx="258216" cy="241087"/>
+          </a:xfrm>
+          <a:prstGeom prst="rightArrow">
+            <a:avLst/>
+          </a:prstGeom>
+        </p:spPr>
+        <p:style>
+          <a:lnRef idx="1">
+            <a:schemeClr val="accent2"/>
+          </a:lnRef>
+          <a:fillRef idx="3">
+            <a:schemeClr val="accent2"/>
+          </a:fillRef>
+          <a:effectRef idx="2">
+            <a:schemeClr val="accent2"/>
+          </a:effectRef>
+          <a:fontRef idx="minor">
+            <a:schemeClr val="lt1"/>
+          </a:fontRef>
+        </p:style>
+        <p:txBody>
+          <a:bodyPr rtlCol="0" anchor="ctr"/>
+          <a:lstStyle/>
+          <a:p>
+            <a:pPr algn="ctr"/>
+            <a:endParaRPr lang="tr-TR"/>
           </a:p>
         </p:txBody>
       </p:sp>
@@ -12663,11 +13456,18 @@
   <p:clrMapOvr>
     <a:masterClrMapping/>
   </p:clrMapOvr>
+  <p:timing>
+    <p:tnLst>
+      <p:par>
+        <p:cTn id="1" dur="indefinite" restart="never" nodeType="tmRoot"/>
+      </p:par>
+    </p:tnLst>
+  </p:timing>
 </p:sld>
 </file>
 
 <file path=ppt/slides/slide16.xml><?xml version="1.0" encoding="utf-8"?>
-<p:sld xmlns:a="http://schemas.openxmlformats.org/drawingml/2006/main" xmlns:p="http://schemas.openxmlformats.org/presentationml/2006/main" xmlns:r="http://schemas.openxmlformats.org/officeDocument/2006/relationships">
+<p:sld xmlns:a="http://schemas.openxmlformats.org/drawingml/2006/main" xmlns:r="http://schemas.openxmlformats.org/officeDocument/2006/relationships" xmlns:p="http://schemas.openxmlformats.org/presentationml/2006/main">
   <p:cSld>
     <p:spTree>
       <p:nvGrpSpPr>
@@ -12675,7 +13475,14 @@
         <p:cNvGrpSpPr/>
         <p:nvPr/>
       </p:nvGrpSpPr>
-      <p:grpSpPr/>
+      <p:grpSpPr>
+        <a:xfrm>
+          <a:off x="0" y="0"/>
+          <a:ext cx="0" cy="0"/>
+          <a:chOff x="0" y="0"/>
+          <a:chExt cx="0" cy="0"/>
+        </a:xfrm>
+      </p:grpSpPr>
       <p:sp>
         <p:nvSpPr>
           <p:cNvPr id="2" name="Rectangle 1"/>
@@ -12717,6 +13524,7 @@
           <a:lstStyle/>
           <a:p>
             <a:pPr algn="ctr"/>
+            <a:endParaRPr/>
           </a:p>
         </p:txBody>
       </p:sp>
@@ -12761,6 +13569,7 @@
           <a:lstStyle/>
           <a:p>
             <a:pPr algn="ctr"/>
+            <a:endParaRPr/>
           </a:p>
         </p:txBody>
       </p:sp>
@@ -12805,6 +13614,7 @@
           <a:lstStyle/>
           <a:p>
             <a:pPr algn="ctr"/>
+            <a:endParaRPr/>
           </a:p>
         </p:txBody>
       </p:sp>
@@ -12849,6 +13659,7 @@
           <a:lstStyle/>
           <a:p>
             <a:pPr algn="ctr"/>
+            <a:endParaRPr/>
           </a:p>
         </p:txBody>
       </p:sp>
@@ -13059,6 +13870,7 @@
           <a:lstStyle/>
           <a:p>
             <a:pPr algn="ctr"/>
+            <a:endParaRPr/>
           </a:p>
         </p:txBody>
       </p:sp>
@@ -13147,7 +13959,7 @@
           </a:fontRef>
         </p:style>
         <p:txBody>
-          <a:bodyPr rtlCol="0" anchor="ctr" wrap="none" lIns="0" rIns="0" tIns="0" bIns="0"/>
+          <a:bodyPr wrap="none" lIns="0" tIns="0" rIns="0" bIns="0" rtlCol="0" anchor="ctr"/>
           <a:lstStyle/>
           <a:p>
             <a:pPr algn="ctr">
@@ -13175,7 +13987,7 @@
         <p:spPr>
           <a:xfrm>
             <a:off x="502920" y="2148840"/>
-            <a:ext cx="11201400" cy="1481328"/>
+            <a:ext cx="7871619" cy="1481328"/>
           </a:xfrm>
           <a:prstGeom prst="rect">
             <a:avLst/>
@@ -13209,6 +14021,7 @@
           <a:lstStyle/>
           <a:p>
             <a:pPr algn="ctr"/>
+            <a:endParaRPr/>
           </a:p>
         </p:txBody>
       </p:sp>
@@ -13220,8 +14033,8 @@
         </p:nvSpPr>
         <p:spPr>
           <a:xfrm>
-            <a:off x="713232" y="2231136"/>
-            <a:ext cx="10789920" cy="1353312"/>
+            <a:off x="713233" y="2231136"/>
+            <a:ext cx="7582458" cy="1007968"/>
           </a:xfrm>
           <a:prstGeom prst="rect">
             <a:avLst/>
@@ -13280,7 +14093,7 @@
         <p:spPr>
           <a:xfrm>
             <a:off x="502920" y="3767328"/>
-            <a:ext cx="11201400" cy="470916"/>
+            <a:ext cx="7871619" cy="470916"/>
           </a:xfrm>
           <a:prstGeom prst="rect">
             <a:avLst/>
@@ -13314,6 +14127,7 @@
           <a:lstStyle/>
           <a:p>
             <a:pPr algn="ctr"/>
+            <a:endParaRPr/>
           </a:p>
         </p:txBody>
       </p:sp>
@@ -13358,6 +14172,7 @@
           <a:lstStyle/>
           <a:p>
             <a:pPr algn="ctr"/>
+            <a:endParaRPr/>
           </a:p>
         </p:txBody>
       </p:sp>
@@ -13411,7 +14226,7 @@
         <p:spPr>
           <a:xfrm>
             <a:off x="1170432" y="3858768"/>
-            <a:ext cx="10424160" cy="411480"/>
+            <a:ext cx="7325425" cy="284693"/>
           </a:xfrm>
           <a:prstGeom prst="rect">
             <a:avLst/>
@@ -13452,7 +14267,7 @@
         <p:spPr>
           <a:xfrm>
             <a:off x="502920" y="4293108"/>
-            <a:ext cx="11201400" cy="470916"/>
+            <a:ext cx="7871619" cy="470916"/>
           </a:xfrm>
           <a:prstGeom prst="rect">
             <a:avLst/>
@@ -13486,6 +14301,7 @@
           <a:lstStyle/>
           <a:p>
             <a:pPr algn="ctr"/>
+            <a:endParaRPr/>
           </a:p>
         </p:txBody>
       </p:sp>
@@ -13530,6 +14346,7 @@
           <a:lstStyle/>
           <a:p>
             <a:pPr algn="ctr"/>
+            <a:endParaRPr/>
           </a:p>
         </p:txBody>
       </p:sp>
@@ -13583,7 +14400,7 @@
         <p:spPr>
           <a:xfrm>
             <a:off x="1170432" y="4384548"/>
-            <a:ext cx="10424160" cy="411480"/>
+            <a:ext cx="7325425" cy="477054"/>
           </a:xfrm>
           <a:prstGeom prst="rect">
             <a:avLst/>
@@ -13624,7 +14441,7 @@
         <p:spPr>
           <a:xfrm>
             <a:off x="502920" y="4818888"/>
-            <a:ext cx="11201400" cy="470916"/>
+            <a:ext cx="7871619" cy="470916"/>
           </a:xfrm>
           <a:prstGeom prst="rect">
             <a:avLst/>
@@ -13658,6 +14475,7 @@
           <a:lstStyle/>
           <a:p>
             <a:pPr algn="ctr"/>
+            <a:endParaRPr/>
           </a:p>
         </p:txBody>
       </p:sp>
@@ -13702,6 +14520,7 @@
           <a:lstStyle/>
           <a:p>
             <a:pPr algn="ctr"/>
+            <a:endParaRPr/>
           </a:p>
         </p:txBody>
       </p:sp>
@@ -13755,7 +14574,7 @@
         <p:spPr>
           <a:xfrm>
             <a:off x="1170432" y="4910328"/>
-            <a:ext cx="10424160" cy="411480"/>
+            <a:ext cx="7325425" cy="477054"/>
           </a:xfrm>
           <a:prstGeom prst="rect">
             <a:avLst/>
@@ -13796,7 +14615,7 @@
         <p:spPr>
           <a:xfrm>
             <a:off x="502920" y="5344668"/>
-            <a:ext cx="11201400" cy="470916"/>
+            <a:ext cx="7871619" cy="470916"/>
           </a:xfrm>
           <a:prstGeom prst="rect">
             <a:avLst/>
@@ -13830,6 +14649,7 @@
           <a:lstStyle/>
           <a:p>
             <a:pPr algn="ctr"/>
+            <a:endParaRPr/>
           </a:p>
         </p:txBody>
       </p:sp>
@@ -13874,6 +14694,7 @@
           <a:lstStyle/>
           <a:p>
             <a:pPr algn="ctr"/>
+            <a:endParaRPr/>
           </a:p>
         </p:txBody>
       </p:sp>
@@ -13927,7 +14748,7 @@
         <p:spPr>
           <a:xfrm>
             <a:off x="1170432" y="5436108"/>
-            <a:ext cx="10424160" cy="411480"/>
+            <a:ext cx="7325425" cy="669414"/>
           </a:xfrm>
           <a:prstGeom prst="rect">
             <a:avLst/>
@@ -13968,7 +14789,7 @@
         <p:spPr>
           <a:xfrm>
             <a:off x="502920" y="5870448"/>
-            <a:ext cx="11201400" cy="470916"/>
+            <a:ext cx="7871619" cy="470916"/>
           </a:xfrm>
           <a:prstGeom prst="rect">
             <a:avLst/>
@@ -14002,6 +14823,7 @@
           <a:lstStyle/>
           <a:p>
             <a:pPr algn="ctr"/>
+            <a:endParaRPr/>
           </a:p>
         </p:txBody>
       </p:sp>
@@ -14046,6 +14868,7 @@
           <a:lstStyle/>
           <a:p>
             <a:pPr algn="ctr"/>
+            <a:endParaRPr/>
           </a:p>
         </p:txBody>
       </p:sp>
@@ -14099,7 +14922,7 @@
         <p:spPr>
           <a:xfrm>
             <a:off x="1170432" y="5961888"/>
-            <a:ext cx="10424160" cy="411480"/>
+            <a:ext cx="7325425" cy="284693"/>
           </a:xfrm>
           <a:prstGeom prst="rect">
             <a:avLst/>
@@ -14169,6 +14992,77 @@
               </a:rPr>
               <a:t>GA-EMCOMM · Ulusal Değerlendirme Toplantısı · 09.08.2026</a:t>
             </a:r>
+          </a:p>
+        </p:txBody>
+      </p:sp>
+      <p:pic>
+        <p:nvPicPr>
+          <p:cNvPr id="36" name="Picture 3"/>
+          <p:cNvPicPr>
+            <a:picLocks noChangeAspect="1" noChangeArrowheads="1"/>
+          </p:cNvPicPr>
+          <p:nvPr/>
+        </p:nvPicPr>
+        <p:blipFill>
+          <a:blip r:embed="rId3"/>
+          <a:srcRect/>
+          <a:stretch>
+            <a:fillRect/>
+          </a:stretch>
+        </p:blipFill>
+        <p:spPr bwMode="auto">
+          <a:xfrm>
+            <a:off x="8495857" y="2143125"/>
+            <a:ext cx="3626299" cy="3847424"/>
+          </a:xfrm>
+          <a:prstGeom prst="rect">
+            <a:avLst/>
+          </a:prstGeom>
+          <a:noFill/>
+          <a:ln w="9525">
+            <a:noFill/>
+            <a:miter lim="800000"/>
+            <a:headEnd/>
+            <a:tailEnd/>
+          </a:ln>
+          <a:effectLst/>
+        </p:spPr>
+      </p:pic>
+      <p:sp>
+        <p:nvSpPr>
+          <p:cNvPr id="37" name="36 Sağ Ok"/>
+          <p:cNvSpPr/>
+          <p:nvPr/>
+        </p:nvSpPr>
+        <p:spPr>
+          <a:xfrm rot="4052593">
+            <a:off x="8876528" y="3996515"/>
+            <a:ext cx="258216" cy="241087"/>
+          </a:xfrm>
+          <a:prstGeom prst="rightArrow">
+            <a:avLst/>
+          </a:prstGeom>
+        </p:spPr>
+        <p:style>
+          <a:lnRef idx="1">
+            <a:schemeClr val="accent2"/>
+          </a:lnRef>
+          <a:fillRef idx="3">
+            <a:schemeClr val="accent2"/>
+          </a:fillRef>
+          <a:effectRef idx="2">
+            <a:schemeClr val="accent2"/>
+          </a:effectRef>
+          <a:fontRef idx="minor">
+            <a:schemeClr val="lt1"/>
+          </a:fontRef>
+        </p:style>
+        <p:txBody>
+          <a:bodyPr rtlCol="0" anchor="ctr"/>
+          <a:lstStyle/>
+          <a:p>
+            <a:pPr algn="ctr"/>
+            <a:endParaRPr lang="tr-TR"/>
           </a:p>
         </p:txBody>
       </p:sp>
@@ -14177,11 +15071,18 @@
   <p:clrMapOvr>
     <a:masterClrMapping/>
   </p:clrMapOvr>
+  <p:timing>
+    <p:tnLst>
+      <p:par>
+        <p:cTn id="1" dur="indefinite" restart="never" nodeType="tmRoot"/>
+      </p:par>
+    </p:tnLst>
+  </p:timing>
 </p:sld>
 </file>
 
 <file path=ppt/slides/slide17.xml><?xml version="1.0" encoding="utf-8"?>
-<p:sld xmlns:a="http://schemas.openxmlformats.org/drawingml/2006/main" xmlns:p="http://schemas.openxmlformats.org/presentationml/2006/main" xmlns:r="http://schemas.openxmlformats.org/officeDocument/2006/relationships">
+<p:sld xmlns:a="http://schemas.openxmlformats.org/drawingml/2006/main" xmlns:r="http://schemas.openxmlformats.org/officeDocument/2006/relationships" xmlns:p="http://schemas.openxmlformats.org/presentationml/2006/main">
   <p:cSld>
     <p:spTree>
       <p:nvGrpSpPr>
@@ -14189,7 +15090,14 @@
         <p:cNvGrpSpPr/>
         <p:nvPr/>
       </p:nvGrpSpPr>
-      <p:grpSpPr/>
+      <p:grpSpPr>
+        <a:xfrm>
+          <a:off x="0" y="0"/>
+          <a:ext cx="0" cy="0"/>
+          <a:chOff x="0" y="0"/>
+          <a:chExt cx="0" cy="0"/>
+        </a:xfrm>
+      </p:grpSpPr>
       <p:sp>
         <p:nvSpPr>
           <p:cNvPr id="2" name="Rectangle 1"/>
@@ -14231,6 +15139,7 @@
           <a:lstStyle/>
           <a:p>
             <a:pPr algn="ctr"/>
+            <a:endParaRPr/>
           </a:p>
         </p:txBody>
       </p:sp>
@@ -14275,6 +15184,7 @@
           <a:lstStyle/>
           <a:p>
             <a:pPr algn="ctr"/>
+            <a:endParaRPr/>
           </a:p>
         </p:txBody>
       </p:sp>
@@ -14319,6 +15229,7 @@
           <a:lstStyle/>
           <a:p>
             <a:pPr algn="ctr"/>
+            <a:endParaRPr/>
           </a:p>
         </p:txBody>
       </p:sp>
@@ -14404,11 +15315,18 @@
   <p:clrMapOvr>
     <a:masterClrMapping/>
   </p:clrMapOvr>
+  <p:timing>
+    <p:tnLst>
+      <p:par>
+        <p:cTn id="1" dur="indefinite" restart="never" nodeType="tmRoot"/>
+      </p:par>
+    </p:tnLst>
+  </p:timing>
 </p:sld>
 </file>
 
 <file path=ppt/slides/slide18.xml><?xml version="1.0" encoding="utf-8"?>
-<p:sld xmlns:a="http://schemas.openxmlformats.org/drawingml/2006/main" xmlns:p="http://schemas.openxmlformats.org/presentationml/2006/main" xmlns:r="http://schemas.openxmlformats.org/officeDocument/2006/relationships">
+<p:sld xmlns:a="http://schemas.openxmlformats.org/drawingml/2006/main" xmlns:r="http://schemas.openxmlformats.org/officeDocument/2006/relationships" xmlns:p="http://schemas.openxmlformats.org/presentationml/2006/main">
   <p:cSld>
     <p:spTree>
       <p:nvGrpSpPr>
@@ -14416,7 +15334,14 @@
         <p:cNvGrpSpPr/>
         <p:nvPr/>
       </p:nvGrpSpPr>
-      <p:grpSpPr/>
+      <p:grpSpPr>
+        <a:xfrm>
+          <a:off x="0" y="0"/>
+          <a:ext cx="0" cy="0"/>
+          <a:chOff x="0" y="0"/>
+          <a:chExt cx="0" cy="0"/>
+        </a:xfrm>
+      </p:grpSpPr>
       <p:sp>
         <p:nvSpPr>
           <p:cNvPr id="2" name="Rectangle 1"/>
@@ -14458,6 +15383,7 @@
           <a:lstStyle/>
           <a:p>
             <a:pPr algn="ctr"/>
+            <a:endParaRPr/>
           </a:p>
         </p:txBody>
       </p:sp>
@@ -14502,6 +15428,7 @@
           <a:lstStyle/>
           <a:p>
             <a:pPr algn="ctr"/>
+            <a:endParaRPr/>
           </a:p>
         </p:txBody>
       </p:sp>
@@ -14546,6 +15473,7 @@
           <a:lstStyle/>
           <a:p>
             <a:pPr algn="ctr"/>
+            <a:endParaRPr/>
           </a:p>
         </p:txBody>
       </p:sp>
@@ -14590,6 +15518,7 @@
           <a:lstStyle/>
           <a:p>
             <a:pPr algn="ctr"/>
+            <a:endParaRPr/>
           </a:p>
         </p:txBody>
       </p:sp>
@@ -14800,6 +15729,7 @@
           <a:lstStyle/>
           <a:p>
             <a:pPr algn="ctr"/>
+            <a:endParaRPr/>
           </a:p>
         </p:txBody>
       </p:sp>
@@ -14888,7 +15818,7 @@
           </a:fontRef>
         </p:style>
         <p:txBody>
-          <a:bodyPr rtlCol="0" anchor="ctr" wrap="none" lIns="0" rIns="0" tIns="0" bIns="0"/>
+          <a:bodyPr wrap="none" lIns="0" tIns="0" rIns="0" bIns="0" rtlCol="0" anchor="ctr"/>
           <a:lstStyle/>
           <a:p>
             <a:pPr algn="ctr">
@@ -14950,6 +15880,7 @@
           <a:lstStyle/>
           <a:p>
             <a:pPr algn="ctr"/>
+            <a:endParaRPr/>
           </a:p>
         </p:txBody>
       </p:sp>
@@ -15055,6 +15986,7 @@
           <a:lstStyle/>
           <a:p>
             <a:pPr algn="ctr"/>
+            <a:endParaRPr/>
           </a:p>
         </p:txBody>
       </p:sp>
@@ -15099,6 +16031,7 @@
           <a:lstStyle/>
           <a:p>
             <a:pPr algn="ctr"/>
+            <a:endParaRPr/>
           </a:p>
         </p:txBody>
       </p:sp>
@@ -15227,6 +16160,7 @@
           <a:lstStyle/>
           <a:p>
             <a:pPr algn="ctr"/>
+            <a:endParaRPr/>
           </a:p>
         </p:txBody>
       </p:sp>
@@ -15271,6 +16205,7 @@
           <a:lstStyle/>
           <a:p>
             <a:pPr algn="ctr"/>
+            <a:endParaRPr/>
           </a:p>
         </p:txBody>
       </p:sp>
@@ -15399,6 +16334,7 @@
           <a:lstStyle/>
           <a:p>
             <a:pPr algn="ctr"/>
+            <a:endParaRPr/>
           </a:p>
         </p:txBody>
       </p:sp>
@@ -15443,6 +16379,7 @@
           <a:lstStyle/>
           <a:p>
             <a:pPr algn="ctr"/>
+            <a:endParaRPr/>
           </a:p>
         </p:txBody>
       </p:sp>
@@ -15571,6 +16508,7 @@
           <a:lstStyle/>
           <a:p>
             <a:pPr algn="ctr"/>
+            <a:endParaRPr/>
           </a:p>
         </p:txBody>
       </p:sp>
@@ -15615,6 +16553,7 @@
           <a:lstStyle/>
           <a:p>
             <a:pPr algn="ctr"/>
+            <a:endParaRPr/>
           </a:p>
         </p:txBody>
       </p:sp>
@@ -15743,6 +16682,7 @@
           <a:lstStyle/>
           <a:p>
             <a:pPr algn="ctr"/>
+            <a:endParaRPr/>
           </a:p>
         </p:txBody>
       </p:sp>
@@ -15787,6 +16727,7 @@
           <a:lstStyle/>
           <a:p>
             <a:pPr algn="ctr"/>
+            <a:endParaRPr/>
           </a:p>
         </p:txBody>
       </p:sp>
@@ -15918,11 +16859,18 @@
   <p:clrMapOvr>
     <a:masterClrMapping/>
   </p:clrMapOvr>
+  <p:timing>
+    <p:tnLst>
+      <p:par>
+        <p:cTn id="1" dur="indefinite" restart="never" nodeType="tmRoot"/>
+      </p:par>
+    </p:tnLst>
+  </p:timing>
 </p:sld>
 </file>
 
 <file path=ppt/slides/slide19.xml><?xml version="1.0" encoding="utf-8"?>
-<p:sld xmlns:a="http://schemas.openxmlformats.org/drawingml/2006/main" xmlns:p="http://schemas.openxmlformats.org/presentationml/2006/main" xmlns:r="http://schemas.openxmlformats.org/officeDocument/2006/relationships">
+<p:sld xmlns:a="http://schemas.openxmlformats.org/drawingml/2006/main" xmlns:r="http://schemas.openxmlformats.org/officeDocument/2006/relationships" xmlns:p="http://schemas.openxmlformats.org/presentationml/2006/main">
   <p:cSld>
     <p:spTree>
       <p:nvGrpSpPr>
@@ -15930,7 +16878,14 @@
         <p:cNvGrpSpPr/>
         <p:nvPr/>
       </p:nvGrpSpPr>
-      <p:grpSpPr/>
+      <p:grpSpPr>
+        <a:xfrm>
+          <a:off x="0" y="0"/>
+          <a:ext cx="0" cy="0"/>
+          <a:chOff x="0" y="0"/>
+          <a:chExt cx="0" cy="0"/>
+        </a:xfrm>
+      </p:grpSpPr>
       <p:sp>
         <p:nvSpPr>
           <p:cNvPr id="2" name="Rectangle 1"/>
@@ -15972,6 +16927,7 @@
           <a:lstStyle/>
           <a:p>
             <a:pPr algn="ctr"/>
+            <a:endParaRPr/>
           </a:p>
         </p:txBody>
       </p:sp>
@@ -16016,6 +16972,7 @@
           <a:lstStyle/>
           <a:p>
             <a:pPr algn="ctr"/>
+            <a:endParaRPr/>
           </a:p>
         </p:txBody>
       </p:sp>
@@ -16060,6 +17017,7 @@
           <a:lstStyle/>
           <a:p>
             <a:pPr algn="ctr"/>
+            <a:endParaRPr/>
           </a:p>
         </p:txBody>
       </p:sp>
@@ -16104,6 +17062,7 @@
           <a:lstStyle/>
           <a:p>
             <a:pPr algn="ctr"/>
+            <a:endParaRPr/>
           </a:p>
         </p:txBody>
       </p:sp>
@@ -16314,6 +17273,7 @@
           <a:lstStyle/>
           <a:p>
             <a:pPr algn="ctr"/>
+            <a:endParaRPr/>
           </a:p>
         </p:txBody>
       </p:sp>
@@ -16402,7 +17362,7 @@
           </a:fontRef>
         </p:style>
         <p:txBody>
-          <a:bodyPr rtlCol="0" anchor="ctr" wrap="none" lIns="0" rIns="0" tIns="0" bIns="0"/>
+          <a:bodyPr wrap="none" lIns="0" tIns="0" rIns="0" bIns="0" rtlCol="0" anchor="ctr"/>
           <a:lstStyle/>
           <a:p>
             <a:pPr algn="ctr">
@@ -16464,6 +17424,7 @@
           <a:lstStyle/>
           <a:p>
             <a:pPr algn="ctr"/>
+            <a:endParaRPr/>
           </a:p>
         </p:txBody>
       </p:sp>
@@ -16569,6 +17530,7 @@
           <a:lstStyle/>
           <a:p>
             <a:pPr algn="ctr"/>
+            <a:endParaRPr/>
           </a:p>
         </p:txBody>
       </p:sp>
@@ -16613,6 +17575,7 @@
           <a:lstStyle/>
           <a:p>
             <a:pPr algn="ctr"/>
+            <a:endParaRPr/>
           </a:p>
         </p:txBody>
       </p:sp>
@@ -16741,6 +17704,7 @@
           <a:lstStyle/>
           <a:p>
             <a:pPr algn="ctr"/>
+            <a:endParaRPr/>
           </a:p>
         </p:txBody>
       </p:sp>
@@ -16785,6 +17749,7 @@
           <a:lstStyle/>
           <a:p>
             <a:pPr algn="ctr"/>
+            <a:endParaRPr/>
           </a:p>
         </p:txBody>
       </p:sp>
@@ -16913,6 +17878,7 @@
           <a:lstStyle/>
           <a:p>
             <a:pPr algn="ctr"/>
+            <a:endParaRPr/>
           </a:p>
         </p:txBody>
       </p:sp>
@@ -16957,6 +17923,7 @@
           <a:lstStyle/>
           <a:p>
             <a:pPr algn="ctr"/>
+            <a:endParaRPr/>
           </a:p>
         </p:txBody>
       </p:sp>
@@ -17085,6 +18052,7 @@
           <a:lstStyle/>
           <a:p>
             <a:pPr algn="ctr"/>
+            <a:endParaRPr/>
           </a:p>
         </p:txBody>
       </p:sp>
@@ -17129,6 +18097,7 @@
           <a:lstStyle/>
           <a:p>
             <a:pPr algn="ctr"/>
+            <a:endParaRPr/>
           </a:p>
         </p:txBody>
       </p:sp>
@@ -17257,6 +18226,7 @@
           <a:lstStyle/>
           <a:p>
             <a:pPr algn="ctr"/>
+            <a:endParaRPr/>
           </a:p>
         </p:txBody>
       </p:sp>
@@ -17301,6 +18271,7 @@
           <a:lstStyle/>
           <a:p>
             <a:pPr algn="ctr"/>
+            <a:endParaRPr/>
           </a:p>
         </p:txBody>
       </p:sp>
@@ -17432,11 +18403,18 @@
   <p:clrMapOvr>
     <a:masterClrMapping/>
   </p:clrMapOvr>
+  <p:timing>
+    <p:tnLst>
+      <p:par>
+        <p:cTn id="1" dur="indefinite" restart="never" nodeType="tmRoot"/>
+      </p:par>
+    </p:tnLst>
+  </p:timing>
 </p:sld>
 </file>
 
 <file path=ppt/slides/slide2.xml><?xml version="1.0" encoding="utf-8"?>
-<p:sld xmlns:a="http://schemas.openxmlformats.org/drawingml/2006/main" xmlns:p="http://schemas.openxmlformats.org/presentationml/2006/main" xmlns:r="http://schemas.openxmlformats.org/officeDocument/2006/relationships">
+<p:sld xmlns:a="http://schemas.openxmlformats.org/drawingml/2006/main" xmlns:r="http://schemas.openxmlformats.org/officeDocument/2006/relationships" xmlns:p="http://schemas.openxmlformats.org/presentationml/2006/main">
   <p:cSld>
     <p:spTree>
       <p:nvGrpSpPr>
@@ -17444,7 +18422,14 @@
         <p:cNvGrpSpPr/>
         <p:nvPr/>
       </p:nvGrpSpPr>
-      <p:grpSpPr/>
+      <p:grpSpPr>
+        <a:xfrm>
+          <a:off x="0" y="0"/>
+          <a:ext cx="0" cy="0"/>
+          <a:chOff x="0" y="0"/>
+          <a:chExt cx="0" cy="0"/>
+        </a:xfrm>
+      </p:grpSpPr>
       <p:sp>
         <p:nvSpPr>
           <p:cNvPr id="2" name="Rectangle 1"/>
@@ -17486,6 +18471,7 @@
           <a:lstStyle/>
           <a:p>
             <a:pPr algn="ctr"/>
+            <a:endParaRPr/>
           </a:p>
         </p:txBody>
       </p:sp>
@@ -17530,6 +18516,7 @@
           <a:lstStyle/>
           <a:p>
             <a:pPr algn="ctr"/>
+            <a:endParaRPr/>
           </a:p>
         </p:txBody>
       </p:sp>
@@ -17615,6 +18602,7 @@
           <a:lstStyle/>
           <a:p>
             <a:pPr algn="ctr"/>
+            <a:endParaRPr/>
           </a:p>
         </p:txBody>
       </p:sp>
@@ -17705,6 +18693,7 @@
           <a:lstStyle/>
           <a:p>
             <a:pPr algn="ctr"/>
+            <a:endParaRPr/>
           </a:p>
         </p:txBody>
       </p:sp>
@@ -17795,6 +18784,7 @@
           <a:lstStyle/>
           <a:p>
             <a:pPr algn="ctr"/>
+            <a:endParaRPr/>
           </a:p>
         </p:txBody>
       </p:sp>
@@ -17885,6 +18875,7 @@
           <a:lstStyle/>
           <a:p>
             <a:pPr algn="ctr"/>
+            <a:endParaRPr/>
           </a:p>
         </p:txBody>
       </p:sp>
@@ -17975,6 +18966,7 @@
           <a:lstStyle/>
           <a:p>
             <a:pPr algn="ctr"/>
+            <a:endParaRPr/>
           </a:p>
         </p:txBody>
       </p:sp>
@@ -18067,6 +19059,7 @@
           <a:lstStyle/>
           <a:p>
             <a:pPr algn="ctr"/>
+            <a:endParaRPr/>
           </a:p>
         </p:txBody>
       </p:sp>
@@ -18175,11 +19168,18 @@
   <p:clrMapOvr>
     <a:masterClrMapping/>
   </p:clrMapOvr>
+  <p:timing>
+    <p:tnLst>
+      <p:par>
+        <p:cTn id="1" dur="indefinite" restart="never" nodeType="tmRoot"/>
+      </p:par>
+    </p:tnLst>
+  </p:timing>
 </p:sld>
 </file>
 
 <file path=ppt/slides/slide20.xml><?xml version="1.0" encoding="utf-8"?>
-<p:sld xmlns:a="http://schemas.openxmlformats.org/drawingml/2006/main" xmlns:p="http://schemas.openxmlformats.org/presentationml/2006/main" xmlns:r="http://schemas.openxmlformats.org/officeDocument/2006/relationships">
+<p:sld xmlns:a="http://schemas.openxmlformats.org/drawingml/2006/main" xmlns:r="http://schemas.openxmlformats.org/officeDocument/2006/relationships" xmlns:p="http://schemas.openxmlformats.org/presentationml/2006/main">
   <p:cSld>
     <p:spTree>
       <p:nvGrpSpPr>
@@ -18187,7 +19187,14 @@
         <p:cNvGrpSpPr/>
         <p:nvPr/>
       </p:nvGrpSpPr>
-      <p:grpSpPr/>
+      <p:grpSpPr>
+        <a:xfrm>
+          <a:off x="0" y="0"/>
+          <a:ext cx="0" cy="0"/>
+          <a:chOff x="0" y="0"/>
+          <a:chExt cx="0" cy="0"/>
+        </a:xfrm>
+      </p:grpSpPr>
       <p:sp>
         <p:nvSpPr>
           <p:cNvPr id="2" name="Rectangle 1"/>
@@ -18229,6 +19236,7 @@
           <a:lstStyle/>
           <a:p>
             <a:pPr algn="ctr"/>
+            <a:endParaRPr/>
           </a:p>
         </p:txBody>
       </p:sp>
@@ -18273,6 +19281,7 @@
           <a:lstStyle/>
           <a:p>
             <a:pPr algn="ctr"/>
+            <a:endParaRPr/>
           </a:p>
         </p:txBody>
       </p:sp>
@@ -18317,6 +19326,7 @@
           <a:lstStyle/>
           <a:p>
             <a:pPr algn="ctr"/>
+            <a:endParaRPr/>
           </a:p>
         </p:txBody>
       </p:sp>
@@ -18361,6 +19371,7 @@
           <a:lstStyle/>
           <a:p>
             <a:pPr algn="ctr"/>
+            <a:endParaRPr/>
           </a:p>
         </p:txBody>
       </p:sp>
@@ -18571,6 +19582,7 @@
           <a:lstStyle/>
           <a:p>
             <a:pPr algn="ctr"/>
+            <a:endParaRPr/>
           </a:p>
         </p:txBody>
       </p:sp>
@@ -18659,7 +19671,7 @@
           </a:fontRef>
         </p:style>
         <p:txBody>
-          <a:bodyPr rtlCol="0" anchor="ctr" wrap="none" lIns="0" rIns="0" tIns="0" bIns="0"/>
+          <a:bodyPr wrap="none" lIns="0" tIns="0" rIns="0" bIns="0" rtlCol="0" anchor="ctr"/>
           <a:lstStyle/>
           <a:p>
             <a:pPr algn="ctr">
@@ -18721,6 +19733,7 @@
           <a:lstStyle/>
           <a:p>
             <a:pPr algn="ctr"/>
+            <a:endParaRPr/>
           </a:p>
         </p:txBody>
       </p:sp>
@@ -18826,6 +19839,7 @@
           <a:lstStyle/>
           <a:p>
             <a:pPr algn="ctr"/>
+            <a:endParaRPr/>
           </a:p>
         </p:txBody>
       </p:sp>
@@ -18870,6 +19884,7 @@
           <a:lstStyle/>
           <a:p>
             <a:pPr algn="ctr"/>
+            <a:endParaRPr/>
           </a:p>
         </p:txBody>
       </p:sp>
@@ -18998,6 +20013,7 @@
           <a:lstStyle/>
           <a:p>
             <a:pPr algn="ctr"/>
+            <a:endParaRPr/>
           </a:p>
         </p:txBody>
       </p:sp>
@@ -19042,6 +20058,7 @@
           <a:lstStyle/>
           <a:p>
             <a:pPr algn="ctr"/>
+            <a:endParaRPr/>
           </a:p>
         </p:txBody>
       </p:sp>
@@ -19170,6 +20187,7 @@
           <a:lstStyle/>
           <a:p>
             <a:pPr algn="ctr"/>
+            <a:endParaRPr/>
           </a:p>
         </p:txBody>
       </p:sp>
@@ -19214,6 +20232,7 @@
           <a:lstStyle/>
           <a:p>
             <a:pPr algn="ctr"/>
+            <a:endParaRPr/>
           </a:p>
         </p:txBody>
       </p:sp>
@@ -19342,6 +20361,7 @@
           <a:lstStyle/>
           <a:p>
             <a:pPr algn="ctr"/>
+            <a:endParaRPr/>
           </a:p>
         </p:txBody>
       </p:sp>
@@ -19386,6 +20406,7 @@
           <a:lstStyle/>
           <a:p>
             <a:pPr algn="ctr"/>
+            <a:endParaRPr/>
           </a:p>
         </p:txBody>
       </p:sp>
@@ -19514,6 +20535,7 @@
           <a:lstStyle/>
           <a:p>
             <a:pPr algn="ctr"/>
+            <a:endParaRPr/>
           </a:p>
         </p:txBody>
       </p:sp>
@@ -19558,6 +20580,7 @@
           <a:lstStyle/>
           <a:p>
             <a:pPr algn="ctr"/>
+            <a:endParaRPr/>
           </a:p>
         </p:txBody>
       </p:sp>
@@ -19689,11 +20712,18 @@
   <p:clrMapOvr>
     <a:masterClrMapping/>
   </p:clrMapOvr>
+  <p:timing>
+    <p:tnLst>
+      <p:par>
+        <p:cTn id="1" dur="indefinite" restart="never" nodeType="tmRoot"/>
+      </p:par>
+    </p:tnLst>
+  </p:timing>
 </p:sld>
 </file>
 
 <file path=ppt/slides/slide21.xml><?xml version="1.0" encoding="utf-8"?>
-<p:sld xmlns:a="http://schemas.openxmlformats.org/drawingml/2006/main" xmlns:p="http://schemas.openxmlformats.org/presentationml/2006/main" xmlns:r="http://schemas.openxmlformats.org/officeDocument/2006/relationships">
+<p:sld xmlns:a="http://schemas.openxmlformats.org/drawingml/2006/main" xmlns:r="http://schemas.openxmlformats.org/officeDocument/2006/relationships" xmlns:p="http://schemas.openxmlformats.org/presentationml/2006/main">
   <p:cSld>
     <p:spTree>
       <p:nvGrpSpPr>
@@ -19701,7 +20731,14 @@
         <p:cNvGrpSpPr/>
         <p:nvPr/>
       </p:nvGrpSpPr>
-      <p:grpSpPr/>
+      <p:grpSpPr>
+        <a:xfrm>
+          <a:off x="0" y="0"/>
+          <a:ext cx="0" cy="0"/>
+          <a:chOff x="0" y="0"/>
+          <a:chExt cx="0" cy="0"/>
+        </a:xfrm>
+      </p:grpSpPr>
       <p:sp>
         <p:nvSpPr>
           <p:cNvPr id="2" name="Rectangle 1"/>
@@ -19743,6 +20780,7 @@
           <a:lstStyle/>
           <a:p>
             <a:pPr algn="ctr"/>
+            <a:endParaRPr/>
           </a:p>
         </p:txBody>
       </p:sp>
@@ -19787,6 +20825,7 @@
           <a:lstStyle/>
           <a:p>
             <a:pPr algn="ctr"/>
+            <a:endParaRPr/>
           </a:p>
         </p:txBody>
       </p:sp>
@@ -19831,6 +20870,7 @@
           <a:lstStyle/>
           <a:p>
             <a:pPr algn="ctr"/>
+            <a:endParaRPr/>
           </a:p>
         </p:txBody>
       </p:sp>
@@ -19875,6 +20915,7 @@
           <a:lstStyle/>
           <a:p>
             <a:pPr algn="ctr"/>
+            <a:endParaRPr/>
           </a:p>
         </p:txBody>
       </p:sp>
@@ -20085,6 +21126,7 @@
           <a:lstStyle/>
           <a:p>
             <a:pPr algn="ctr"/>
+            <a:endParaRPr/>
           </a:p>
         </p:txBody>
       </p:sp>
@@ -20173,7 +21215,7 @@
           </a:fontRef>
         </p:style>
         <p:txBody>
-          <a:bodyPr rtlCol="0" anchor="ctr" wrap="none" lIns="0" rIns="0" tIns="0" bIns="0"/>
+          <a:bodyPr wrap="none" lIns="0" tIns="0" rIns="0" bIns="0" rtlCol="0" anchor="ctr"/>
           <a:lstStyle/>
           <a:p>
             <a:pPr algn="ctr">
@@ -20235,6 +21277,7 @@
           <a:lstStyle/>
           <a:p>
             <a:pPr algn="ctr"/>
+            <a:endParaRPr/>
           </a:p>
         </p:txBody>
       </p:sp>
@@ -20340,6 +21383,7 @@
           <a:lstStyle/>
           <a:p>
             <a:pPr algn="ctr"/>
+            <a:endParaRPr/>
           </a:p>
         </p:txBody>
       </p:sp>
@@ -20384,6 +21428,7 @@
           <a:lstStyle/>
           <a:p>
             <a:pPr algn="ctr"/>
+            <a:endParaRPr/>
           </a:p>
         </p:txBody>
       </p:sp>
@@ -20512,6 +21557,7 @@
           <a:lstStyle/>
           <a:p>
             <a:pPr algn="ctr"/>
+            <a:endParaRPr/>
           </a:p>
         </p:txBody>
       </p:sp>
@@ -20556,6 +21602,7 @@
           <a:lstStyle/>
           <a:p>
             <a:pPr algn="ctr"/>
+            <a:endParaRPr/>
           </a:p>
         </p:txBody>
       </p:sp>
@@ -20684,6 +21731,7 @@
           <a:lstStyle/>
           <a:p>
             <a:pPr algn="ctr"/>
+            <a:endParaRPr/>
           </a:p>
         </p:txBody>
       </p:sp>
@@ -20728,6 +21776,7 @@
           <a:lstStyle/>
           <a:p>
             <a:pPr algn="ctr"/>
+            <a:endParaRPr/>
           </a:p>
         </p:txBody>
       </p:sp>
@@ -20856,6 +21905,7 @@
           <a:lstStyle/>
           <a:p>
             <a:pPr algn="ctr"/>
+            <a:endParaRPr/>
           </a:p>
         </p:txBody>
       </p:sp>
@@ -20900,6 +21950,7 @@
           <a:lstStyle/>
           <a:p>
             <a:pPr algn="ctr"/>
+            <a:endParaRPr/>
           </a:p>
         </p:txBody>
       </p:sp>
@@ -21028,6 +22079,7 @@
           <a:lstStyle/>
           <a:p>
             <a:pPr algn="ctr"/>
+            <a:endParaRPr/>
           </a:p>
         </p:txBody>
       </p:sp>
@@ -21072,6 +22124,7 @@
           <a:lstStyle/>
           <a:p>
             <a:pPr algn="ctr"/>
+            <a:endParaRPr/>
           </a:p>
         </p:txBody>
       </p:sp>
@@ -21203,11 +22256,18 @@
   <p:clrMapOvr>
     <a:masterClrMapping/>
   </p:clrMapOvr>
+  <p:timing>
+    <p:tnLst>
+      <p:par>
+        <p:cTn id="1" dur="indefinite" restart="never" nodeType="tmRoot"/>
+      </p:par>
+    </p:tnLst>
+  </p:timing>
 </p:sld>
 </file>
 
 <file path=ppt/slides/slide22.xml><?xml version="1.0" encoding="utf-8"?>
-<p:sld xmlns:a="http://schemas.openxmlformats.org/drawingml/2006/main" xmlns:p="http://schemas.openxmlformats.org/presentationml/2006/main" xmlns:r="http://schemas.openxmlformats.org/officeDocument/2006/relationships">
+<p:sld xmlns:a="http://schemas.openxmlformats.org/drawingml/2006/main" xmlns:r="http://schemas.openxmlformats.org/officeDocument/2006/relationships" xmlns:p="http://schemas.openxmlformats.org/presentationml/2006/main">
   <p:cSld>
     <p:spTree>
       <p:nvGrpSpPr>
@@ -21215,7 +22275,14 @@
         <p:cNvGrpSpPr/>
         <p:nvPr/>
       </p:nvGrpSpPr>
-      <p:grpSpPr/>
+      <p:grpSpPr>
+        <a:xfrm>
+          <a:off x="0" y="0"/>
+          <a:ext cx="0" cy="0"/>
+          <a:chOff x="0" y="0"/>
+          <a:chExt cx="0" cy="0"/>
+        </a:xfrm>
+      </p:grpSpPr>
       <p:sp>
         <p:nvSpPr>
           <p:cNvPr id="2" name="Rectangle 1"/>
@@ -21257,6 +22324,7 @@
           <a:lstStyle/>
           <a:p>
             <a:pPr algn="ctr"/>
+            <a:endParaRPr/>
           </a:p>
         </p:txBody>
       </p:sp>
@@ -21301,6 +22369,7 @@
           <a:lstStyle/>
           <a:p>
             <a:pPr algn="ctr"/>
+            <a:endParaRPr/>
           </a:p>
         </p:txBody>
       </p:sp>
@@ -21345,6 +22414,7 @@
           <a:lstStyle/>
           <a:p>
             <a:pPr algn="ctr"/>
+            <a:endParaRPr/>
           </a:p>
         </p:txBody>
       </p:sp>
@@ -21389,6 +22459,7 @@
           <a:lstStyle/>
           <a:p>
             <a:pPr algn="ctr"/>
+            <a:endParaRPr/>
           </a:p>
         </p:txBody>
       </p:sp>
@@ -21599,6 +22670,7 @@
           <a:lstStyle/>
           <a:p>
             <a:pPr algn="ctr"/>
+            <a:endParaRPr/>
           </a:p>
         </p:txBody>
       </p:sp>
@@ -21687,7 +22759,7 @@
           </a:fontRef>
         </p:style>
         <p:txBody>
-          <a:bodyPr rtlCol="0" anchor="ctr" wrap="none" lIns="0" rIns="0" tIns="0" bIns="0"/>
+          <a:bodyPr wrap="none" lIns="0" tIns="0" rIns="0" bIns="0" rtlCol="0" anchor="ctr"/>
           <a:lstStyle/>
           <a:p>
             <a:pPr algn="ctr">
@@ -21749,6 +22821,7 @@
           <a:lstStyle/>
           <a:p>
             <a:pPr algn="ctr"/>
+            <a:endParaRPr/>
           </a:p>
         </p:txBody>
       </p:sp>
@@ -21854,6 +22927,7 @@
           <a:lstStyle/>
           <a:p>
             <a:pPr algn="ctr"/>
+            <a:endParaRPr/>
           </a:p>
         </p:txBody>
       </p:sp>
@@ -21898,6 +22972,7 @@
           <a:lstStyle/>
           <a:p>
             <a:pPr algn="ctr"/>
+            <a:endParaRPr/>
           </a:p>
         </p:txBody>
       </p:sp>
@@ -22026,6 +23101,7 @@
           <a:lstStyle/>
           <a:p>
             <a:pPr algn="ctr"/>
+            <a:endParaRPr/>
           </a:p>
         </p:txBody>
       </p:sp>
@@ -22070,6 +23146,7 @@
           <a:lstStyle/>
           <a:p>
             <a:pPr algn="ctr"/>
+            <a:endParaRPr/>
           </a:p>
         </p:txBody>
       </p:sp>
@@ -22198,6 +23275,7 @@
           <a:lstStyle/>
           <a:p>
             <a:pPr algn="ctr"/>
+            <a:endParaRPr/>
           </a:p>
         </p:txBody>
       </p:sp>
@@ -22242,6 +23320,7 @@
           <a:lstStyle/>
           <a:p>
             <a:pPr algn="ctr"/>
+            <a:endParaRPr/>
           </a:p>
         </p:txBody>
       </p:sp>
@@ -22370,6 +23449,7 @@
           <a:lstStyle/>
           <a:p>
             <a:pPr algn="ctr"/>
+            <a:endParaRPr/>
           </a:p>
         </p:txBody>
       </p:sp>
@@ -22414,6 +23494,7 @@
           <a:lstStyle/>
           <a:p>
             <a:pPr algn="ctr"/>
+            <a:endParaRPr/>
           </a:p>
         </p:txBody>
       </p:sp>
@@ -22542,6 +23623,7 @@
           <a:lstStyle/>
           <a:p>
             <a:pPr algn="ctr"/>
+            <a:endParaRPr/>
           </a:p>
         </p:txBody>
       </p:sp>
@@ -22586,6 +23668,7 @@
           <a:lstStyle/>
           <a:p>
             <a:pPr algn="ctr"/>
+            <a:endParaRPr/>
           </a:p>
         </p:txBody>
       </p:sp>
@@ -22717,11 +23800,18 @@
   <p:clrMapOvr>
     <a:masterClrMapping/>
   </p:clrMapOvr>
+  <p:timing>
+    <p:tnLst>
+      <p:par>
+        <p:cTn id="1" dur="indefinite" restart="never" nodeType="tmRoot"/>
+      </p:par>
+    </p:tnLst>
+  </p:timing>
 </p:sld>
 </file>
 
 <file path=ppt/slides/slide23.xml><?xml version="1.0" encoding="utf-8"?>
-<p:sld xmlns:a="http://schemas.openxmlformats.org/drawingml/2006/main" xmlns:p="http://schemas.openxmlformats.org/presentationml/2006/main" xmlns:r="http://schemas.openxmlformats.org/officeDocument/2006/relationships">
+<p:sld xmlns:a="http://schemas.openxmlformats.org/drawingml/2006/main" xmlns:r="http://schemas.openxmlformats.org/officeDocument/2006/relationships" xmlns:p="http://schemas.openxmlformats.org/presentationml/2006/main">
   <p:cSld>
     <p:spTree>
       <p:nvGrpSpPr>
@@ -22729,7 +23819,14 @@
         <p:cNvGrpSpPr/>
         <p:nvPr/>
       </p:nvGrpSpPr>
-      <p:grpSpPr/>
+      <p:grpSpPr>
+        <a:xfrm>
+          <a:off x="0" y="0"/>
+          <a:ext cx="0" cy="0"/>
+          <a:chOff x="0" y="0"/>
+          <a:chExt cx="0" cy="0"/>
+        </a:xfrm>
+      </p:grpSpPr>
       <p:sp>
         <p:nvSpPr>
           <p:cNvPr id="2" name="Rectangle 1"/>
@@ -22771,6 +23868,7 @@
           <a:lstStyle/>
           <a:p>
             <a:pPr algn="ctr"/>
+            <a:endParaRPr/>
           </a:p>
         </p:txBody>
       </p:sp>
@@ -22815,6 +23913,7 @@
           <a:lstStyle/>
           <a:p>
             <a:pPr algn="ctr"/>
+            <a:endParaRPr/>
           </a:p>
         </p:txBody>
       </p:sp>
@@ -22859,6 +23958,7 @@
           <a:lstStyle/>
           <a:p>
             <a:pPr algn="ctr"/>
+            <a:endParaRPr/>
           </a:p>
         </p:txBody>
       </p:sp>
@@ -22903,6 +24003,7 @@
           <a:lstStyle/>
           <a:p>
             <a:pPr algn="ctr"/>
+            <a:endParaRPr/>
           </a:p>
         </p:txBody>
       </p:sp>
@@ -23113,6 +24214,7 @@
           <a:lstStyle/>
           <a:p>
             <a:pPr algn="ctr"/>
+            <a:endParaRPr/>
           </a:p>
         </p:txBody>
       </p:sp>
@@ -23201,7 +24303,7 @@
           </a:fontRef>
         </p:style>
         <p:txBody>
-          <a:bodyPr rtlCol="0" anchor="ctr" wrap="none" lIns="0" rIns="0" tIns="0" bIns="0"/>
+          <a:bodyPr wrap="none" lIns="0" tIns="0" rIns="0" bIns="0" rtlCol="0" anchor="ctr"/>
           <a:lstStyle/>
           <a:p>
             <a:pPr algn="ctr">
@@ -23263,6 +24365,7 @@
           <a:lstStyle/>
           <a:p>
             <a:pPr algn="ctr"/>
+            <a:endParaRPr/>
           </a:p>
         </p:txBody>
       </p:sp>
@@ -23368,6 +24471,7 @@
           <a:lstStyle/>
           <a:p>
             <a:pPr algn="ctr"/>
+            <a:endParaRPr/>
           </a:p>
         </p:txBody>
       </p:sp>
@@ -23412,6 +24516,7 @@
           <a:lstStyle/>
           <a:p>
             <a:pPr algn="ctr"/>
+            <a:endParaRPr/>
           </a:p>
         </p:txBody>
       </p:sp>
@@ -23540,6 +24645,7 @@
           <a:lstStyle/>
           <a:p>
             <a:pPr algn="ctr"/>
+            <a:endParaRPr/>
           </a:p>
         </p:txBody>
       </p:sp>
@@ -23584,6 +24690,7 @@
           <a:lstStyle/>
           <a:p>
             <a:pPr algn="ctr"/>
+            <a:endParaRPr/>
           </a:p>
         </p:txBody>
       </p:sp>
@@ -23712,6 +24819,7 @@
           <a:lstStyle/>
           <a:p>
             <a:pPr algn="ctr"/>
+            <a:endParaRPr/>
           </a:p>
         </p:txBody>
       </p:sp>
@@ -23756,6 +24864,7 @@
           <a:lstStyle/>
           <a:p>
             <a:pPr algn="ctr"/>
+            <a:endParaRPr/>
           </a:p>
         </p:txBody>
       </p:sp>
@@ -23884,6 +24993,7 @@
           <a:lstStyle/>
           <a:p>
             <a:pPr algn="ctr"/>
+            <a:endParaRPr/>
           </a:p>
         </p:txBody>
       </p:sp>
@@ -23928,6 +25038,7 @@
           <a:lstStyle/>
           <a:p>
             <a:pPr algn="ctr"/>
+            <a:endParaRPr/>
           </a:p>
         </p:txBody>
       </p:sp>
@@ -24056,6 +25167,7 @@
           <a:lstStyle/>
           <a:p>
             <a:pPr algn="ctr"/>
+            <a:endParaRPr/>
           </a:p>
         </p:txBody>
       </p:sp>
@@ -24100,6 +25212,7 @@
           <a:lstStyle/>
           <a:p>
             <a:pPr algn="ctr"/>
+            <a:endParaRPr/>
           </a:p>
         </p:txBody>
       </p:sp>
@@ -24231,11 +25344,18 @@
   <p:clrMapOvr>
     <a:masterClrMapping/>
   </p:clrMapOvr>
+  <p:timing>
+    <p:tnLst>
+      <p:par>
+        <p:cTn id="1" dur="indefinite" restart="never" nodeType="tmRoot"/>
+      </p:par>
+    </p:tnLst>
+  </p:timing>
 </p:sld>
 </file>
 
 <file path=ppt/slides/slide24.xml><?xml version="1.0" encoding="utf-8"?>
-<p:sld xmlns:a="http://schemas.openxmlformats.org/drawingml/2006/main" xmlns:p="http://schemas.openxmlformats.org/presentationml/2006/main" xmlns:r="http://schemas.openxmlformats.org/officeDocument/2006/relationships">
+<p:sld xmlns:a="http://schemas.openxmlformats.org/drawingml/2006/main" xmlns:r="http://schemas.openxmlformats.org/officeDocument/2006/relationships" xmlns:p="http://schemas.openxmlformats.org/presentationml/2006/main">
   <p:cSld>
     <p:spTree>
       <p:nvGrpSpPr>
@@ -24243,7 +25363,14 @@
         <p:cNvGrpSpPr/>
         <p:nvPr/>
       </p:nvGrpSpPr>
-      <p:grpSpPr/>
+      <p:grpSpPr>
+        <a:xfrm>
+          <a:off x="0" y="0"/>
+          <a:ext cx="0" cy="0"/>
+          <a:chOff x="0" y="0"/>
+          <a:chExt cx="0" cy="0"/>
+        </a:xfrm>
+      </p:grpSpPr>
       <p:sp>
         <p:nvSpPr>
           <p:cNvPr id="2" name="Rectangle 1"/>
@@ -24285,6 +25412,7 @@
           <a:lstStyle/>
           <a:p>
             <a:pPr algn="ctr"/>
+            <a:endParaRPr/>
           </a:p>
         </p:txBody>
       </p:sp>
@@ -24329,6 +25457,7 @@
           <a:lstStyle/>
           <a:p>
             <a:pPr algn="ctr"/>
+            <a:endParaRPr/>
           </a:p>
         </p:txBody>
       </p:sp>
@@ -24373,6 +25502,7 @@
           <a:lstStyle/>
           <a:p>
             <a:pPr algn="ctr"/>
+            <a:endParaRPr/>
           </a:p>
         </p:txBody>
       </p:sp>
@@ -24417,6 +25547,7 @@
           <a:lstStyle/>
           <a:p>
             <a:pPr algn="ctr"/>
+            <a:endParaRPr/>
           </a:p>
         </p:txBody>
       </p:sp>
@@ -24627,6 +25758,7 @@
           <a:lstStyle/>
           <a:p>
             <a:pPr algn="ctr"/>
+            <a:endParaRPr/>
           </a:p>
         </p:txBody>
       </p:sp>
@@ -24715,7 +25847,7 @@
           </a:fontRef>
         </p:style>
         <p:txBody>
-          <a:bodyPr rtlCol="0" anchor="ctr" wrap="none" lIns="0" rIns="0" tIns="0" bIns="0"/>
+          <a:bodyPr wrap="none" lIns="0" tIns="0" rIns="0" bIns="0" rtlCol="0" anchor="ctr"/>
           <a:lstStyle/>
           <a:p>
             <a:pPr algn="ctr">
@@ -24777,6 +25909,7 @@
           <a:lstStyle/>
           <a:p>
             <a:pPr algn="ctr"/>
+            <a:endParaRPr/>
           </a:p>
         </p:txBody>
       </p:sp>
@@ -24882,6 +26015,7 @@
           <a:lstStyle/>
           <a:p>
             <a:pPr algn="ctr"/>
+            <a:endParaRPr/>
           </a:p>
         </p:txBody>
       </p:sp>
@@ -24926,6 +26060,7 @@
           <a:lstStyle/>
           <a:p>
             <a:pPr algn="ctr"/>
+            <a:endParaRPr/>
           </a:p>
         </p:txBody>
       </p:sp>
@@ -25054,6 +26189,7 @@
           <a:lstStyle/>
           <a:p>
             <a:pPr algn="ctr"/>
+            <a:endParaRPr/>
           </a:p>
         </p:txBody>
       </p:sp>
@@ -25098,6 +26234,7 @@
           <a:lstStyle/>
           <a:p>
             <a:pPr algn="ctr"/>
+            <a:endParaRPr/>
           </a:p>
         </p:txBody>
       </p:sp>
@@ -25226,6 +26363,7 @@
           <a:lstStyle/>
           <a:p>
             <a:pPr algn="ctr"/>
+            <a:endParaRPr/>
           </a:p>
         </p:txBody>
       </p:sp>
@@ -25270,6 +26408,7 @@
           <a:lstStyle/>
           <a:p>
             <a:pPr algn="ctr"/>
+            <a:endParaRPr/>
           </a:p>
         </p:txBody>
       </p:sp>
@@ -25398,6 +26537,7 @@
           <a:lstStyle/>
           <a:p>
             <a:pPr algn="ctr"/>
+            <a:endParaRPr/>
           </a:p>
         </p:txBody>
       </p:sp>
@@ -25442,6 +26582,7 @@
           <a:lstStyle/>
           <a:p>
             <a:pPr algn="ctr"/>
+            <a:endParaRPr/>
           </a:p>
         </p:txBody>
       </p:sp>
@@ -25570,6 +26711,7 @@
           <a:lstStyle/>
           <a:p>
             <a:pPr algn="ctr"/>
+            <a:endParaRPr/>
           </a:p>
         </p:txBody>
       </p:sp>
@@ -25614,6 +26756,7 @@
           <a:lstStyle/>
           <a:p>
             <a:pPr algn="ctr"/>
+            <a:endParaRPr/>
           </a:p>
         </p:txBody>
       </p:sp>
@@ -25745,11 +26888,18 @@
   <p:clrMapOvr>
     <a:masterClrMapping/>
   </p:clrMapOvr>
+  <p:timing>
+    <p:tnLst>
+      <p:par>
+        <p:cTn id="1" dur="indefinite" restart="never" nodeType="tmRoot"/>
+      </p:par>
+    </p:tnLst>
+  </p:timing>
 </p:sld>
 </file>
 
 <file path=ppt/slides/slide25.xml><?xml version="1.0" encoding="utf-8"?>
-<p:sld xmlns:a="http://schemas.openxmlformats.org/drawingml/2006/main" xmlns:p="http://schemas.openxmlformats.org/presentationml/2006/main" xmlns:r="http://schemas.openxmlformats.org/officeDocument/2006/relationships">
+<p:sld xmlns:a="http://schemas.openxmlformats.org/drawingml/2006/main" xmlns:r="http://schemas.openxmlformats.org/officeDocument/2006/relationships" xmlns:p="http://schemas.openxmlformats.org/presentationml/2006/main">
   <p:cSld>
     <p:spTree>
       <p:nvGrpSpPr>
@@ -25757,7 +26907,14 @@
         <p:cNvGrpSpPr/>
         <p:nvPr/>
       </p:nvGrpSpPr>
-      <p:grpSpPr/>
+      <p:grpSpPr>
+        <a:xfrm>
+          <a:off x="0" y="0"/>
+          <a:ext cx="0" cy="0"/>
+          <a:chOff x="0" y="0"/>
+          <a:chExt cx="0" cy="0"/>
+        </a:xfrm>
+      </p:grpSpPr>
       <p:sp>
         <p:nvSpPr>
           <p:cNvPr id="2" name="Rectangle 1"/>
@@ -25799,6 +26956,7 @@
           <a:lstStyle/>
           <a:p>
             <a:pPr algn="ctr"/>
+            <a:endParaRPr/>
           </a:p>
         </p:txBody>
       </p:sp>
@@ -25843,6 +27001,7 @@
           <a:lstStyle/>
           <a:p>
             <a:pPr algn="ctr"/>
+            <a:endParaRPr/>
           </a:p>
         </p:txBody>
       </p:sp>
@@ -25887,6 +27046,7 @@
           <a:lstStyle/>
           <a:p>
             <a:pPr algn="ctr"/>
+            <a:endParaRPr/>
           </a:p>
         </p:txBody>
       </p:sp>
@@ -25931,6 +27091,7 @@
           <a:lstStyle/>
           <a:p>
             <a:pPr algn="ctr"/>
+            <a:endParaRPr/>
           </a:p>
         </p:txBody>
       </p:sp>
@@ -26141,6 +27302,7 @@
           <a:lstStyle/>
           <a:p>
             <a:pPr algn="ctr"/>
+            <a:endParaRPr/>
           </a:p>
         </p:txBody>
       </p:sp>
@@ -26229,7 +27391,7 @@
           </a:fontRef>
         </p:style>
         <p:txBody>
-          <a:bodyPr rtlCol="0" anchor="ctr" wrap="none" lIns="0" rIns="0" tIns="0" bIns="0"/>
+          <a:bodyPr wrap="none" lIns="0" tIns="0" rIns="0" bIns="0" rtlCol="0" anchor="ctr"/>
           <a:lstStyle/>
           <a:p>
             <a:pPr algn="ctr">
@@ -26291,6 +27453,7 @@
           <a:lstStyle/>
           <a:p>
             <a:pPr algn="ctr"/>
+            <a:endParaRPr/>
           </a:p>
         </p:txBody>
       </p:sp>
@@ -26396,6 +27559,7 @@
           <a:lstStyle/>
           <a:p>
             <a:pPr algn="ctr"/>
+            <a:endParaRPr/>
           </a:p>
         </p:txBody>
       </p:sp>
@@ -26440,6 +27604,7 @@
           <a:lstStyle/>
           <a:p>
             <a:pPr algn="ctr"/>
+            <a:endParaRPr/>
           </a:p>
         </p:txBody>
       </p:sp>
@@ -26568,6 +27733,7 @@
           <a:lstStyle/>
           <a:p>
             <a:pPr algn="ctr"/>
+            <a:endParaRPr/>
           </a:p>
         </p:txBody>
       </p:sp>
@@ -26612,6 +27778,7 @@
           <a:lstStyle/>
           <a:p>
             <a:pPr algn="ctr"/>
+            <a:endParaRPr/>
           </a:p>
         </p:txBody>
       </p:sp>
@@ -26740,6 +27907,7 @@
           <a:lstStyle/>
           <a:p>
             <a:pPr algn="ctr"/>
+            <a:endParaRPr/>
           </a:p>
         </p:txBody>
       </p:sp>
@@ -26784,6 +27952,7 @@
           <a:lstStyle/>
           <a:p>
             <a:pPr algn="ctr"/>
+            <a:endParaRPr/>
           </a:p>
         </p:txBody>
       </p:sp>
@@ -26912,6 +28081,7 @@
           <a:lstStyle/>
           <a:p>
             <a:pPr algn="ctr"/>
+            <a:endParaRPr/>
           </a:p>
         </p:txBody>
       </p:sp>
@@ -26956,6 +28126,7 @@
           <a:lstStyle/>
           <a:p>
             <a:pPr algn="ctr"/>
+            <a:endParaRPr/>
           </a:p>
         </p:txBody>
       </p:sp>
@@ -27084,6 +28255,7 @@
           <a:lstStyle/>
           <a:p>
             <a:pPr algn="ctr"/>
+            <a:endParaRPr/>
           </a:p>
         </p:txBody>
       </p:sp>
@@ -27128,6 +28300,7 @@
           <a:lstStyle/>
           <a:p>
             <a:pPr algn="ctr"/>
+            <a:endParaRPr/>
           </a:p>
         </p:txBody>
       </p:sp>
@@ -27259,11 +28432,18 @@
   <p:clrMapOvr>
     <a:masterClrMapping/>
   </p:clrMapOvr>
+  <p:timing>
+    <p:tnLst>
+      <p:par>
+        <p:cTn id="1" dur="indefinite" restart="never" nodeType="tmRoot"/>
+      </p:par>
+    </p:tnLst>
+  </p:timing>
 </p:sld>
 </file>
 
 <file path=ppt/slides/slide26.xml><?xml version="1.0" encoding="utf-8"?>
-<p:sld xmlns:a="http://schemas.openxmlformats.org/drawingml/2006/main" xmlns:p="http://schemas.openxmlformats.org/presentationml/2006/main" xmlns:r="http://schemas.openxmlformats.org/officeDocument/2006/relationships">
+<p:sld xmlns:a="http://schemas.openxmlformats.org/drawingml/2006/main" xmlns:r="http://schemas.openxmlformats.org/officeDocument/2006/relationships" xmlns:p="http://schemas.openxmlformats.org/presentationml/2006/main">
   <p:cSld>
     <p:spTree>
       <p:nvGrpSpPr>
@@ -27271,7 +28451,14 @@
         <p:cNvGrpSpPr/>
         <p:nvPr/>
       </p:nvGrpSpPr>
-      <p:grpSpPr/>
+      <p:grpSpPr>
+        <a:xfrm>
+          <a:off x="0" y="0"/>
+          <a:ext cx="0" cy="0"/>
+          <a:chOff x="0" y="0"/>
+          <a:chExt cx="0" cy="0"/>
+        </a:xfrm>
+      </p:grpSpPr>
       <p:sp>
         <p:nvSpPr>
           <p:cNvPr id="2" name="Rectangle 1"/>
@@ -27313,6 +28500,7 @@
           <a:lstStyle/>
           <a:p>
             <a:pPr algn="ctr"/>
+            <a:endParaRPr/>
           </a:p>
         </p:txBody>
       </p:sp>
@@ -27357,6 +28545,7 @@
           <a:lstStyle/>
           <a:p>
             <a:pPr algn="ctr"/>
+            <a:endParaRPr/>
           </a:p>
         </p:txBody>
       </p:sp>
@@ -27401,6 +28590,7 @@
           <a:lstStyle/>
           <a:p>
             <a:pPr algn="ctr"/>
+            <a:endParaRPr/>
           </a:p>
         </p:txBody>
       </p:sp>
@@ -27445,6 +28635,7 @@
           <a:lstStyle/>
           <a:p>
             <a:pPr algn="ctr"/>
+            <a:endParaRPr/>
           </a:p>
         </p:txBody>
       </p:sp>
@@ -27655,6 +28846,7 @@
           <a:lstStyle/>
           <a:p>
             <a:pPr algn="ctr"/>
+            <a:endParaRPr/>
           </a:p>
         </p:txBody>
       </p:sp>
@@ -27743,7 +28935,7 @@
           </a:fontRef>
         </p:style>
         <p:txBody>
-          <a:bodyPr rtlCol="0" anchor="ctr" wrap="none" lIns="0" rIns="0" tIns="0" bIns="0"/>
+          <a:bodyPr wrap="none" lIns="0" tIns="0" rIns="0" bIns="0" rtlCol="0" anchor="ctr"/>
           <a:lstStyle/>
           <a:p>
             <a:pPr algn="ctr">
@@ -27805,6 +28997,7 @@
           <a:lstStyle/>
           <a:p>
             <a:pPr algn="ctr"/>
+            <a:endParaRPr/>
           </a:p>
         </p:txBody>
       </p:sp>
@@ -27910,6 +29103,7 @@
           <a:lstStyle/>
           <a:p>
             <a:pPr algn="ctr"/>
+            <a:endParaRPr/>
           </a:p>
         </p:txBody>
       </p:sp>
@@ -27954,6 +29148,7 @@
           <a:lstStyle/>
           <a:p>
             <a:pPr algn="ctr"/>
+            <a:endParaRPr/>
           </a:p>
         </p:txBody>
       </p:sp>
@@ -28082,6 +29277,7 @@
           <a:lstStyle/>
           <a:p>
             <a:pPr algn="ctr"/>
+            <a:endParaRPr/>
           </a:p>
         </p:txBody>
       </p:sp>
@@ -28126,6 +29322,7 @@
           <a:lstStyle/>
           <a:p>
             <a:pPr algn="ctr"/>
+            <a:endParaRPr/>
           </a:p>
         </p:txBody>
       </p:sp>
@@ -28254,6 +29451,7 @@
           <a:lstStyle/>
           <a:p>
             <a:pPr algn="ctr"/>
+            <a:endParaRPr/>
           </a:p>
         </p:txBody>
       </p:sp>
@@ -28298,6 +29496,7 @@
           <a:lstStyle/>
           <a:p>
             <a:pPr algn="ctr"/>
+            <a:endParaRPr/>
           </a:p>
         </p:txBody>
       </p:sp>
@@ -28426,6 +29625,7 @@
           <a:lstStyle/>
           <a:p>
             <a:pPr algn="ctr"/>
+            <a:endParaRPr/>
           </a:p>
         </p:txBody>
       </p:sp>
@@ -28470,6 +29670,7 @@
           <a:lstStyle/>
           <a:p>
             <a:pPr algn="ctr"/>
+            <a:endParaRPr/>
           </a:p>
         </p:txBody>
       </p:sp>
@@ -28598,6 +29799,7 @@
           <a:lstStyle/>
           <a:p>
             <a:pPr algn="ctr"/>
+            <a:endParaRPr/>
           </a:p>
         </p:txBody>
       </p:sp>
@@ -28642,6 +29844,7 @@
           <a:lstStyle/>
           <a:p>
             <a:pPr algn="ctr"/>
+            <a:endParaRPr/>
           </a:p>
         </p:txBody>
       </p:sp>
@@ -28773,11 +29976,18 @@
   <p:clrMapOvr>
     <a:masterClrMapping/>
   </p:clrMapOvr>
+  <p:timing>
+    <p:tnLst>
+      <p:par>
+        <p:cTn id="1" dur="indefinite" restart="never" nodeType="tmRoot"/>
+      </p:par>
+    </p:tnLst>
+  </p:timing>
 </p:sld>
 </file>
 
 <file path=ppt/slides/slide27.xml><?xml version="1.0" encoding="utf-8"?>
-<p:sld xmlns:a="http://schemas.openxmlformats.org/drawingml/2006/main" xmlns:p="http://schemas.openxmlformats.org/presentationml/2006/main" xmlns:r="http://schemas.openxmlformats.org/officeDocument/2006/relationships">
+<p:sld xmlns:a="http://schemas.openxmlformats.org/drawingml/2006/main" xmlns:r="http://schemas.openxmlformats.org/officeDocument/2006/relationships" xmlns:p="http://schemas.openxmlformats.org/presentationml/2006/main">
   <p:cSld>
     <p:spTree>
       <p:nvGrpSpPr>
@@ -28785,7 +29995,14 @@
         <p:cNvGrpSpPr/>
         <p:nvPr/>
       </p:nvGrpSpPr>
-      <p:grpSpPr/>
+      <p:grpSpPr>
+        <a:xfrm>
+          <a:off x="0" y="0"/>
+          <a:ext cx="0" cy="0"/>
+          <a:chOff x="0" y="0"/>
+          <a:chExt cx="0" cy="0"/>
+        </a:xfrm>
+      </p:grpSpPr>
       <p:sp>
         <p:nvSpPr>
           <p:cNvPr id="2" name="Rectangle 1"/>
@@ -28827,6 +30044,7 @@
           <a:lstStyle/>
           <a:p>
             <a:pPr algn="ctr"/>
+            <a:endParaRPr/>
           </a:p>
         </p:txBody>
       </p:sp>
@@ -28871,6 +30089,7 @@
           <a:lstStyle/>
           <a:p>
             <a:pPr algn="ctr"/>
+            <a:endParaRPr/>
           </a:p>
         </p:txBody>
       </p:sp>
@@ -28915,6 +30134,7 @@
           <a:lstStyle/>
           <a:p>
             <a:pPr algn="ctr"/>
+            <a:endParaRPr/>
           </a:p>
         </p:txBody>
       </p:sp>
@@ -28959,6 +30179,7 @@
           <a:lstStyle/>
           <a:p>
             <a:pPr algn="ctr"/>
+            <a:endParaRPr/>
           </a:p>
         </p:txBody>
       </p:sp>
@@ -29169,6 +30390,7 @@
           <a:lstStyle/>
           <a:p>
             <a:pPr algn="ctr"/>
+            <a:endParaRPr/>
           </a:p>
         </p:txBody>
       </p:sp>
@@ -29257,7 +30479,7 @@
           </a:fontRef>
         </p:style>
         <p:txBody>
-          <a:bodyPr rtlCol="0" anchor="ctr" wrap="none" lIns="0" rIns="0" tIns="0" bIns="0"/>
+          <a:bodyPr wrap="none" lIns="0" tIns="0" rIns="0" bIns="0" rtlCol="0" anchor="ctr"/>
           <a:lstStyle/>
           <a:p>
             <a:pPr algn="ctr">
@@ -29319,6 +30541,7 @@
           <a:lstStyle/>
           <a:p>
             <a:pPr algn="ctr"/>
+            <a:endParaRPr/>
           </a:p>
         </p:txBody>
       </p:sp>
@@ -29424,6 +30647,7 @@
           <a:lstStyle/>
           <a:p>
             <a:pPr algn="ctr"/>
+            <a:endParaRPr/>
           </a:p>
         </p:txBody>
       </p:sp>
@@ -29468,6 +30692,7 @@
           <a:lstStyle/>
           <a:p>
             <a:pPr algn="ctr"/>
+            <a:endParaRPr/>
           </a:p>
         </p:txBody>
       </p:sp>
@@ -29596,6 +30821,7 @@
           <a:lstStyle/>
           <a:p>
             <a:pPr algn="ctr"/>
+            <a:endParaRPr/>
           </a:p>
         </p:txBody>
       </p:sp>
@@ -29640,6 +30866,7 @@
           <a:lstStyle/>
           <a:p>
             <a:pPr algn="ctr"/>
+            <a:endParaRPr/>
           </a:p>
         </p:txBody>
       </p:sp>
@@ -29768,6 +30995,7 @@
           <a:lstStyle/>
           <a:p>
             <a:pPr algn="ctr"/>
+            <a:endParaRPr/>
           </a:p>
         </p:txBody>
       </p:sp>
@@ -29812,6 +31040,7 @@
           <a:lstStyle/>
           <a:p>
             <a:pPr algn="ctr"/>
+            <a:endParaRPr/>
           </a:p>
         </p:txBody>
       </p:sp>
@@ -29940,6 +31169,7 @@
           <a:lstStyle/>
           <a:p>
             <a:pPr algn="ctr"/>
+            <a:endParaRPr/>
           </a:p>
         </p:txBody>
       </p:sp>
@@ -29984,6 +31214,7 @@
           <a:lstStyle/>
           <a:p>
             <a:pPr algn="ctr"/>
+            <a:endParaRPr/>
           </a:p>
         </p:txBody>
       </p:sp>
@@ -30112,6 +31343,7 @@
           <a:lstStyle/>
           <a:p>
             <a:pPr algn="ctr"/>
+            <a:endParaRPr/>
           </a:p>
         </p:txBody>
       </p:sp>
@@ -30156,6 +31388,7 @@
           <a:lstStyle/>
           <a:p>
             <a:pPr algn="ctr"/>
+            <a:endParaRPr/>
           </a:p>
         </p:txBody>
       </p:sp>
@@ -30287,11 +31520,18 @@
   <p:clrMapOvr>
     <a:masterClrMapping/>
   </p:clrMapOvr>
+  <p:timing>
+    <p:tnLst>
+      <p:par>
+        <p:cTn id="1" dur="indefinite" restart="never" nodeType="tmRoot"/>
+      </p:par>
+    </p:tnLst>
+  </p:timing>
 </p:sld>
 </file>
 
 <file path=ppt/slides/slide28.xml><?xml version="1.0" encoding="utf-8"?>
-<p:sld xmlns:a="http://schemas.openxmlformats.org/drawingml/2006/main" xmlns:p="http://schemas.openxmlformats.org/presentationml/2006/main" xmlns:r="http://schemas.openxmlformats.org/officeDocument/2006/relationships">
+<p:sld xmlns:a="http://schemas.openxmlformats.org/drawingml/2006/main" xmlns:r="http://schemas.openxmlformats.org/officeDocument/2006/relationships" xmlns:p="http://schemas.openxmlformats.org/presentationml/2006/main">
   <p:cSld>
     <p:spTree>
       <p:nvGrpSpPr>
@@ -30299,7 +31539,14 @@
         <p:cNvGrpSpPr/>
         <p:nvPr/>
       </p:nvGrpSpPr>
-      <p:grpSpPr/>
+      <p:grpSpPr>
+        <a:xfrm>
+          <a:off x="0" y="0"/>
+          <a:ext cx="0" cy="0"/>
+          <a:chOff x="0" y="0"/>
+          <a:chExt cx="0" cy="0"/>
+        </a:xfrm>
+      </p:grpSpPr>
       <p:sp>
         <p:nvSpPr>
           <p:cNvPr id="2" name="Rectangle 1"/>
@@ -30341,6 +31588,7 @@
           <a:lstStyle/>
           <a:p>
             <a:pPr algn="ctr"/>
+            <a:endParaRPr/>
           </a:p>
         </p:txBody>
       </p:sp>
@@ -30385,6 +31633,7 @@
           <a:lstStyle/>
           <a:p>
             <a:pPr algn="ctr"/>
+            <a:endParaRPr/>
           </a:p>
         </p:txBody>
       </p:sp>
@@ -30429,6 +31678,7 @@
           <a:lstStyle/>
           <a:p>
             <a:pPr algn="ctr"/>
+            <a:endParaRPr/>
           </a:p>
         </p:txBody>
       </p:sp>
@@ -30473,6 +31723,7 @@
           <a:lstStyle/>
           <a:p>
             <a:pPr algn="ctr"/>
+            <a:endParaRPr/>
           </a:p>
         </p:txBody>
       </p:sp>
@@ -30683,6 +31934,7 @@
           <a:lstStyle/>
           <a:p>
             <a:pPr algn="ctr"/>
+            <a:endParaRPr/>
           </a:p>
         </p:txBody>
       </p:sp>
@@ -30771,7 +32023,7 @@
           </a:fontRef>
         </p:style>
         <p:txBody>
-          <a:bodyPr rtlCol="0" anchor="ctr" wrap="none" lIns="0" rIns="0" tIns="0" bIns="0"/>
+          <a:bodyPr wrap="none" lIns="0" tIns="0" rIns="0" bIns="0" rtlCol="0" anchor="ctr"/>
           <a:lstStyle/>
           <a:p>
             <a:pPr algn="ctr">
@@ -30833,6 +32085,7 @@
           <a:lstStyle/>
           <a:p>
             <a:pPr algn="ctr"/>
+            <a:endParaRPr/>
           </a:p>
         </p:txBody>
       </p:sp>
@@ -30938,6 +32191,7 @@
           <a:lstStyle/>
           <a:p>
             <a:pPr algn="ctr"/>
+            <a:endParaRPr/>
           </a:p>
         </p:txBody>
       </p:sp>
@@ -30982,6 +32236,7 @@
           <a:lstStyle/>
           <a:p>
             <a:pPr algn="ctr"/>
+            <a:endParaRPr/>
           </a:p>
         </p:txBody>
       </p:sp>
@@ -31110,6 +32365,7 @@
           <a:lstStyle/>
           <a:p>
             <a:pPr algn="ctr"/>
+            <a:endParaRPr/>
           </a:p>
         </p:txBody>
       </p:sp>
@@ -31154,6 +32410,7 @@
           <a:lstStyle/>
           <a:p>
             <a:pPr algn="ctr"/>
+            <a:endParaRPr/>
           </a:p>
         </p:txBody>
       </p:sp>
@@ -31282,6 +32539,7 @@
           <a:lstStyle/>
           <a:p>
             <a:pPr algn="ctr"/>
+            <a:endParaRPr/>
           </a:p>
         </p:txBody>
       </p:sp>
@@ -31326,6 +32584,7 @@
           <a:lstStyle/>
           <a:p>
             <a:pPr algn="ctr"/>
+            <a:endParaRPr/>
           </a:p>
         </p:txBody>
       </p:sp>
@@ -31454,6 +32713,7 @@
           <a:lstStyle/>
           <a:p>
             <a:pPr algn="ctr"/>
+            <a:endParaRPr/>
           </a:p>
         </p:txBody>
       </p:sp>
@@ -31498,6 +32758,7 @@
           <a:lstStyle/>
           <a:p>
             <a:pPr algn="ctr"/>
+            <a:endParaRPr/>
           </a:p>
         </p:txBody>
       </p:sp>
@@ -31626,6 +32887,7 @@
           <a:lstStyle/>
           <a:p>
             <a:pPr algn="ctr"/>
+            <a:endParaRPr/>
           </a:p>
         </p:txBody>
       </p:sp>
@@ -31670,6 +32932,7 @@
           <a:lstStyle/>
           <a:p>
             <a:pPr algn="ctr"/>
+            <a:endParaRPr/>
           </a:p>
         </p:txBody>
       </p:sp>
@@ -31801,11 +33064,18 @@
   <p:clrMapOvr>
     <a:masterClrMapping/>
   </p:clrMapOvr>
+  <p:timing>
+    <p:tnLst>
+      <p:par>
+        <p:cTn id="1" dur="indefinite" restart="never" nodeType="tmRoot"/>
+      </p:par>
+    </p:tnLst>
+  </p:timing>
 </p:sld>
 </file>
 
 <file path=ppt/slides/slide29.xml><?xml version="1.0" encoding="utf-8"?>
-<p:sld xmlns:a="http://schemas.openxmlformats.org/drawingml/2006/main" xmlns:p="http://schemas.openxmlformats.org/presentationml/2006/main" xmlns:r="http://schemas.openxmlformats.org/officeDocument/2006/relationships">
+<p:sld xmlns:a="http://schemas.openxmlformats.org/drawingml/2006/main" xmlns:r="http://schemas.openxmlformats.org/officeDocument/2006/relationships" xmlns:p="http://schemas.openxmlformats.org/presentationml/2006/main">
   <p:cSld>
     <p:spTree>
       <p:nvGrpSpPr>
@@ -31813,7 +33083,14 @@
         <p:cNvGrpSpPr/>
         <p:nvPr/>
       </p:nvGrpSpPr>
-      <p:grpSpPr/>
+      <p:grpSpPr>
+        <a:xfrm>
+          <a:off x="0" y="0"/>
+          <a:ext cx="0" cy="0"/>
+          <a:chOff x="0" y="0"/>
+          <a:chExt cx="0" cy="0"/>
+        </a:xfrm>
+      </p:grpSpPr>
       <p:sp>
         <p:nvSpPr>
           <p:cNvPr id="2" name="Rectangle 1"/>
@@ -31855,6 +33132,7 @@
           <a:lstStyle/>
           <a:p>
             <a:pPr algn="ctr"/>
+            <a:endParaRPr/>
           </a:p>
         </p:txBody>
       </p:sp>
@@ -31899,6 +33177,7 @@
           <a:lstStyle/>
           <a:p>
             <a:pPr algn="ctr"/>
+            <a:endParaRPr/>
           </a:p>
         </p:txBody>
       </p:sp>
@@ -31943,6 +33222,7 @@
           <a:lstStyle/>
           <a:p>
             <a:pPr algn="ctr"/>
+            <a:endParaRPr/>
           </a:p>
         </p:txBody>
       </p:sp>
@@ -31987,6 +33267,7 @@
           <a:lstStyle/>
           <a:p>
             <a:pPr algn="ctr"/>
+            <a:endParaRPr/>
           </a:p>
         </p:txBody>
       </p:sp>
@@ -32197,6 +33478,7 @@
           <a:lstStyle/>
           <a:p>
             <a:pPr algn="ctr"/>
+            <a:endParaRPr/>
           </a:p>
         </p:txBody>
       </p:sp>
@@ -32285,7 +33567,7 @@
           </a:fontRef>
         </p:style>
         <p:txBody>
-          <a:bodyPr rtlCol="0" anchor="ctr" wrap="none" lIns="0" rIns="0" tIns="0" bIns="0"/>
+          <a:bodyPr wrap="none" lIns="0" tIns="0" rIns="0" bIns="0" rtlCol="0" anchor="ctr"/>
           <a:lstStyle/>
           <a:p>
             <a:pPr algn="ctr">
@@ -32347,6 +33629,7 @@
           <a:lstStyle/>
           <a:p>
             <a:pPr algn="ctr"/>
+            <a:endParaRPr/>
           </a:p>
         </p:txBody>
       </p:sp>
@@ -32452,6 +33735,7 @@
           <a:lstStyle/>
           <a:p>
             <a:pPr algn="ctr"/>
+            <a:endParaRPr/>
           </a:p>
         </p:txBody>
       </p:sp>
@@ -32496,6 +33780,7 @@
           <a:lstStyle/>
           <a:p>
             <a:pPr algn="ctr"/>
+            <a:endParaRPr/>
           </a:p>
         </p:txBody>
       </p:sp>
@@ -32624,6 +33909,7 @@
           <a:lstStyle/>
           <a:p>
             <a:pPr algn="ctr"/>
+            <a:endParaRPr/>
           </a:p>
         </p:txBody>
       </p:sp>
@@ -32668,6 +33954,7 @@
           <a:lstStyle/>
           <a:p>
             <a:pPr algn="ctr"/>
+            <a:endParaRPr/>
           </a:p>
         </p:txBody>
       </p:sp>
@@ -32796,6 +34083,7 @@
           <a:lstStyle/>
           <a:p>
             <a:pPr algn="ctr"/>
+            <a:endParaRPr/>
           </a:p>
         </p:txBody>
       </p:sp>
@@ -32840,6 +34128,7 @@
           <a:lstStyle/>
           <a:p>
             <a:pPr algn="ctr"/>
+            <a:endParaRPr/>
           </a:p>
         </p:txBody>
       </p:sp>
@@ -32968,6 +34257,7 @@
           <a:lstStyle/>
           <a:p>
             <a:pPr algn="ctr"/>
+            <a:endParaRPr/>
           </a:p>
         </p:txBody>
       </p:sp>
@@ -33012,6 +34302,7 @@
           <a:lstStyle/>
           <a:p>
             <a:pPr algn="ctr"/>
+            <a:endParaRPr/>
           </a:p>
         </p:txBody>
       </p:sp>
@@ -33140,6 +34431,7 @@
           <a:lstStyle/>
           <a:p>
             <a:pPr algn="ctr"/>
+            <a:endParaRPr/>
           </a:p>
         </p:txBody>
       </p:sp>
@@ -33184,6 +34476,7 @@
           <a:lstStyle/>
           <a:p>
             <a:pPr algn="ctr"/>
+            <a:endParaRPr/>
           </a:p>
         </p:txBody>
       </p:sp>
@@ -33315,11 +34608,18 @@
   <p:clrMapOvr>
     <a:masterClrMapping/>
   </p:clrMapOvr>
+  <p:timing>
+    <p:tnLst>
+      <p:par>
+        <p:cTn id="1" dur="indefinite" restart="never" nodeType="tmRoot"/>
+      </p:par>
+    </p:tnLst>
+  </p:timing>
 </p:sld>
 </file>
 
 <file path=ppt/slides/slide3.xml><?xml version="1.0" encoding="utf-8"?>
-<p:sld xmlns:a="http://schemas.openxmlformats.org/drawingml/2006/main" xmlns:p="http://schemas.openxmlformats.org/presentationml/2006/main" xmlns:r="http://schemas.openxmlformats.org/officeDocument/2006/relationships">
+<p:sld xmlns:a="http://schemas.openxmlformats.org/drawingml/2006/main" xmlns:r="http://schemas.openxmlformats.org/officeDocument/2006/relationships" xmlns:p="http://schemas.openxmlformats.org/presentationml/2006/main">
   <p:cSld>
     <p:spTree>
       <p:nvGrpSpPr>
@@ -33327,7 +34627,14 @@
         <p:cNvGrpSpPr/>
         <p:nvPr/>
       </p:nvGrpSpPr>
-      <p:grpSpPr/>
+      <p:grpSpPr>
+        <a:xfrm>
+          <a:off x="0" y="0"/>
+          <a:ext cx="0" cy="0"/>
+          <a:chOff x="0" y="0"/>
+          <a:chExt cx="0" cy="0"/>
+        </a:xfrm>
+      </p:grpSpPr>
       <p:sp>
         <p:nvSpPr>
           <p:cNvPr id="2" name="Rectangle 1"/>
@@ -33369,6 +34676,7 @@
           <a:lstStyle/>
           <a:p>
             <a:pPr algn="ctr"/>
+            <a:endParaRPr/>
           </a:p>
         </p:txBody>
       </p:sp>
@@ -33413,6 +34721,7 @@
           <a:lstStyle/>
           <a:p>
             <a:pPr algn="ctr"/>
+            <a:endParaRPr/>
           </a:p>
         </p:txBody>
       </p:sp>
@@ -33457,6 +34766,7 @@
           <a:lstStyle/>
           <a:p>
             <a:pPr algn="ctr"/>
+            <a:endParaRPr/>
           </a:p>
         </p:txBody>
       </p:sp>
@@ -33544,6 +34854,7 @@
           <a:lstStyle/>
           <a:p>
             <a:pPr algn="ctr"/>
+            <a:endParaRPr/>
           </a:p>
         </p:txBody>
       </p:sp>
@@ -33721,6 +35032,7 @@
           <a:lstStyle/>
           <a:p>
             <a:pPr algn="ctr"/>
+            <a:endParaRPr/>
           </a:p>
         </p:txBody>
       </p:sp>
@@ -33942,11 +35254,18 @@
   <p:clrMapOvr>
     <a:masterClrMapping/>
   </p:clrMapOvr>
+  <p:timing>
+    <p:tnLst>
+      <p:par>
+        <p:cTn id="1" dur="indefinite" restart="never" nodeType="tmRoot"/>
+      </p:par>
+    </p:tnLst>
+  </p:timing>
 </p:sld>
 </file>
 
 <file path=ppt/slides/slide30.xml><?xml version="1.0" encoding="utf-8"?>
-<p:sld xmlns:a="http://schemas.openxmlformats.org/drawingml/2006/main" xmlns:p="http://schemas.openxmlformats.org/presentationml/2006/main" xmlns:r="http://schemas.openxmlformats.org/officeDocument/2006/relationships">
+<p:sld xmlns:a="http://schemas.openxmlformats.org/drawingml/2006/main" xmlns:r="http://schemas.openxmlformats.org/officeDocument/2006/relationships" xmlns:p="http://schemas.openxmlformats.org/presentationml/2006/main">
   <p:cSld>
     <p:spTree>
       <p:nvGrpSpPr>
@@ -33954,7 +35273,14 @@
         <p:cNvGrpSpPr/>
         <p:nvPr/>
       </p:nvGrpSpPr>
-      <p:grpSpPr/>
+      <p:grpSpPr>
+        <a:xfrm>
+          <a:off x="0" y="0"/>
+          <a:ext cx="0" cy="0"/>
+          <a:chOff x="0" y="0"/>
+          <a:chExt cx="0" cy="0"/>
+        </a:xfrm>
+      </p:grpSpPr>
       <p:sp>
         <p:nvSpPr>
           <p:cNvPr id="2" name="Rectangle 1"/>
@@ -33996,6 +35322,7 @@
           <a:lstStyle/>
           <a:p>
             <a:pPr algn="ctr"/>
+            <a:endParaRPr/>
           </a:p>
         </p:txBody>
       </p:sp>
@@ -34040,6 +35367,7 @@
           <a:lstStyle/>
           <a:p>
             <a:pPr algn="ctr"/>
+            <a:endParaRPr/>
           </a:p>
         </p:txBody>
       </p:sp>
@@ -34084,6 +35412,7 @@
           <a:lstStyle/>
           <a:p>
             <a:pPr algn="ctr"/>
+            <a:endParaRPr/>
           </a:p>
         </p:txBody>
       </p:sp>
@@ -34128,6 +35457,7 @@
           <a:lstStyle/>
           <a:p>
             <a:pPr algn="ctr"/>
+            <a:endParaRPr/>
           </a:p>
         </p:txBody>
       </p:sp>
@@ -34338,6 +35668,7 @@
           <a:lstStyle/>
           <a:p>
             <a:pPr algn="ctr"/>
+            <a:endParaRPr/>
           </a:p>
         </p:txBody>
       </p:sp>
@@ -34426,7 +35757,7 @@
           </a:fontRef>
         </p:style>
         <p:txBody>
-          <a:bodyPr rtlCol="0" anchor="ctr" wrap="none" lIns="0" rIns="0" tIns="0" bIns="0"/>
+          <a:bodyPr wrap="none" lIns="0" tIns="0" rIns="0" bIns="0" rtlCol="0" anchor="ctr"/>
           <a:lstStyle/>
           <a:p>
             <a:pPr algn="ctr">
@@ -34488,6 +35819,7 @@
           <a:lstStyle/>
           <a:p>
             <a:pPr algn="ctr"/>
+            <a:endParaRPr/>
           </a:p>
         </p:txBody>
       </p:sp>
@@ -34593,6 +35925,7 @@
           <a:lstStyle/>
           <a:p>
             <a:pPr algn="ctr"/>
+            <a:endParaRPr/>
           </a:p>
         </p:txBody>
       </p:sp>
@@ -34637,6 +35970,7 @@
           <a:lstStyle/>
           <a:p>
             <a:pPr algn="ctr"/>
+            <a:endParaRPr/>
           </a:p>
         </p:txBody>
       </p:sp>
@@ -34765,6 +36099,7 @@
           <a:lstStyle/>
           <a:p>
             <a:pPr algn="ctr"/>
+            <a:endParaRPr/>
           </a:p>
         </p:txBody>
       </p:sp>
@@ -34809,6 +36144,7 @@
           <a:lstStyle/>
           <a:p>
             <a:pPr algn="ctr"/>
+            <a:endParaRPr/>
           </a:p>
         </p:txBody>
       </p:sp>
@@ -34937,6 +36273,7 @@
           <a:lstStyle/>
           <a:p>
             <a:pPr algn="ctr"/>
+            <a:endParaRPr/>
           </a:p>
         </p:txBody>
       </p:sp>
@@ -34981,6 +36318,7 @@
           <a:lstStyle/>
           <a:p>
             <a:pPr algn="ctr"/>
+            <a:endParaRPr/>
           </a:p>
         </p:txBody>
       </p:sp>
@@ -35109,6 +36447,7 @@
           <a:lstStyle/>
           <a:p>
             <a:pPr algn="ctr"/>
+            <a:endParaRPr/>
           </a:p>
         </p:txBody>
       </p:sp>
@@ -35153,6 +36492,7 @@
           <a:lstStyle/>
           <a:p>
             <a:pPr algn="ctr"/>
+            <a:endParaRPr/>
           </a:p>
         </p:txBody>
       </p:sp>
@@ -35281,6 +36621,7 @@
           <a:lstStyle/>
           <a:p>
             <a:pPr algn="ctr"/>
+            <a:endParaRPr/>
           </a:p>
         </p:txBody>
       </p:sp>
@@ -35325,6 +36666,7 @@
           <a:lstStyle/>
           <a:p>
             <a:pPr algn="ctr"/>
+            <a:endParaRPr/>
           </a:p>
         </p:txBody>
       </p:sp>
@@ -35456,11 +36798,18 @@
   <p:clrMapOvr>
     <a:masterClrMapping/>
   </p:clrMapOvr>
+  <p:timing>
+    <p:tnLst>
+      <p:par>
+        <p:cTn id="1" dur="indefinite" restart="never" nodeType="tmRoot"/>
+      </p:par>
+    </p:tnLst>
+  </p:timing>
 </p:sld>
 </file>
 
 <file path=ppt/slides/slide31.xml><?xml version="1.0" encoding="utf-8"?>
-<p:sld xmlns:a="http://schemas.openxmlformats.org/drawingml/2006/main" xmlns:p="http://schemas.openxmlformats.org/presentationml/2006/main" xmlns:r="http://schemas.openxmlformats.org/officeDocument/2006/relationships">
+<p:sld xmlns:a="http://schemas.openxmlformats.org/drawingml/2006/main" xmlns:r="http://schemas.openxmlformats.org/officeDocument/2006/relationships" xmlns:p="http://schemas.openxmlformats.org/presentationml/2006/main">
   <p:cSld>
     <p:spTree>
       <p:nvGrpSpPr>
@@ -35468,7 +36817,14 @@
         <p:cNvGrpSpPr/>
         <p:nvPr/>
       </p:nvGrpSpPr>
-      <p:grpSpPr/>
+      <p:grpSpPr>
+        <a:xfrm>
+          <a:off x="0" y="0"/>
+          <a:ext cx="0" cy="0"/>
+          <a:chOff x="0" y="0"/>
+          <a:chExt cx="0" cy="0"/>
+        </a:xfrm>
+      </p:grpSpPr>
       <p:sp>
         <p:nvSpPr>
           <p:cNvPr id="2" name="Rectangle 1"/>
@@ -35510,6 +36866,7 @@
           <a:lstStyle/>
           <a:p>
             <a:pPr algn="ctr"/>
+            <a:endParaRPr/>
           </a:p>
         </p:txBody>
       </p:sp>
@@ -35554,6 +36911,7 @@
           <a:lstStyle/>
           <a:p>
             <a:pPr algn="ctr"/>
+            <a:endParaRPr/>
           </a:p>
         </p:txBody>
       </p:sp>
@@ -35598,6 +36956,7 @@
           <a:lstStyle/>
           <a:p>
             <a:pPr algn="ctr"/>
+            <a:endParaRPr/>
           </a:p>
         </p:txBody>
       </p:sp>
@@ -35642,6 +37001,7 @@
           <a:lstStyle/>
           <a:p>
             <a:pPr algn="ctr"/>
+            <a:endParaRPr/>
           </a:p>
         </p:txBody>
       </p:sp>
@@ -35852,6 +37212,7 @@
           <a:lstStyle/>
           <a:p>
             <a:pPr algn="ctr"/>
+            <a:endParaRPr/>
           </a:p>
         </p:txBody>
       </p:sp>
@@ -35940,7 +37301,7 @@
           </a:fontRef>
         </p:style>
         <p:txBody>
-          <a:bodyPr rtlCol="0" anchor="ctr" wrap="none" lIns="0" rIns="0" tIns="0" bIns="0"/>
+          <a:bodyPr wrap="none" lIns="0" tIns="0" rIns="0" bIns="0" rtlCol="0" anchor="ctr"/>
           <a:lstStyle/>
           <a:p>
             <a:pPr algn="ctr">
@@ -36002,6 +37363,7 @@
           <a:lstStyle/>
           <a:p>
             <a:pPr algn="ctr"/>
+            <a:endParaRPr/>
           </a:p>
         </p:txBody>
       </p:sp>
@@ -36107,6 +37469,7 @@
           <a:lstStyle/>
           <a:p>
             <a:pPr algn="ctr"/>
+            <a:endParaRPr/>
           </a:p>
         </p:txBody>
       </p:sp>
@@ -36151,6 +37514,7 @@
           <a:lstStyle/>
           <a:p>
             <a:pPr algn="ctr"/>
+            <a:endParaRPr/>
           </a:p>
         </p:txBody>
       </p:sp>
@@ -36279,6 +37643,7 @@
           <a:lstStyle/>
           <a:p>
             <a:pPr algn="ctr"/>
+            <a:endParaRPr/>
           </a:p>
         </p:txBody>
       </p:sp>
@@ -36323,6 +37688,7 @@
           <a:lstStyle/>
           <a:p>
             <a:pPr algn="ctr"/>
+            <a:endParaRPr/>
           </a:p>
         </p:txBody>
       </p:sp>
@@ -36451,6 +37817,7 @@
           <a:lstStyle/>
           <a:p>
             <a:pPr algn="ctr"/>
+            <a:endParaRPr/>
           </a:p>
         </p:txBody>
       </p:sp>
@@ -36495,6 +37862,7 @@
           <a:lstStyle/>
           <a:p>
             <a:pPr algn="ctr"/>
+            <a:endParaRPr/>
           </a:p>
         </p:txBody>
       </p:sp>
@@ -36623,6 +37991,7 @@
           <a:lstStyle/>
           <a:p>
             <a:pPr algn="ctr"/>
+            <a:endParaRPr/>
           </a:p>
         </p:txBody>
       </p:sp>
@@ -36667,6 +38036,7 @@
           <a:lstStyle/>
           <a:p>
             <a:pPr algn="ctr"/>
+            <a:endParaRPr/>
           </a:p>
         </p:txBody>
       </p:sp>
@@ -36795,6 +38165,7 @@
           <a:lstStyle/>
           <a:p>
             <a:pPr algn="ctr"/>
+            <a:endParaRPr/>
           </a:p>
         </p:txBody>
       </p:sp>
@@ -36839,6 +38210,7 @@
           <a:lstStyle/>
           <a:p>
             <a:pPr algn="ctr"/>
+            <a:endParaRPr/>
           </a:p>
         </p:txBody>
       </p:sp>
@@ -36970,11 +38342,18 @@
   <p:clrMapOvr>
     <a:masterClrMapping/>
   </p:clrMapOvr>
+  <p:timing>
+    <p:tnLst>
+      <p:par>
+        <p:cTn id="1" dur="indefinite" restart="never" nodeType="tmRoot"/>
+      </p:par>
+    </p:tnLst>
+  </p:timing>
 </p:sld>
 </file>
 
 <file path=ppt/slides/slide32.xml><?xml version="1.0" encoding="utf-8"?>
-<p:sld xmlns:a="http://schemas.openxmlformats.org/drawingml/2006/main" xmlns:p="http://schemas.openxmlformats.org/presentationml/2006/main" xmlns:r="http://schemas.openxmlformats.org/officeDocument/2006/relationships">
+<p:sld xmlns:a="http://schemas.openxmlformats.org/drawingml/2006/main" xmlns:r="http://schemas.openxmlformats.org/officeDocument/2006/relationships" xmlns:p="http://schemas.openxmlformats.org/presentationml/2006/main">
   <p:cSld>
     <p:spTree>
       <p:nvGrpSpPr>
@@ -36982,7 +38361,14 @@
         <p:cNvGrpSpPr/>
         <p:nvPr/>
       </p:nvGrpSpPr>
-      <p:grpSpPr/>
+      <p:grpSpPr>
+        <a:xfrm>
+          <a:off x="0" y="0"/>
+          <a:ext cx="0" cy="0"/>
+          <a:chOff x="0" y="0"/>
+          <a:chExt cx="0" cy="0"/>
+        </a:xfrm>
+      </p:grpSpPr>
       <p:sp>
         <p:nvSpPr>
           <p:cNvPr id="2" name="Rectangle 1"/>
@@ -37024,6 +38410,7 @@
           <a:lstStyle/>
           <a:p>
             <a:pPr algn="ctr"/>
+            <a:endParaRPr/>
           </a:p>
         </p:txBody>
       </p:sp>
@@ -37068,6 +38455,7 @@
           <a:lstStyle/>
           <a:p>
             <a:pPr algn="ctr"/>
+            <a:endParaRPr/>
           </a:p>
         </p:txBody>
       </p:sp>
@@ -37112,6 +38500,7 @@
           <a:lstStyle/>
           <a:p>
             <a:pPr algn="ctr"/>
+            <a:endParaRPr/>
           </a:p>
         </p:txBody>
       </p:sp>
@@ -37340,14 +38729,6 @@
               </a:rPr>
               <a:t>Bugün   Oylama sitesi 22 maddenin tamamı için açık</a:t>
             </a:r>
-            <a:r>
-              <a:rPr sz="1350">
-                <a:solidFill>
-                  <a:srgbClr val="1B2230"/>
-                </a:solidFill>
-              </a:rPr>
-              <a:t/>
-            </a:r>
           </a:p>
           <a:p>
             <a:pPr>
@@ -37363,14 +38744,6 @@
               </a:rPr>
               <a:t>+2 hafta   Oylama kapanır; ham veri ve sayım raporu yayımlanır</a:t>
             </a:r>
-            <a:r>
-              <a:rPr sz="1350">
-                <a:solidFill>
-                  <a:srgbClr val="1B2230"/>
-                </a:solidFill>
-              </a:rPr>
-              <a:t/>
-            </a:r>
           </a:p>
           <a:p>
             <a:pPr>
@@ -37386,14 +38759,6 @@
               </a:rPr>
               <a:t>+3 hafta   Tablo B dilekçeleri topluluk tercihine göre güncellenir</a:t>
             </a:r>
-            <a:r>
-              <a:rPr sz="1350">
-                <a:solidFill>
-                  <a:srgbClr val="1B2230"/>
-                </a:solidFill>
-              </a:rPr>
-              <a:t/>
-            </a:r>
           </a:p>
           <a:p>
             <a:pPr>
@@ -37408,14 +38773,6 @@
                 </a:solidFill>
               </a:rPr>
               <a:t>+1 ay   Kurum başvuruları yapılır ve süreç kamuya açık izlenir</a:t>
-            </a:r>
-            <a:r>
-              <a:rPr sz="1350">
-                <a:solidFill>
-                  <a:srgbClr val="1B2230"/>
-                </a:solidFill>
-              </a:rPr>
-              <a:t/>
             </a:r>
           </a:p>
         </p:txBody>
@@ -37463,6 +38820,7 @@
           <a:lstStyle/>
           <a:p>
             <a:pPr algn="ctr"/>
+            <a:endParaRPr/>
           </a:p>
         </p:txBody>
       </p:sp>
@@ -37553,11 +38911,18 @@
   <p:clrMapOvr>
     <a:masterClrMapping/>
   </p:clrMapOvr>
+  <p:timing>
+    <p:tnLst>
+      <p:par>
+        <p:cTn id="1" dur="indefinite" restart="never" nodeType="tmRoot"/>
+      </p:par>
+    </p:tnLst>
+  </p:timing>
 </p:sld>
 </file>
 
 <file path=ppt/slides/slide33.xml><?xml version="1.0" encoding="utf-8"?>
-<p:sld xmlns:a="http://schemas.openxmlformats.org/drawingml/2006/main" xmlns:p="http://schemas.openxmlformats.org/presentationml/2006/main" xmlns:r="http://schemas.openxmlformats.org/officeDocument/2006/relationships">
+<p:sld xmlns:a="http://schemas.openxmlformats.org/drawingml/2006/main" xmlns:r="http://schemas.openxmlformats.org/officeDocument/2006/relationships" xmlns:p="http://schemas.openxmlformats.org/presentationml/2006/main">
   <p:cSld>
     <p:spTree>
       <p:nvGrpSpPr>
@@ -37565,7 +38930,14 @@
         <p:cNvGrpSpPr/>
         <p:nvPr/>
       </p:nvGrpSpPr>
-      <p:grpSpPr/>
+      <p:grpSpPr>
+        <a:xfrm>
+          <a:off x="0" y="0"/>
+          <a:ext cx="0" cy="0"/>
+          <a:chOff x="0" y="0"/>
+          <a:chExt cx="0" cy="0"/>
+        </a:xfrm>
+      </p:grpSpPr>
       <p:sp>
         <p:nvSpPr>
           <p:cNvPr id="2" name="Rectangle 1"/>
@@ -37607,6 +38979,7 @@
           <a:lstStyle/>
           <a:p>
             <a:pPr algn="ctr"/>
+            <a:endParaRPr/>
           </a:p>
         </p:txBody>
       </p:sp>
@@ -37651,6 +39024,7 @@
           <a:lstStyle/>
           <a:p>
             <a:pPr algn="ctr"/>
+            <a:endParaRPr/>
           </a:p>
         </p:txBody>
       </p:sp>
@@ -37818,11 +39192,18 @@
   <p:clrMapOvr>
     <a:masterClrMapping/>
   </p:clrMapOvr>
+  <p:timing>
+    <p:tnLst>
+      <p:par>
+        <p:cTn id="1" dur="indefinite" restart="never" nodeType="tmRoot"/>
+      </p:par>
+    </p:tnLst>
+  </p:timing>
 </p:sld>
 </file>
 
 <file path=ppt/slides/slide34.xml><?xml version="1.0" encoding="utf-8"?>
-<p:sld xmlns:a="http://schemas.openxmlformats.org/drawingml/2006/main" xmlns:p="http://schemas.openxmlformats.org/presentationml/2006/main" xmlns:r="http://schemas.openxmlformats.org/officeDocument/2006/relationships">
+<p:sld xmlns:a="http://schemas.openxmlformats.org/drawingml/2006/main" xmlns:r="http://schemas.openxmlformats.org/officeDocument/2006/relationships" xmlns:p="http://schemas.openxmlformats.org/presentationml/2006/main">
   <p:cSld>
     <p:spTree>
       <p:nvGrpSpPr>
@@ -37830,7 +39211,14 @@
         <p:cNvGrpSpPr/>
         <p:nvPr/>
       </p:nvGrpSpPr>
-      <p:grpSpPr/>
+      <p:grpSpPr>
+        <a:xfrm>
+          <a:off x="0" y="0"/>
+          <a:ext cx="0" cy="0"/>
+          <a:chOff x="0" y="0"/>
+          <a:chExt cx="0" cy="0"/>
+        </a:xfrm>
+      </p:grpSpPr>
       <p:sp>
         <p:nvSpPr>
           <p:cNvPr id="2" name="Rectangle 1"/>
@@ -37872,6 +39260,7 @@
           <a:lstStyle/>
           <a:p>
             <a:pPr algn="ctr"/>
+            <a:endParaRPr/>
           </a:p>
         </p:txBody>
       </p:sp>
@@ -37916,6 +39305,7 @@
           <a:lstStyle/>
           <a:p>
             <a:pPr algn="ctr"/>
+            <a:endParaRPr/>
           </a:p>
         </p:txBody>
       </p:sp>
@@ -37960,6 +39350,7 @@
           <a:lstStyle/>
           <a:p>
             <a:pPr algn="ctr"/>
+            <a:endParaRPr/>
           </a:p>
         </p:txBody>
       </p:sp>
@@ -38061,7 +39452,7 @@
           </a:fontRef>
         </p:style>
         <p:txBody>
-          <a:bodyPr rtlCol="0" anchor="ctr" wrap="none" lIns="0" rIns="0" tIns="0" bIns="0"/>
+          <a:bodyPr wrap="none" lIns="0" tIns="0" rIns="0" bIns="0" rtlCol="0" anchor="ctr"/>
           <a:lstStyle/>
           <a:p>
             <a:pPr algn="ctr">
@@ -38123,6 +39514,7 @@
           <a:lstStyle/>
           <a:p>
             <a:pPr algn="ctr"/>
+            <a:endParaRPr/>
           </a:p>
         </p:txBody>
       </p:sp>
@@ -38251,6 +39643,7 @@
           <a:lstStyle/>
           <a:p>
             <a:pPr algn="ctr"/>
+            <a:endParaRPr/>
           </a:p>
         </p:txBody>
       </p:sp>
@@ -38379,6 +39772,7 @@
           <a:lstStyle/>
           <a:p>
             <a:pPr algn="ctr"/>
+            <a:endParaRPr/>
           </a:p>
         </p:txBody>
       </p:sp>
@@ -38507,6 +39901,7 @@
           <a:lstStyle/>
           <a:p>
             <a:pPr algn="ctr"/>
+            <a:endParaRPr/>
           </a:p>
         </p:txBody>
       </p:sp>
@@ -38635,6 +40030,7 @@
           <a:lstStyle/>
           <a:p>
             <a:pPr algn="ctr"/>
+            <a:endParaRPr/>
           </a:p>
         </p:txBody>
       </p:sp>
@@ -38770,7 +40166,7 @@
 </file>
 
 <file path=ppt/slides/slide35.xml><?xml version="1.0" encoding="utf-8"?>
-<p:sld xmlns:a="http://schemas.openxmlformats.org/drawingml/2006/main" xmlns:p="http://schemas.openxmlformats.org/presentationml/2006/main" xmlns:r="http://schemas.openxmlformats.org/officeDocument/2006/relationships">
+<p:sld xmlns:a="http://schemas.openxmlformats.org/drawingml/2006/main" xmlns:r="http://schemas.openxmlformats.org/officeDocument/2006/relationships" xmlns:p="http://schemas.openxmlformats.org/presentationml/2006/main">
   <p:cSld>
     <p:spTree>
       <p:nvGrpSpPr>
@@ -38778,7 +40174,14 @@
         <p:cNvGrpSpPr/>
         <p:nvPr/>
       </p:nvGrpSpPr>
-      <p:grpSpPr/>
+      <p:grpSpPr>
+        <a:xfrm>
+          <a:off x="0" y="0"/>
+          <a:ext cx="0" cy="0"/>
+          <a:chOff x="0" y="0"/>
+          <a:chExt cx="0" cy="0"/>
+        </a:xfrm>
+      </p:grpSpPr>
       <p:sp>
         <p:nvSpPr>
           <p:cNvPr id="2" name="Rectangle 1"/>
@@ -38820,6 +40223,7 @@
           <a:lstStyle/>
           <a:p>
             <a:pPr algn="ctr"/>
+            <a:endParaRPr/>
           </a:p>
         </p:txBody>
       </p:sp>
@@ -38864,6 +40268,7 @@
           <a:lstStyle/>
           <a:p>
             <a:pPr algn="ctr"/>
+            <a:endParaRPr/>
           </a:p>
         </p:txBody>
       </p:sp>
@@ -38908,6 +40313,7 @@
           <a:lstStyle/>
           <a:p>
             <a:pPr algn="ctr"/>
+            <a:endParaRPr/>
           </a:p>
         </p:txBody>
       </p:sp>
@@ -39009,7 +40415,7 @@
           </a:fontRef>
         </p:style>
         <p:txBody>
-          <a:bodyPr rtlCol="0" anchor="ctr" wrap="none" lIns="0" rIns="0" tIns="0" bIns="0"/>
+          <a:bodyPr wrap="none" lIns="0" tIns="0" rIns="0" bIns="0" rtlCol="0" anchor="ctr"/>
           <a:lstStyle/>
           <a:p>
             <a:pPr algn="ctr">
@@ -39071,6 +40477,7 @@
           <a:lstStyle/>
           <a:p>
             <a:pPr algn="ctr"/>
+            <a:endParaRPr/>
           </a:p>
         </p:txBody>
       </p:sp>
@@ -39199,6 +40606,7 @@
           <a:lstStyle/>
           <a:p>
             <a:pPr algn="ctr"/>
+            <a:endParaRPr/>
           </a:p>
         </p:txBody>
       </p:sp>
@@ -39327,6 +40735,7 @@
           <a:lstStyle/>
           <a:p>
             <a:pPr algn="ctr"/>
+            <a:endParaRPr/>
           </a:p>
         </p:txBody>
       </p:sp>
@@ -39455,6 +40864,7 @@
           <a:lstStyle/>
           <a:p>
             <a:pPr algn="ctr"/>
+            <a:endParaRPr/>
           </a:p>
         </p:txBody>
       </p:sp>
@@ -39583,6 +40993,7 @@
           <a:lstStyle/>
           <a:p>
             <a:pPr algn="ctr"/>
+            <a:endParaRPr/>
           </a:p>
         </p:txBody>
       </p:sp>
@@ -39718,7 +41129,7 @@
 </file>
 
 <file path=ppt/slides/slide36.xml><?xml version="1.0" encoding="utf-8"?>
-<p:sld xmlns:a="http://schemas.openxmlformats.org/drawingml/2006/main" xmlns:p="http://schemas.openxmlformats.org/presentationml/2006/main" xmlns:r="http://schemas.openxmlformats.org/officeDocument/2006/relationships">
+<p:sld xmlns:a="http://schemas.openxmlformats.org/drawingml/2006/main" xmlns:r="http://schemas.openxmlformats.org/officeDocument/2006/relationships" xmlns:p="http://schemas.openxmlformats.org/presentationml/2006/main">
   <p:cSld>
     <p:spTree>
       <p:nvGrpSpPr>
@@ -39726,7 +41137,14 @@
         <p:cNvGrpSpPr/>
         <p:nvPr/>
       </p:nvGrpSpPr>
-      <p:grpSpPr/>
+      <p:grpSpPr>
+        <a:xfrm>
+          <a:off x="0" y="0"/>
+          <a:ext cx="0" cy="0"/>
+          <a:chOff x="0" y="0"/>
+          <a:chExt cx="0" cy="0"/>
+        </a:xfrm>
+      </p:grpSpPr>
       <p:sp>
         <p:nvSpPr>
           <p:cNvPr id="2" name="Rectangle 1"/>
@@ -39768,6 +41186,7 @@
           <a:lstStyle/>
           <a:p>
             <a:pPr algn="ctr"/>
+            <a:endParaRPr/>
           </a:p>
         </p:txBody>
       </p:sp>
@@ -39812,6 +41231,7 @@
           <a:lstStyle/>
           <a:p>
             <a:pPr algn="ctr"/>
+            <a:endParaRPr/>
           </a:p>
         </p:txBody>
       </p:sp>
@@ -39856,6 +41276,7 @@
           <a:lstStyle/>
           <a:p>
             <a:pPr algn="ctr"/>
+            <a:endParaRPr/>
           </a:p>
         </p:txBody>
       </p:sp>
@@ -39957,7 +41378,7 @@
           </a:fontRef>
         </p:style>
         <p:txBody>
-          <a:bodyPr rtlCol="0" anchor="ctr" wrap="none" lIns="0" rIns="0" tIns="0" bIns="0"/>
+          <a:bodyPr wrap="none" lIns="0" tIns="0" rIns="0" bIns="0" rtlCol="0" anchor="ctr"/>
           <a:lstStyle/>
           <a:p>
             <a:pPr algn="ctr">
@@ -40019,6 +41440,7 @@
           <a:lstStyle/>
           <a:p>
             <a:pPr algn="ctr"/>
+            <a:endParaRPr/>
           </a:p>
         </p:txBody>
       </p:sp>
@@ -40147,6 +41569,7 @@
           <a:lstStyle/>
           <a:p>
             <a:pPr algn="ctr"/>
+            <a:endParaRPr/>
           </a:p>
         </p:txBody>
       </p:sp>
@@ -40275,6 +41698,7 @@
           <a:lstStyle/>
           <a:p>
             <a:pPr algn="ctr"/>
+            <a:endParaRPr/>
           </a:p>
         </p:txBody>
       </p:sp>
@@ -40403,6 +41827,7 @@
           <a:lstStyle/>
           <a:p>
             <a:pPr algn="ctr"/>
+            <a:endParaRPr/>
           </a:p>
         </p:txBody>
       </p:sp>
@@ -40531,6 +41956,7 @@
           <a:lstStyle/>
           <a:p>
             <a:pPr algn="ctr"/>
+            <a:endParaRPr/>
           </a:p>
         </p:txBody>
       </p:sp>
@@ -40659,6 +42085,7 @@
           <a:lstStyle/>
           <a:p>
             <a:pPr algn="ctr"/>
+            <a:endParaRPr/>
           </a:p>
         </p:txBody>
       </p:sp>
@@ -40794,7 +42221,7 @@
 </file>
 
 <file path=ppt/slides/slide37.xml><?xml version="1.0" encoding="utf-8"?>
-<p:sld xmlns:a="http://schemas.openxmlformats.org/drawingml/2006/main" xmlns:p="http://schemas.openxmlformats.org/presentationml/2006/main" xmlns:r="http://schemas.openxmlformats.org/officeDocument/2006/relationships">
+<p:sld xmlns:a="http://schemas.openxmlformats.org/drawingml/2006/main" xmlns:r="http://schemas.openxmlformats.org/officeDocument/2006/relationships" xmlns:p="http://schemas.openxmlformats.org/presentationml/2006/main">
   <p:cSld>
     <p:spTree>
       <p:nvGrpSpPr>
@@ -40802,7 +42229,14 @@
         <p:cNvGrpSpPr/>
         <p:nvPr/>
       </p:nvGrpSpPr>
-      <p:grpSpPr/>
+      <p:grpSpPr>
+        <a:xfrm>
+          <a:off x="0" y="0"/>
+          <a:ext cx="0" cy="0"/>
+          <a:chOff x="0" y="0"/>
+          <a:chExt cx="0" cy="0"/>
+        </a:xfrm>
+      </p:grpSpPr>
       <p:sp>
         <p:nvSpPr>
           <p:cNvPr id="2" name="Rectangle 1"/>
@@ -40844,6 +42278,7 @@
           <a:lstStyle/>
           <a:p>
             <a:pPr algn="ctr"/>
+            <a:endParaRPr/>
           </a:p>
         </p:txBody>
       </p:sp>
@@ -40888,6 +42323,7 @@
           <a:lstStyle/>
           <a:p>
             <a:pPr algn="ctr"/>
+            <a:endParaRPr/>
           </a:p>
         </p:txBody>
       </p:sp>
@@ -40932,6 +42368,7 @@
           <a:lstStyle/>
           <a:p>
             <a:pPr algn="ctr"/>
+            <a:endParaRPr/>
           </a:p>
         </p:txBody>
       </p:sp>
@@ -41033,7 +42470,7 @@
           </a:fontRef>
         </p:style>
         <p:txBody>
-          <a:bodyPr rtlCol="0" anchor="ctr" wrap="none" lIns="0" rIns="0" tIns="0" bIns="0"/>
+          <a:bodyPr wrap="none" lIns="0" tIns="0" rIns="0" bIns="0" rtlCol="0" anchor="ctr"/>
           <a:lstStyle/>
           <a:p>
             <a:pPr algn="ctr">
@@ -41095,6 +42532,7 @@
           <a:lstStyle/>
           <a:p>
             <a:pPr algn="ctr"/>
+            <a:endParaRPr/>
           </a:p>
         </p:txBody>
       </p:sp>
@@ -41223,6 +42661,7 @@
           <a:lstStyle/>
           <a:p>
             <a:pPr algn="ctr"/>
+            <a:endParaRPr/>
           </a:p>
         </p:txBody>
       </p:sp>
@@ -41351,6 +42790,7 @@
           <a:lstStyle/>
           <a:p>
             <a:pPr algn="ctr"/>
+            <a:endParaRPr/>
           </a:p>
         </p:txBody>
       </p:sp>
@@ -41479,6 +42919,7 @@
           <a:lstStyle/>
           <a:p>
             <a:pPr algn="ctr"/>
+            <a:endParaRPr/>
           </a:p>
         </p:txBody>
       </p:sp>
@@ -41607,6 +43048,7 @@
           <a:lstStyle/>
           <a:p>
             <a:pPr algn="ctr"/>
+            <a:endParaRPr/>
           </a:p>
         </p:txBody>
       </p:sp>
@@ -41735,6 +43177,7 @@
           <a:lstStyle/>
           <a:p>
             <a:pPr algn="ctr"/>
+            <a:endParaRPr/>
           </a:p>
         </p:txBody>
       </p:sp>
@@ -41863,6 +43306,7 @@
           <a:lstStyle/>
           <a:p>
             <a:pPr algn="ctr"/>
+            <a:endParaRPr/>
           </a:p>
         </p:txBody>
       </p:sp>
@@ -41998,7 +43442,7 @@
 </file>
 
 <file path=ppt/slides/slide38.xml><?xml version="1.0" encoding="utf-8"?>
-<p:sld xmlns:a="http://schemas.openxmlformats.org/drawingml/2006/main" xmlns:p="http://schemas.openxmlformats.org/presentationml/2006/main" xmlns:r="http://schemas.openxmlformats.org/officeDocument/2006/relationships">
+<p:sld xmlns:a="http://schemas.openxmlformats.org/drawingml/2006/main" xmlns:r="http://schemas.openxmlformats.org/officeDocument/2006/relationships" xmlns:p="http://schemas.openxmlformats.org/presentationml/2006/main">
   <p:cSld>
     <p:spTree>
       <p:nvGrpSpPr>
@@ -42006,7 +43450,14 @@
         <p:cNvGrpSpPr/>
         <p:nvPr/>
       </p:nvGrpSpPr>
-      <p:grpSpPr/>
+      <p:grpSpPr>
+        <a:xfrm>
+          <a:off x="0" y="0"/>
+          <a:ext cx="0" cy="0"/>
+          <a:chOff x="0" y="0"/>
+          <a:chExt cx="0" cy="0"/>
+        </a:xfrm>
+      </p:grpSpPr>
       <p:sp>
         <p:nvSpPr>
           <p:cNvPr id="2" name="Rectangle 1"/>
@@ -42048,6 +43499,7 @@
           <a:lstStyle/>
           <a:p>
             <a:pPr algn="ctr"/>
+            <a:endParaRPr/>
           </a:p>
         </p:txBody>
       </p:sp>
@@ -42092,6 +43544,7 @@
           <a:lstStyle/>
           <a:p>
             <a:pPr algn="ctr"/>
+            <a:endParaRPr/>
           </a:p>
         </p:txBody>
       </p:sp>
@@ -42136,6 +43589,7 @@
           <a:lstStyle/>
           <a:p>
             <a:pPr algn="ctr"/>
+            <a:endParaRPr/>
           </a:p>
         </p:txBody>
       </p:sp>
@@ -42237,7 +43691,7 @@
           </a:fontRef>
         </p:style>
         <p:txBody>
-          <a:bodyPr rtlCol="0" anchor="ctr" wrap="none" lIns="0" rIns="0" tIns="0" bIns="0"/>
+          <a:bodyPr wrap="none" lIns="0" tIns="0" rIns="0" bIns="0" rtlCol="0" anchor="ctr"/>
           <a:lstStyle/>
           <a:p>
             <a:pPr algn="ctr">
@@ -42299,6 +43753,7 @@
           <a:lstStyle/>
           <a:p>
             <a:pPr algn="ctr"/>
+            <a:endParaRPr/>
           </a:p>
         </p:txBody>
       </p:sp>
@@ -42427,6 +43882,7 @@
           <a:lstStyle/>
           <a:p>
             <a:pPr algn="ctr"/>
+            <a:endParaRPr/>
           </a:p>
         </p:txBody>
       </p:sp>
@@ -42555,6 +44011,7 @@
           <a:lstStyle/>
           <a:p>
             <a:pPr algn="ctr"/>
+            <a:endParaRPr/>
           </a:p>
         </p:txBody>
       </p:sp>
@@ -42683,6 +44140,7 @@
           <a:lstStyle/>
           <a:p>
             <a:pPr algn="ctr"/>
+            <a:endParaRPr/>
           </a:p>
         </p:txBody>
       </p:sp>
@@ -42811,6 +44269,7 @@
           <a:lstStyle/>
           <a:p>
             <a:pPr algn="ctr"/>
+            <a:endParaRPr/>
           </a:p>
         </p:txBody>
       </p:sp>
@@ -42939,6 +44398,7 @@
           <a:lstStyle/>
           <a:p>
             <a:pPr algn="ctr"/>
+            <a:endParaRPr/>
           </a:p>
         </p:txBody>
       </p:sp>
@@ -43067,6 +44527,7 @@
           <a:lstStyle/>
           <a:p>
             <a:pPr algn="ctr"/>
+            <a:endParaRPr/>
           </a:p>
         </p:txBody>
       </p:sp>
@@ -43195,6 +44656,7 @@
           <a:lstStyle/>
           <a:p>
             <a:pPr algn="ctr"/>
+            <a:endParaRPr/>
           </a:p>
         </p:txBody>
       </p:sp>
@@ -43330,7 +44792,7 @@
 </file>
 
 <file path=ppt/slides/slide4.xml><?xml version="1.0" encoding="utf-8"?>
-<p:sld xmlns:a="http://schemas.openxmlformats.org/drawingml/2006/main" xmlns:p="http://schemas.openxmlformats.org/presentationml/2006/main" xmlns:r="http://schemas.openxmlformats.org/officeDocument/2006/relationships">
+<p:sld xmlns:a="http://schemas.openxmlformats.org/drawingml/2006/main" xmlns:r="http://schemas.openxmlformats.org/officeDocument/2006/relationships" xmlns:p="http://schemas.openxmlformats.org/presentationml/2006/main">
   <p:cSld>
     <p:spTree>
       <p:nvGrpSpPr>
@@ -43338,7 +44800,14 @@
         <p:cNvGrpSpPr/>
         <p:nvPr/>
       </p:nvGrpSpPr>
-      <p:grpSpPr/>
+      <p:grpSpPr>
+        <a:xfrm>
+          <a:off x="0" y="0"/>
+          <a:ext cx="0" cy="0"/>
+          <a:chOff x="0" y="0"/>
+          <a:chExt cx="0" cy="0"/>
+        </a:xfrm>
+      </p:grpSpPr>
       <p:sp>
         <p:nvSpPr>
           <p:cNvPr id="2" name="Rectangle 1"/>
@@ -43380,6 +44849,7 @@
           <a:lstStyle/>
           <a:p>
             <a:pPr algn="ctr"/>
+            <a:endParaRPr/>
           </a:p>
         </p:txBody>
       </p:sp>
@@ -43424,6 +44894,7 @@
           <a:lstStyle/>
           <a:p>
             <a:pPr algn="ctr"/>
+            <a:endParaRPr/>
           </a:p>
         </p:txBody>
       </p:sp>
@@ -43468,6 +44939,7 @@
           <a:lstStyle/>
           <a:p>
             <a:pPr algn="ctr"/>
+            <a:endParaRPr/>
           </a:p>
         </p:txBody>
       </p:sp>
@@ -43553,6 +45025,7 @@
           <a:lstStyle/>
           <a:p>
             <a:pPr algn="ctr"/>
+            <a:endParaRPr/>
           </a:p>
         </p:txBody>
       </p:sp>
@@ -43697,6 +45170,7 @@
           <a:lstStyle/>
           <a:p>
             <a:pPr algn="ctr"/>
+            <a:endParaRPr/>
           </a:p>
         </p:txBody>
       </p:sp>
@@ -43841,6 +45315,7 @@
           <a:lstStyle/>
           <a:p>
             <a:pPr algn="ctr"/>
+            <a:endParaRPr/>
           </a:p>
         </p:txBody>
       </p:sp>
@@ -43985,6 +45460,7 @@
           <a:lstStyle/>
           <a:p>
             <a:pPr algn="ctr"/>
+            <a:endParaRPr/>
           </a:p>
         </p:txBody>
       </p:sp>
@@ -44134,11 +45610,18 @@
   <p:clrMapOvr>
     <a:masterClrMapping/>
   </p:clrMapOvr>
+  <p:timing>
+    <p:tnLst>
+      <p:par>
+        <p:cTn id="1" dur="indefinite" restart="never" nodeType="tmRoot"/>
+      </p:par>
+    </p:tnLst>
+  </p:timing>
 </p:sld>
 </file>
 
 <file path=ppt/slides/slide5.xml><?xml version="1.0" encoding="utf-8"?>
-<p:sld xmlns:a="http://schemas.openxmlformats.org/drawingml/2006/main" xmlns:p="http://schemas.openxmlformats.org/presentationml/2006/main" xmlns:r="http://schemas.openxmlformats.org/officeDocument/2006/relationships">
+<p:sld xmlns:a="http://schemas.openxmlformats.org/drawingml/2006/main" xmlns:r="http://schemas.openxmlformats.org/officeDocument/2006/relationships" xmlns:p="http://schemas.openxmlformats.org/presentationml/2006/main">
   <p:cSld>
     <p:spTree>
       <p:nvGrpSpPr>
@@ -44146,7 +45629,14 @@
         <p:cNvGrpSpPr/>
         <p:nvPr/>
       </p:nvGrpSpPr>
-      <p:grpSpPr/>
+      <p:grpSpPr>
+        <a:xfrm>
+          <a:off x="0" y="0"/>
+          <a:ext cx="0" cy="0"/>
+          <a:chOff x="0" y="0"/>
+          <a:chExt cx="0" cy="0"/>
+        </a:xfrm>
+      </p:grpSpPr>
       <p:sp>
         <p:nvSpPr>
           <p:cNvPr id="2" name="Rectangle 1"/>
@@ -44188,6 +45678,7 @@
           <a:lstStyle/>
           <a:p>
             <a:pPr algn="ctr"/>
+            <a:endParaRPr/>
           </a:p>
         </p:txBody>
       </p:sp>
@@ -44232,6 +45723,7 @@
           <a:lstStyle/>
           <a:p>
             <a:pPr algn="ctr"/>
+            <a:endParaRPr/>
           </a:p>
         </p:txBody>
       </p:sp>
@@ -44276,6 +45768,7 @@
           <a:lstStyle/>
           <a:p>
             <a:pPr algn="ctr"/>
+            <a:endParaRPr/>
           </a:p>
         </p:txBody>
       </p:sp>
@@ -44363,6 +45856,7 @@
           <a:lstStyle/>
           <a:p>
             <a:pPr algn="ctr"/>
+            <a:endParaRPr/>
           </a:p>
         </p:txBody>
       </p:sp>
@@ -44532,6 +46026,7 @@
           <a:lstStyle/>
           <a:p>
             <a:pPr algn="ctr"/>
+            <a:endParaRPr/>
           </a:p>
         </p:txBody>
       </p:sp>
@@ -44701,6 +46196,7 @@
           <a:lstStyle/>
           <a:p>
             <a:pPr algn="ctr"/>
+            <a:endParaRPr/>
           </a:p>
         </p:txBody>
       </p:sp>
@@ -44870,6 +46366,7 @@
           <a:lstStyle/>
           <a:p>
             <a:pPr algn="ctr"/>
+            <a:endParaRPr/>
           </a:p>
         </p:txBody>
       </p:sp>
@@ -45039,6 +46536,7 @@
           <a:lstStyle/>
           <a:p>
             <a:pPr algn="ctr"/>
+            <a:endParaRPr/>
           </a:p>
         </p:txBody>
       </p:sp>
@@ -45208,6 +46706,7 @@
           <a:lstStyle/>
           <a:p>
             <a:pPr algn="ctr"/>
+            <a:endParaRPr/>
           </a:p>
         </p:txBody>
       </p:sp>
@@ -45298,11 +46797,18 @@
   <p:clrMapOvr>
     <a:masterClrMapping/>
   </p:clrMapOvr>
+  <p:timing>
+    <p:tnLst>
+      <p:par>
+        <p:cTn id="1" dur="indefinite" restart="never" nodeType="tmRoot"/>
+      </p:par>
+    </p:tnLst>
+  </p:timing>
 </p:sld>
 </file>
 
 <file path=ppt/slides/slide6.xml><?xml version="1.0" encoding="utf-8"?>
-<p:sld xmlns:a="http://schemas.openxmlformats.org/drawingml/2006/main" xmlns:p="http://schemas.openxmlformats.org/presentationml/2006/main" xmlns:r="http://schemas.openxmlformats.org/officeDocument/2006/relationships">
+<p:sld xmlns:a="http://schemas.openxmlformats.org/drawingml/2006/main" xmlns:r="http://schemas.openxmlformats.org/officeDocument/2006/relationships" xmlns:p="http://schemas.openxmlformats.org/presentationml/2006/main">
   <p:cSld>
     <p:spTree>
       <p:nvGrpSpPr>
@@ -45310,7 +46816,14 @@
         <p:cNvGrpSpPr/>
         <p:nvPr/>
       </p:nvGrpSpPr>
-      <p:grpSpPr/>
+      <p:grpSpPr>
+        <a:xfrm>
+          <a:off x="0" y="0"/>
+          <a:ext cx="0" cy="0"/>
+          <a:chOff x="0" y="0"/>
+          <a:chExt cx="0" cy="0"/>
+        </a:xfrm>
+      </p:grpSpPr>
       <p:sp>
         <p:nvSpPr>
           <p:cNvPr id="2" name="Rectangle 1"/>
@@ -45352,6 +46865,7 @@
           <a:lstStyle/>
           <a:p>
             <a:pPr algn="ctr"/>
+            <a:endParaRPr/>
           </a:p>
         </p:txBody>
       </p:sp>
@@ -45396,6 +46910,7 @@
           <a:lstStyle/>
           <a:p>
             <a:pPr algn="ctr"/>
+            <a:endParaRPr/>
           </a:p>
         </p:txBody>
       </p:sp>
@@ -45524,6 +47039,7 @@
           <a:lstStyle/>
           <a:p>
             <a:pPr algn="ctr"/>
+            <a:endParaRPr/>
           </a:p>
         </p:txBody>
       </p:sp>
@@ -45568,6 +47084,7 @@
           <a:lstStyle/>
           <a:p>
             <a:pPr algn="ctr"/>
+            <a:endParaRPr/>
           </a:p>
         </p:txBody>
       </p:sp>
@@ -45755,6 +47272,7 @@
           <a:lstStyle/>
           <a:p>
             <a:pPr algn="ctr"/>
+            <a:endParaRPr/>
           </a:p>
         </p:txBody>
       </p:sp>
@@ -45799,6 +47317,7 @@
           <a:lstStyle/>
           <a:p>
             <a:pPr algn="ctr"/>
+            <a:endParaRPr/>
           </a:p>
         </p:txBody>
       </p:sp>
@@ -45986,6 +47505,7 @@
           <a:lstStyle/>
           <a:p>
             <a:pPr algn="ctr"/>
+            <a:endParaRPr/>
           </a:p>
         </p:txBody>
       </p:sp>
@@ -46030,6 +47550,7 @@
           <a:lstStyle/>
           <a:p>
             <a:pPr algn="ctr"/>
+            <a:endParaRPr/>
           </a:p>
         </p:txBody>
       </p:sp>
@@ -46217,6 +47738,7 @@
           <a:lstStyle/>
           <a:p>
             <a:pPr algn="ctr"/>
+            <a:endParaRPr/>
           </a:p>
         </p:txBody>
       </p:sp>
@@ -46261,6 +47783,7 @@
           <a:lstStyle/>
           <a:p>
             <a:pPr algn="ctr"/>
+            <a:endParaRPr/>
           </a:p>
         </p:txBody>
       </p:sp>
@@ -46407,6 +47930,7 @@
           <a:lstStyle/>
           <a:p>
             <a:pPr algn="ctr"/>
+            <a:endParaRPr/>
           </a:p>
         </p:txBody>
       </p:sp>
@@ -46515,11 +48039,18 @@
   <p:clrMapOvr>
     <a:masterClrMapping/>
   </p:clrMapOvr>
+  <p:timing>
+    <p:tnLst>
+      <p:par>
+        <p:cTn id="1" dur="indefinite" restart="never" nodeType="tmRoot"/>
+      </p:par>
+    </p:tnLst>
+  </p:timing>
 </p:sld>
 </file>
 
 <file path=ppt/slides/slide7.xml><?xml version="1.0" encoding="utf-8"?>
-<p:sld xmlns:a="http://schemas.openxmlformats.org/drawingml/2006/main" xmlns:p="http://schemas.openxmlformats.org/presentationml/2006/main" xmlns:r="http://schemas.openxmlformats.org/officeDocument/2006/relationships">
+<p:sld xmlns:a="http://schemas.openxmlformats.org/drawingml/2006/main" xmlns:r="http://schemas.openxmlformats.org/officeDocument/2006/relationships" xmlns:p="http://schemas.openxmlformats.org/presentationml/2006/main">
   <p:cSld>
     <p:spTree>
       <p:nvGrpSpPr>
@@ -46527,7 +48058,14 @@
         <p:cNvGrpSpPr/>
         <p:nvPr/>
       </p:nvGrpSpPr>
-      <p:grpSpPr/>
+      <p:grpSpPr>
+        <a:xfrm>
+          <a:off x="0" y="0"/>
+          <a:ext cx="0" cy="0"/>
+          <a:chOff x="0" y="0"/>
+          <a:chExt cx="0" cy="0"/>
+        </a:xfrm>
+      </p:grpSpPr>
       <p:sp>
         <p:nvSpPr>
           <p:cNvPr id="2" name="Rectangle 1"/>
@@ -46569,6 +48107,7 @@
           <a:lstStyle/>
           <a:p>
             <a:pPr algn="ctr"/>
+            <a:endParaRPr/>
           </a:p>
         </p:txBody>
       </p:sp>
@@ -46613,6 +48152,7 @@
           <a:lstStyle/>
           <a:p>
             <a:pPr algn="ctr"/>
+            <a:endParaRPr/>
           </a:p>
         </p:txBody>
       </p:sp>
@@ -46657,6 +48197,7 @@
           <a:lstStyle/>
           <a:p>
             <a:pPr algn="ctr"/>
+            <a:endParaRPr/>
           </a:p>
         </p:txBody>
       </p:sp>
@@ -46785,6 +48326,7 @@
           <a:lstStyle/>
           <a:p>
             <a:pPr algn="ctr"/>
+            <a:endParaRPr/>
           </a:p>
         </p:txBody>
       </p:sp>
@@ -46829,6 +48371,7 @@
           <a:lstStyle/>
           <a:p>
             <a:pPr algn="ctr"/>
+            <a:endParaRPr/>
           </a:p>
         </p:txBody>
       </p:sp>
@@ -46975,6 +48518,7 @@
           <a:lstStyle/>
           <a:p>
             <a:pPr algn="ctr"/>
+            <a:endParaRPr/>
           </a:p>
         </p:txBody>
       </p:sp>
@@ -47019,6 +48563,7 @@
           <a:lstStyle/>
           <a:p>
             <a:pPr algn="ctr"/>
+            <a:endParaRPr/>
           </a:p>
         </p:txBody>
       </p:sp>
@@ -47165,6 +48710,7 @@
           <a:lstStyle/>
           <a:p>
             <a:pPr algn="ctr"/>
+            <a:endParaRPr/>
           </a:p>
         </p:txBody>
       </p:sp>
@@ -47209,6 +48755,7 @@
           <a:lstStyle/>
           <a:p>
             <a:pPr algn="ctr"/>
+            <a:endParaRPr/>
           </a:p>
         </p:txBody>
       </p:sp>
@@ -47355,6 +48902,7 @@
           <a:lstStyle/>
           <a:p>
             <a:pPr algn="ctr"/>
+            <a:endParaRPr/>
           </a:p>
         </p:txBody>
       </p:sp>
@@ -47399,6 +48947,7 @@
           <a:lstStyle/>
           <a:p>
             <a:pPr algn="ctr"/>
+            <a:endParaRPr/>
           </a:p>
         </p:txBody>
       </p:sp>
@@ -47545,6 +49094,7 @@
           <a:lstStyle/>
           <a:p>
             <a:pPr algn="ctr"/>
+            <a:endParaRPr/>
           </a:p>
         </p:txBody>
       </p:sp>
@@ -47589,6 +49139,7 @@
           <a:lstStyle/>
           <a:p>
             <a:pPr algn="ctr"/>
+            <a:endParaRPr/>
           </a:p>
         </p:txBody>
       </p:sp>
@@ -47738,11 +49289,18 @@
   <p:clrMapOvr>
     <a:masterClrMapping/>
   </p:clrMapOvr>
+  <p:timing>
+    <p:tnLst>
+      <p:par>
+        <p:cTn id="1" dur="indefinite" restart="never" nodeType="tmRoot"/>
+      </p:par>
+    </p:tnLst>
+  </p:timing>
 </p:sld>
 </file>
 
 <file path=ppt/slides/slide8.xml><?xml version="1.0" encoding="utf-8"?>
-<p:sld xmlns:a="http://schemas.openxmlformats.org/drawingml/2006/main" xmlns:p="http://schemas.openxmlformats.org/presentationml/2006/main" xmlns:r="http://schemas.openxmlformats.org/officeDocument/2006/relationships">
+<p:sld xmlns:a="http://schemas.openxmlformats.org/drawingml/2006/main" xmlns:r="http://schemas.openxmlformats.org/officeDocument/2006/relationships" xmlns:p="http://schemas.openxmlformats.org/presentationml/2006/main">
   <p:cSld>
     <p:spTree>
       <p:nvGrpSpPr>
@@ -47750,7 +49308,14 @@
         <p:cNvGrpSpPr/>
         <p:nvPr/>
       </p:nvGrpSpPr>
-      <p:grpSpPr/>
+      <p:grpSpPr>
+        <a:xfrm>
+          <a:off x="0" y="0"/>
+          <a:ext cx="0" cy="0"/>
+          <a:chOff x="0" y="0"/>
+          <a:chExt cx="0" cy="0"/>
+        </a:xfrm>
+      </p:grpSpPr>
       <p:sp>
         <p:nvSpPr>
           <p:cNvPr id="2" name="Rectangle 1"/>
@@ -47792,6 +49357,7 @@
           <a:lstStyle/>
           <a:p>
             <a:pPr algn="ctr"/>
+            <a:endParaRPr/>
           </a:p>
         </p:txBody>
       </p:sp>
@@ -47836,6 +49402,7 @@
           <a:lstStyle/>
           <a:p>
             <a:pPr algn="ctr"/>
+            <a:endParaRPr/>
           </a:p>
         </p:txBody>
       </p:sp>
@@ -47880,6 +49447,7 @@
           <a:lstStyle/>
           <a:p>
             <a:pPr algn="ctr"/>
+            <a:endParaRPr/>
           </a:p>
         </p:txBody>
       </p:sp>
@@ -47965,11 +49533,18 @@
   <p:clrMapOvr>
     <a:masterClrMapping/>
   </p:clrMapOvr>
+  <p:timing>
+    <p:tnLst>
+      <p:par>
+        <p:cTn id="1" dur="indefinite" restart="never" nodeType="tmRoot"/>
+      </p:par>
+    </p:tnLst>
+  </p:timing>
 </p:sld>
 </file>
 
 <file path=ppt/slides/slide9.xml><?xml version="1.0" encoding="utf-8"?>
-<p:sld xmlns:a="http://schemas.openxmlformats.org/drawingml/2006/main" xmlns:p="http://schemas.openxmlformats.org/presentationml/2006/main" xmlns:r="http://schemas.openxmlformats.org/officeDocument/2006/relationships">
+<p:sld xmlns:a="http://schemas.openxmlformats.org/drawingml/2006/main" xmlns:r="http://schemas.openxmlformats.org/officeDocument/2006/relationships" xmlns:p="http://schemas.openxmlformats.org/presentationml/2006/main">
   <p:cSld>
     <p:spTree>
       <p:nvGrpSpPr>
@@ -47977,7 +49552,14 @@
         <p:cNvGrpSpPr/>
         <p:nvPr/>
       </p:nvGrpSpPr>
-      <p:grpSpPr/>
+      <p:grpSpPr>
+        <a:xfrm>
+          <a:off x="0" y="0"/>
+          <a:ext cx="0" cy="0"/>
+          <a:chOff x="0" y="0"/>
+          <a:chExt cx="0" cy="0"/>
+        </a:xfrm>
+      </p:grpSpPr>
       <p:sp>
         <p:nvSpPr>
           <p:cNvPr id="2" name="Rectangle 1"/>
@@ -48019,6 +49601,7 @@
           <a:lstStyle/>
           <a:p>
             <a:pPr algn="ctr"/>
+            <a:endParaRPr/>
           </a:p>
         </p:txBody>
       </p:sp>
@@ -48063,6 +49646,7 @@
           <a:lstStyle/>
           <a:p>
             <a:pPr algn="ctr"/>
+            <a:endParaRPr/>
           </a:p>
         </p:txBody>
       </p:sp>
@@ -48107,6 +49691,7 @@
           <a:lstStyle/>
           <a:p>
             <a:pPr algn="ctr"/>
+            <a:endParaRPr/>
           </a:p>
         </p:txBody>
       </p:sp>
@@ -48151,6 +49736,7 @@
           <a:lstStyle/>
           <a:p>
             <a:pPr algn="ctr"/>
+            <a:endParaRPr/>
           </a:p>
         </p:txBody>
       </p:sp>
@@ -48361,6 +49947,7 @@
           <a:lstStyle/>
           <a:p>
             <a:pPr algn="ctr"/>
+            <a:endParaRPr/>
           </a:p>
         </p:txBody>
       </p:sp>
@@ -48449,7 +50036,7 @@
           </a:fontRef>
         </p:style>
         <p:txBody>
-          <a:bodyPr rtlCol="0" anchor="ctr" wrap="none" lIns="0" rIns="0" tIns="0" bIns="0"/>
+          <a:bodyPr wrap="none" lIns="0" tIns="0" rIns="0" bIns="0" rtlCol="0" anchor="ctr"/>
           <a:lstStyle/>
           <a:p>
             <a:pPr algn="ctr">
@@ -48477,7 +50064,7 @@
         <p:spPr>
           <a:xfrm>
             <a:off x="502920" y="2148840"/>
-            <a:ext cx="11201400" cy="1115568"/>
+            <a:ext cx="7935686" cy="1115568"/>
           </a:xfrm>
           <a:prstGeom prst="rect">
             <a:avLst/>
@@ -48511,6 +50098,7 @@
           <a:lstStyle/>
           <a:p>
             <a:pPr algn="ctr"/>
+            <a:endParaRPr/>
           </a:p>
         </p:txBody>
       </p:sp>
@@ -48523,7 +50111,7 @@
         <p:spPr>
           <a:xfrm>
             <a:off x="713232" y="2231136"/>
-            <a:ext cx="10789920" cy="987552"/>
+            <a:ext cx="7644171" cy="684803"/>
           </a:xfrm>
           <a:prstGeom prst="rect">
             <a:avLst/>
@@ -48582,7 +50170,7 @@
         <p:spPr>
           <a:xfrm>
             <a:off x="502920" y="3429000"/>
-            <a:ext cx="11201400" cy="548640"/>
+            <a:ext cx="7935686" cy="548640"/>
           </a:xfrm>
           <a:prstGeom prst="rect">
             <a:avLst/>
@@ -48616,6 +50204,7 @@
           <a:lstStyle/>
           <a:p>
             <a:pPr algn="ctr"/>
+            <a:endParaRPr/>
           </a:p>
         </p:txBody>
       </p:sp>
@@ -48660,6 +50249,7 @@
           <a:lstStyle/>
           <a:p>
             <a:pPr algn="ctr"/>
+            <a:endParaRPr/>
           </a:p>
         </p:txBody>
       </p:sp>
@@ -48713,7 +50303,7 @@
         <p:spPr>
           <a:xfrm>
             <a:off x="1170432" y="3520440"/>
-            <a:ext cx="10424160" cy="411480"/>
+            <a:ext cx="7385047" cy="477054"/>
           </a:xfrm>
           <a:prstGeom prst="rect">
             <a:avLst/>
@@ -48754,7 +50344,7 @@
         <p:spPr>
           <a:xfrm>
             <a:off x="502920" y="4032504"/>
-            <a:ext cx="11201400" cy="548640"/>
+            <a:ext cx="7935686" cy="548640"/>
           </a:xfrm>
           <a:prstGeom prst="rect">
             <a:avLst/>
@@ -48788,6 +50378,7 @@
           <a:lstStyle/>
           <a:p>
             <a:pPr algn="ctr"/>
+            <a:endParaRPr/>
           </a:p>
         </p:txBody>
       </p:sp>
@@ -48832,6 +50423,7 @@
           <a:lstStyle/>
           <a:p>
             <a:pPr algn="ctr"/>
+            <a:endParaRPr/>
           </a:p>
         </p:txBody>
       </p:sp>
@@ -48885,7 +50477,7 @@
         <p:spPr>
           <a:xfrm>
             <a:off x="1170432" y="4123944"/>
-            <a:ext cx="10424160" cy="411480"/>
+            <a:ext cx="7385047" cy="284693"/>
           </a:xfrm>
           <a:prstGeom prst="rect">
             <a:avLst/>
@@ -48926,7 +50518,7 @@
         <p:spPr>
           <a:xfrm>
             <a:off x="502920" y="4636008"/>
-            <a:ext cx="11201400" cy="548640"/>
+            <a:ext cx="7935686" cy="548640"/>
           </a:xfrm>
           <a:prstGeom prst="rect">
             <a:avLst/>
@@ -48960,6 +50552,7 @@
           <a:lstStyle/>
           <a:p>
             <a:pPr algn="ctr"/>
+            <a:endParaRPr/>
           </a:p>
         </p:txBody>
       </p:sp>
@@ -49004,6 +50597,7 @@
           <a:lstStyle/>
           <a:p>
             <a:pPr algn="ctr"/>
+            <a:endParaRPr/>
           </a:p>
         </p:txBody>
       </p:sp>
@@ -49057,7 +50651,7 @@
         <p:spPr>
           <a:xfrm>
             <a:off x="1170432" y="4727448"/>
-            <a:ext cx="10424160" cy="411480"/>
+            <a:ext cx="7385047" cy="477054"/>
           </a:xfrm>
           <a:prstGeom prst="rect">
             <a:avLst/>
@@ -49098,7 +50692,7 @@
         <p:spPr>
           <a:xfrm>
             <a:off x="502920" y="5239512"/>
-            <a:ext cx="11201400" cy="548640"/>
+            <a:ext cx="7935686" cy="548640"/>
           </a:xfrm>
           <a:prstGeom prst="rect">
             <a:avLst/>
@@ -49132,6 +50726,7 @@
           <a:lstStyle/>
           <a:p>
             <a:pPr algn="ctr"/>
+            <a:endParaRPr/>
           </a:p>
         </p:txBody>
       </p:sp>
@@ -49176,6 +50771,7 @@
           <a:lstStyle/>
           <a:p>
             <a:pPr algn="ctr"/>
+            <a:endParaRPr/>
           </a:p>
         </p:txBody>
       </p:sp>
@@ -49229,7 +50825,7 @@
         <p:spPr>
           <a:xfrm>
             <a:off x="1170432" y="5330952"/>
-            <a:ext cx="10424160" cy="411480"/>
+            <a:ext cx="7385047" cy="284693"/>
           </a:xfrm>
           <a:prstGeom prst="rect">
             <a:avLst/>
@@ -49270,7 +50866,7 @@
         <p:spPr>
           <a:xfrm>
             <a:off x="502920" y="5843016"/>
-            <a:ext cx="11201400" cy="548640"/>
+            <a:ext cx="7935686" cy="548640"/>
           </a:xfrm>
           <a:prstGeom prst="rect">
             <a:avLst/>
@@ -49304,6 +50900,7 @@
           <a:lstStyle/>
           <a:p>
             <a:pPr algn="ctr"/>
+            <a:endParaRPr/>
           </a:p>
         </p:txBody>
       </p:sp>
@@ -49348,6 +50945,7 @@
           <a:lstStyle/>
           <a:p>
             <a:pPr algn="ctr"/>
+            <a:endParaRPr/>
           </a:p>
         </p:txBody>
       </p:sp>
@@ -49401,7 +50999,7 @@
         <p:spPr>
           <a:xfrm>
             <a:off x="1170432" y="5934456"/>
-            <a:ext cx="10424160" cy="411480"/>
+            <a:ext cx="7385047" cy="284693"/>
           </a:xfrm>
           <a:prstGeom prst="rect">
             <a:avLst/>
@@ -49471,6 +51069,77 @@
               </a:rPr>
               <a:t>GA-1 · Ulusal Değerlendirme Toplantısı · 09.08.2026</a:t>
             </a:r>
+          </a:p>
+        </p:txBody>
+      </p:sp>
+      <p:pic>
+        <p:nvPicPr>
+          <p:cNvPr id="1027" name="Picture 3"/>
+          <p:cNvPicPr>
+            <a:picLocks noChangeAspect="1" noChangeArrowheads="1"/>
+          </p:cNvPicPr>
+          <p:nvPr/>
+        </p:nvPicPr>
+        <p:blipFill>
+          <a:blip r:embed="rId3"/>
+          <a:srcRect/>
+          <a:stretch>
+            <a:fillRect/>
+          </a:stretch>
+        </p:blipFill>
+        <p:spPr bwMode="auto">
+          <a:xfrm>
+            <a:off x="8495857" y="2143125"/>
+            <a:ext cx="3626299" cy="3847424"/>
+          </a:xfrm>
+          <a:prstGeom prst="rect">
+            <a:avLst/>
+          </a:prstGeom>
+          <a:noFill/>
+          <a:ln w="9525">
+            <a:noFill/>
+            <a:miter lim="800000"/>
+            <a:headEnd/>
+            <a:tailEnd/>
+          </a:ln>
+          <a:effectLst/>
+        </p:spPr>
+      </p:pic>
+      <p:sp>
+        <p:nvSpPr>
+          <p:cNvPr id="38" name="37 Sağ Ok"/>
+          <p:cNvSpPr/>
+          <p:nvPr/>
+        </p:nvSpPr>
+        <p:spPr>
+          <a:xfrm rot="4052593">
+            <a:off x="9700692" y="4816445"/>
+            <a:ext cx="258216" cy="241087"/>
+          </a:xfrm>
+          <a:prstGeom prst="rightArrow">
+            <a:avLst/>
+          </a:prstGeom>
+        </p:spPr>
+        <p:style>
+          <a:lnRef idx="1">
+            <a:schemeClr val="accent2"/>
+          </a:lnRef>
+          <a:fillRef idx="3">
+            <a:schemeClr val="accent2"/>
+          </a:fillRef>
+          <a:effectRef idx="2">
+            <a:schemeClr val="accent2"/>
+          </a:effectRef>
+          <a:fontRef idx="minor">
+            <a:schemeClr val="lt1"/>
+          </a:fontRef>
+        </p:style>
+        <p:txBody>
+          <a:bodyPr rtlCol="0" anchor="ctr"/>
+          <a:lstStyle/>
+          <a:p>
+            <a:pPr algn="ctr"/>
+            <a:endParaRPr lang="tr-TR"/>
           </a:p>
         </p:txBody>
       </p:sp>
@@ -49479,6 +51148,13 @@
   <p:clrMapOvr>
     <a:masterClrMapping/>
   </p:clrMapOvr>
+  <p:timing>
+    <p:tnLst>
+      <p:par>
+        <p:cTn id="1" dur="indefinite" restart="never" nodeType="tmRoot"/>
+      </p:par>
+    </p:tnLst>
+  </p:timing>
 </p:sld>
 </file>
 

--- a/Amator_Telsizcilik_Uzlasi_Oy_Pusulasi_Sunum_v1.3.pptx
+++ b/Amator_Telsizcilik_Uzlasi_Oy_Pusulasi_Sunum_v1.3.pptx
@@ -14775,7 +14775,7 @@
                   <a:srgbClr val="1B2230"/>
                 </a:solidFill>
               </a:rPr>
-              <a:t>Kapsam ve Tanım Talebi: Amatörlerin afetteki yetki ve sorumlulukları (teknik destek / malzeme / operatörlük) ile bireysel amatörlerin dâhil olma usulü yazılı olarak tanımlanır; il düzeyinde eşleşme ve tatbikat esasa bağlanır.</a:t>
+              <a:t>Kapsam ve Tanım Talebi: Amatörlerin afetteki yetki ve sorumlulukları ile bireysel amatörlerin dâhil olma usulü yazılı olarak tanımlanır; il düzeyinde eşleşme ve tatbikat esasa bağlanır.</a:t>
             </a:r>
           </a:p>
         </p:txBody>
@@ -36051,7 +36051,7 @@
                   <a:srgbClr val="1B2230"/>
                 </a:solidFill>
               </a:rPr>
-              <a:t>Mevcut Durumu Koru: 10 yıl pasif kural sürsün; çağrı işareti devredilemez kalsın.</a:t>
+              <a:t>Mevcut Durumu Koru: Md.7/2'deki şartlı vesayet mekanizması (varis/vasi + aynı bölge + eşdeğer belge + süre içinde) olduğu gibi sürsün.</a:t>
             </a:r>
           </a:p>
         </p:txBody>
@@ -36225,7 +36225,7 @@
                   <a:srgbClr val="1B2230"/>
                 </a:solidFill>
               </a:rPr>
-              <a:t>Topluluk Kılavuzu: Dernek ve kulüpler SK terminolojisi, saygı protokolü ve vesayet önerilerini içeren kılavuz yayımlar.</a:t>
+              <a:t>Topluluk Kılavuzu: Dernek ve kulüpler SK terminolojisi, Md.7/2 vesayet usulü ve saygı protokolünü içeren bir farkındalık kılavuzu yayımlar.</a:t>
             </a:r>
           </a:p>
         </p:txBody>
@@ -36399,7 +36399,7 @@
                   <a:srgbClr val="1B2230"/>
                 </a:solidFill>
               </a:rPr>
-              <a:t>Yazılı Görüş Talep Et: KEGM'den 10 yıl sonrası akıbet ve aileye/kulübe in-memoriam vesayet usulü için resmî görüş.</a:t>
+              <a:t>Yazılı Görüş Talep Et: KEGM'den Md.7/2'nin süre sonrası akıbeti ve 'eşdeğer belge' şartının esnetilmesi için resmî görüş.</a:t>
             </a:r>
           </a:p>
         </p:txBody>
@@ -36573,7 +36573,7 @@
                   <a:srgbClr val="1B2230"/>
                 </a:solidFill>
               </a:rPr>
-              <a:t>Mevzuat Düzenlemesi: Çağrı işareti yaşam döngüsü + vesayet tanımlansın — süre (koru/uzat/kısalt/kaldır) ve devir (devredilemez / şartlı aile-kulüp / süre sonu serbest / kalıcı anıt) seçenekleriyle.</a:t>
+              <a:t>Mevzuat Düzenlemesi: Md.7/2'nin süre sonrası akıbeti tanımlansın; eşdeğer belge şartı gözden geçirilsin — devir seçenekleri (süre sonu serbest / kalıcı anıt / aile-kulüp genişletme) değerlendirilsin.</a:t>
             </a:r>
           </a:p>
         </p:txBody>

--- a/Amator_Telsizcilik_Uzlasi_Oy_Pusulasi_Sunum_v1.3.pptx
+++ b/Amator_Telsizcilik_Uzlasi_Oy_Pusulasi_Sunum_v1.3.pptx
@@ -3327,7 +3327,7 @@
                   <a:srgbClr val="A8C8E8"/>
                 </a:solidFill>
               </a:rPr>
-              <a:t>TÜRKİYE</a:t>
+              <a:t>AMATÖR TELSİZCİLİK MEVZUATINI</a:t>
             </a:r>
           </a:p>
           <a:p>
@@ -3345,7 +3345,7 @@
                   <a:srgbClr val="FFFFFF"/>
                 </a:solidFill>
               </a:rPr>
-              <a:t>AMATÖR TELSİZCİLİK</a:t>
+              <a:t>DEĞERLENDİRME TOPLANTISI</a:t>
             </a:r>
           </a:p>
           <a:p>
@@ -3363,7 +3363,7 @@
                   <a:srgbClr val="E8B23A"/>
                 </a:solidFill>
               </a:rPr>
-              <a:t>MEVZUAT ÇALIŞMASI</a:t>
+              <a:t/>
             </a:r>
           </a:p>
           <a:p>
@@ -3381,7 +3381,7 @@
                   <a:srgbClr val="FFFFFF"/>
                 </a:solidFill>
               </a:rPr>
-              <a:t>ULUSAL DEĞERLENDİRME TOPLANTISI</a:t>
+              <a:t/>
             </a:r>
           </a:p>
         </p:txBody>
@@ -5148,7 +5148,7 @@
                   <a:srgbClr val="5A6678"/>
                 </a:solidFill>
               </a:rPr>
-              <a:t>GA-BAND-1 · Ulusal Değerlendirme Toplantısı · 09.08.2026</a:t>
+              <a:t>GA-BAND-1 · Değerlendirme Toplantısı · 09.08.2026</a:t>
             </a:r>
           </a:p>
         </p:txBody>
@@ -5297,6 +5297,40 @@
           <a:p>
             <a:pPr algn="ctr"/>
             <a:endParaRPr lang="tr-TR"/>
+          </a:p>
+        </p:txBody>
+      </p:sp>
+      <p:sp>
+        <p:nvSpPr>
+          <p:cNvPr id="40" name="TextBox 39"/>
+          <p:cNvSpPr txBox="1"/>
+          <p:nvPr/>
+        </p:nvSpPr>
+        <p:spPr>
+          <a:xfrm>
+            <a:off x="10515600" y="6473952"/>
+            <a:ext cx="1219200" cy="274320"/>
+          </a:xfrm>
+          <a:prstGeom prst="rect">
+            <a:avLst/>
+          </a:prstGeom>
+          <a:noFill/>
+        </p:spPr>
+        <p:txBody>
+          <a:bodyPr wrap="none">
+            <a:spAutoFit/>
+          </a:bodyPr>
+          <a:lstStyle/>
+          <a:p>
+            <a:pPr algn="r"/>
+            <a:r>
+              <a:rPr sz="1000" b="0">
+                <a:solidFill>
+                  <a:srgbClr val="5A6678"/>
+                </a:solidFill>
+              </a:rPr>
+              <a:t>10 / 38</a:t>
+            </a:r>
           </a:p>
         </p:txBody>
       </p:sp>
@@ -6839,7 +6873,7 @@
                   <a:srgbClr val="5A6678"/>
                 </a:solidFill>
               </a:rPr>
-              <a:t>GA-RX · Ulusal Değerlendirme Toplantısı · 09.08.2026</a:t>
+              <a:t>GA-RX · Değerlendirme Toplantısı · 09.08.2026</a:t>
             </a:r>
           </a:p>
         </p:txBody>
@@ -6912,6 +6946,40 @@
           <a:p>
             <a:pPr algn="ctr"/>
             <a:endParaRPr lang="tr-TR"/>
+          </a:p>
+        </p:txBody>
+      </p:sp>
+      <p:sp>
+        <p:nvSpPr>
+          <p:cNvPr id="40" name="TextBox 39"/>
+          <p:cNvSpPr txBox="1"/>
+          <p:nvPr/>
+        </p:nvSpPr>
+        <p:spPr>
+          <a:xfrm>
+            <a:off x="10515600" y="6473952"/>
+            <a:ext cx="1219200" cy="274320"/>
+          </a:xfrm>
+          <a:prstGeom prst="rect">
+            <a:avLst/>
+          </a:prstGeom>
+          <a:noFill/>
+        </p:spPr>
+        <p:txBody>
+          <a:bodyPr wrap="none">
+            <a:spAutoFit/>
+          </a:bodyPr>
+          <a:lstStyle/>
+          <a:p>
+            <a:pPr algn="r"/>
+            <a:r>
+              <a:rPr sz="1000" b="0">
+                <a:solidFill>
+                  <a:srgbClr val="5A6678"/>
+                </a:solidFill>
+              </a:rPr>
+              <a:t>11 / 38</a:t>
+            </a:r>
           </a:p>
         </p:txBody>
       </p:sp>
@@ -8454,7 +8522,7 @@
                   <a:srgbClr val="5A6678"/>
                 </a:solidFill>
               </a:rPr>
-              <a:t>GA-DIG · Ulusal Değerlendirme Toplantısı · 09.08.2026</a:t>
+              <a:t>GA-DIG · Değerlendirme Toplantısı · 09.08.2026</a:t>
             </a:r>
           </a:p>
         </p:txBody>
@@ -8603,6 +8671,40 @@
           <a:p>
             <a:pPr algn="ctr"/>
             <a:endParaRPr lang="tr-TR"/>
+          </a:p>
+        </p:txBody>
+      </p:sp>
+      <p:sp>
+        <p:nvSpPr>
+          <p:cNvPr id="41" name="TextBox 40"/>
+          <p:cNvSpPr txBox="1"/>
+          <p:nvPr/>
+        </p:nvSpPr>
+        <p:spPr>
+          <a:xfrm>
+            <a:off x="10515600" y="6473952"/>
+            <a:ext cx="1219200" cy="274320"/>
+          </a:xfrm>
+          <a:prstGeom prst="rect">
+            <a:avLst/>
+          </a:prstGeom>
+          <a:noFill/>
+        </p:spPr>
+        <p:txBody>
+          <a:bodyPr wrap="none">
+            <a:spAutoFit/>
+          </a:bodyPr>
+          <a:lstStyle/>
+          <a:p>
+            <a:pPr algn="r"/>
+            <a:r>
+              <a:rPr sz="1000" b="0">
+                <a:solidFill>
+                  <a:srgbClr val="5A6678"/>
+                </a:solidFill>
+              </a:rPr>
+              <a:t>12 / 38</a:t>
+            </a:r>
           </a:p>
         </p:txBody>
       </p:sp>
@@ -10145,7 +10247,7 @@
                   <a:srgbClr val="5A6678"/>
                 </a:solidFill>
               </a:rPr>
-              <a:t>GA-6 · Ulusal Değerlendirme Toplantısı · 09.08.2026</a:t>
+              <a:t>GA-6 · Değerlendirme Toplantısı · 09.08.2026</a:t>
             </a:r>
           </a:p>
         </p:txBody>
@@ -10218,6 +10320,40 @@
           <a:p>
             <a:pPr algn="ctr"/>
             <a:endParaRPr lang="tr-TR"/>
+          </a:p>
+        </p:txBody>
+      </p:sp>
+      <p:sp>
+        <p:nvSpPr>
+          <p:cNvPr id="38" name="TextBox 37"/>
+          <p:cNvSpPr txBox="1"/>
+          <p:nvPr/>
+        </p:nvSpPr>
+        <p:spPr>
+          <a:xfrm>
+            <a:off x="10515600" y="6473952"/>
+            <a:ext cx="1219200" cy="274320"/>
+          </a:xfrm>
+          <a:prstGeom prst="rect">
+            <a:avLst/>
+          </a:prstGeom>
+          <a:noFill/>
+        </p:spPr>
+        <p:txBody>
+          <a:bodyPr wrap="none">
+            <a:spAutoFit/>
+          </a:bodyPr>
+          <a:lstStyle/>
+          <a:p>
+            <a:pPr algn="r"/>
+            <a:r>
+              <a:rPr sz="1000" b="0">
+                <a:solidFill>
+                  <a:srgbClr val="5A6678"/>
+                </a:solidFill>
+              </a:rPr>
+              <a:t>13 / 38</a:t>
+            </a:r>
           </a:p>
         </p:txBody>
       </p:sp>
@@ -11760,7 +11896,7 @@
                   <a:srgbClr val="5A6678"/>
                 </a:solidFill>
               </a:rPr>
-              <a:t>GA-3 · Ulusal Değerlendirme Toplantısı · 09.08.2026</a:t>
+              <a:t>GA-3 · Değerlendirme Toplantısı · 09.08.2026</a:t>
             </a:r>
           </a:p>
         </p:txBody>
@@ -11833,6 +11969,40 @@
           <a:p>
             <a:pPr algn="ctr"/>
             <a:endParaRPr lang="tr-TR"/>
+          </a:p>
+        </p:txBody>
+      </p:sp>
+      <p:sp>
+        <p:nvSpPr>
+          <p:cNvPr id="38" name="TextBox 37"/>
+          <p:cNvSpPr txBox="1"/>
+          <p:nvPr/>
+        </p:nvSpPr>
+        <p:spPr>
+          <a:xfrm>
+            <a:off x="10515600" y="6473952"/>
+            <a:ext cx="1219200" cy="274320"/>
+          </a:xfrm>
+          <a:prstGeom prst="rect">
+            <a:avLst/>
+          </a:prstGeom>
+          <a:noFill/>
+        </p:spPr>
+        <p:txBody>
+          <a:bodyPr wrap="none">
+            <a:spAutoFit/>
+          </a:bodyPr>
+          <a:lstStyle/>
+          <a:p>
+            <a:pPr algn="r"/>
+            <a:r>
+              <a:rPr sz="1000" b="0">
+                <a:solidFill>
+                  <a:srgbClr val="5A6678"/>
+                </a:solidFill>
+              </a:rPr>
+              <a:t>14 / 38</a:t>
+            </a:r>
           </a:p>
         </p:txBody>
       </p:sp>
@@ -13375,7 +13545,7 @@
                   <a:srgbClr val="5A6678"/>
                 </a:solidFill>
               </a:rPr>
-              <a:t>GA-CIHAZ · Ulusal Değerlendirme Toplantısı · 09.08.2026</a:t>
+              <a:t>GA-CIHAZ · Değerlendirme Toplantısı · 09.08.2026</a:t>
             </a:r>
           </a:p>
         </p:txBody>
@@ -13448,6 +13618,40 @@
           <a:p>
             <a:pPr algn="ctr"/>
             <a:endParaRPr lang="tr-TR"/>
+          </a:p>
+        </p:txBody>
+      </p:sp>
+      <p:sp>
+        <p:nvSpPr>
+          <p:cNvPr id="38" name="TextBox 37"/>
+          <p:cNvSpPr txBox="1"/>
+          <p:nvPr/>
+        </p:nvSpPr>
+        <p:spPr>
+          <a:xfrm>
+            <a:off x="10515600" y="6473952"/>
+            <a:ext cx="1219200" cy="274320"/>
+          </a:xfrm>
+          <a:prstGeom prst="rect">
+            <a:avLst/>
+          </a:prstGeom>
+          <a:noFill/>
+        </p:spPr>
+        <p:txBody>
+          <a:bodyPr wrap="none">
+            <a:spAutoFit/>
+          </a:bodyPr>
+          <a:lstStyle/>
+          <a:p>
+            <a:pPr algn="r"/>
+            <a:r>
+              <a:rPr sz="1000" b="0">
+                <a:solidFill>
+                  <a:srgbClr val="5A6678"/>
+                </a:solidFill>
+              </a:rPr>
+              <a:t>15 / 38</a:t>
+            </a:r>
           </a:p>
         </p:txBody>
       </p:sp>
@@ -14990,7 +15194,7 @@
                   <a:srgbClr val="5A6678"/>
                 </a:solidFill>
               </a:rPr>
-              <a:t>GA-EMCOMM · Ulusal Değerlendirme Toplantısı · 09.08.2026</a:t>
+              <a:t>GA-EMCOMM · Değerlendirme Toplantısı · 09.08.2026</a:t>
             </a:r>
           </a:p>
         </p:txBody>
@@ -15063,6 +15267,40 @@
           <a:p>
             <a:pPr algn="ctr"/>
             <a:endParaRPr lang="tr-TR"/>
+          </a:p>
+        </p:txBody>
+      </p:sp>
+      <p:sp>
+        <p:nvSpPr>
+          <p:cNvPr id="38" name="TextBox 37"/>
+          <p:cNvSpPr txBox="1"/>
+          <p:nvPr/>
+        </p:nvSpPr>
+        <p:spPr>
+          <a:xfrm>
+            <a:off x="10515600" y="6473952"/>
+            <a:ext cx="1219200" cy="274320"/>
+          </a:xfrm>
+          <a:prstGeom prst="rect">
+            <a:avLst/>
+          </a:prstGeom>
+          <a:noFill/>
+        </p:spPr>
+        <p:txBody>
+          <a:bodyPr wrap="none">
+            <a:spAutoFit/>
+          </a:bodyPr>
+          <a:lstStyle/>
+          <a:p>
+            <a:pPr algn="r"/>
+            <a:r>
+              <a:rPr sz="1000" b="0">
+                <a:solidFill>
+                  <a:srgbClr val="5A6678"/>
+                </a:solidFill>
+              </a:rPr>
+              <a:t>16 / 38</a:t>
+            </a:r>
           </a:p>
         </p:txBody>
       </p:sp>
@@ -15310,6 +15548,40 @@
           </a:p>
         </p:txBody>
       </p:sp>
+      <p:sp>
+        <p:nvSpPr>
+          <p:cNvPr id="6" name="TextBox 5"/>
+          <p:cNvSpPr txBox="1"/>
+          <p:nvPr/>
+        </p:nvSpPr>
+        <p:spPr>
+          <a:xfrm>
+            <a:off x="10515600" y="6473952"/>
+            <a:ext cx="1219200" cy="274320"/>
+          </a:xfrm>
+          <a:prstGeom prst="rect">
+            <a:avLst/>
+          </a:prstGeom>
+          <a:noFill/>
+        </p:spPr>
+        <p:txBody>
+          <a:bodyPr wrap="none">
+            <a:spAutoFit/>
+          </a:bodyPr>
+          <a:lstStyle/>
+          <a:p>
+            <a:pPr algn="r"/>
+            <a:r>
+              <a:rPr sz="1000" b="0">
+                <a:solidFill>
+                  <a:srgbClr val="5A6678"/>
+                </a:solidFill>
+              </a:rPr>
+              <a:t>17 / 38</a:t>
+            </a:r>
+          </a:p>
+        </p:txBody>
+      </p:sp>
     </p:spTree>
   </p:cSld>
   <p:clrMapOvr>
@@ -16849,7 +17121,41 @@
                   <a:srgbClr val="5A6678"/>
                 </a:solidFill>
               </a:rPr>
-              <a:t>GA-RX/Kanal · Ulusal Değerlendirme Toplantısı · 09.08.2026</a:t>
+              <a:t>GA-RX/Kanal · Değerlendirme Toplantısı · 09.08.2026</a:t>
+            </a:r>
+          </a:p>
+        </p:txBody>
+      </p:sp>
+      <p:sp>
+        <p:nvSpPr>
+          <p:cNvPr id="36" name="TextBox 35"/>
+          <p:cNvSpPr txBox="1"/>
+          <p:nvPr/>
+        </p:nvSpPr>
+        <p:spPr>
+          <a:xfrm>
+            <a:off x="10515600" y="6473952"/>
+            <a:ext cx="1219200" cy="274320"/>
+          </a:xfrm>
+          <a:prstGeom prst="rect">
+            <a:avLst/>
+          </a:prstGeom>
+          <a:noFill/>
+        </p:spPr>
+        <p:txBody>
+          <a:bodyPr wrap="none">
+            <a:spAutoFit/>
+          </a:bodyPr>
+          <a:lstStyle/>
+          <a:p>
+            <a:pPr algn="r"/>
+            <a:r>
+              <a:rPr sz="1000" b="0">
+                <a:solidFill>
+                  <a:srgbClr val="5A6678"/>
+                </a:solidFill>
+              </a:rPr>
+              <a:t>18 / 38</a:t>
             </a:r>
           </a:p>
         </p:txBody>
@@ -18393,7 +18699,41 @@
                   <a:srgbClr val="5A6678"/>
                 </a:solidFill>
               </a:rPr>
-              <a:t>GA-NODE · Ulusal Değerlendirme Toplantısı · 09.08.2026</a:t>
+              <a:t>GA-NODE · Değerlendirme Toplantısı · 09.08.2026</a:t>
+            </a:r>
+          </a:p>
+        </p:txBody>
+      </p:sp>
+      <p:sp>
+        <p:nvSpPr>
+          <p:cNvPr id="36" name="TextBox 35"/>
+          <p:cNvSpPr txBox="1"/>
+          <p:nvPr/>
+        </p:nvSpPr>
+        <p:spPr>
+          <a:xfrm>
+            <a:off x="10515600" y="6473952"/>
+            <a:ext cx="1219200" cy="274320"/>
+          </a:xfrm>
+          <a:prstGeom prst="rect">
+            <a:avLst/>
+          </a:prstGeom>
+          <a:noFill/>
+        </p:spPr>
+        <p:txBody>
+          <a:bodyPr wrap="none">
+            <a:spAutoFit/>
+          </a:bodyPr>
+          <a:lstStyle/>
+          <a:p>
+            <a:pPr algn="r"/>
+            <a:r>
+              <a:rPr sz="1000" b="0">
+                <a:solidFill>
+                  <a:srgbClr val="5A6678"/>
+                </a:solidFill>
+              </a:rPr>
+              <a:t>19 / 38</a:t>
             </a:r>
           </a:p>
         </p:txBody>
@@ -19158,7 +19498,41 @@
                   <a:srgbClr val="A8C8E8"/>
                 </a:solidFill>
               </a:rPr>
-              <a:t>Ulusal Değerlendirme Toplantısı · 09.08.2026</a:t>
+              <a:t>Değerlendirme Toplantısı · 09.08.2026</a:t>
+            </a:r>
+          </a:p>
+        </p:txBody>
+      </p:sp>
+      <p:sp>
+        <p:nvSpPr>
+          <p:cNvPr id="18" name="TextBox 17"/>
+          <p:cNvSpPr txBox="1"/>
+          <p:nvPr/>
+        </p:nvSpPr>
+        <p:spPr>
+          <a:xfrm>
+            <a:off x="10515600" y="6473952"/>
+            <a:ext cx="1219200" cy="274320"/>
+          </a:xfrm>
+          <a:prstGeom prst="rect">
+            <a:avLst/>
+          </a:prstGeom>
+          <a:noFill/>
+        </p:spPr>
+        <p:txBody>
+          <a:bodyPr wrap="none">
+            <a:spAutoFit/>
+          </a:bodyPr>
+          <a:lstStyle/>
+          <a:p>
+            <a:pPr algn="r"/>
+            <a:r>
+              <a:rPr sz="1000" b="0">
+                <a:solidFill>
+                  <a:srgbClr val="5A6678"/>
+                </a:solidFill>
+              </a:rPr>
+              <a:t>2 / 38</a:t>
             </a:r>
           </a:p>
         </p:txBody>
@@ -20702,7 +21076,41 @@
                   <a:srgbClr val="5A6678"/>
                 </a:solidFill>
               </a:rPr>
-              <a:t>GA-CROSS · Ulusal Değerlendirme Toplantısı · 09.08.2026</a:t>
+              <a:t>GA-CROSS · Değerlendirme Toplantısı · 09.08.2026</a:t>
+            </a:r>
+          </a:p>
+        </p:txBody>
+      </p:sp>
+      <p:sp>
+        <p:nvSpPr>
+          <p:cNvPr id="36" name="TextBox 35"/>
+          <p:cNvSpPr txBox="1"/>
+          <p:nvPr/>
+        </p:nvSpPr>
+        <p:spPr>
+          <a:xfrm>
+            <a:off x="10515600" y="6473952"/>
+            <a:ext cx="1219200" cy="274320"/>
+          </a:xfrm>
+          <a:prstGeom prst="rect">
+            <a:avLst/>
+          </a:prstGeom>
+          <a:noFill/>
+        </p:spPr>
+        <p:txBody>
+          <a:bodyPr wrap="none">
+            <a:spAutoFit/>
+          </a:bodyPr>
+          <a:lstStyle/>
+          <a:p>
+            <a:pPr algn="r"/>
+            <a:r>
+              <a:rPr sz="1000" b="0">
+                <a:solidFill>
+                  <a:srgbClr val="5A6678"/>
+                </a:solidFill>
+              </a:rPr>
+              <a:t>20 / 38</a:t>
             </a:r>
           </a:p>
         </p:txBody>
@@ -22246,7 +22654,41 @@
                   <a:srgbClr val="5A6678"/>
                 </a:solidFill>
               </a:rPr>
-              <a:t>GA-POC · Ulusal Değerlendirme Toplantısı · 09.08.2026</a:t>
+              <a:t>GA-POC · Değerlendirme Toplantısı · 09.08.2026</a:t>
+            </a:r>
+          </a:p>
+        </p:txBody>
+      </p:sp>
+      <p:sp>
+        <p:nvSpPr>
+          <p:cNvPr id="36" name="TextBox 35"/>
+          <p:cNvSpPr txBox="1"/>
+          <p:nvPr/>
+        </p:nvSpPr>
+        <p:spPr>
+          <a:xfrm>
+            <a:off x="10515600" y="6473952"/>
+            <a:ext cx="1219200" cy="274320"/>
+          </a:xfrm>
+          <a:prstGeom prst="rect">
+            <a:avLst/>
+          </a:prstGeom>
+          <a:noFill/>
+        </p:spPr>
+        <p:txBody>
+          <a:bodyPr wrap="none">
+            <a:spAutoFit/>
+          </a:bodyPr>
+          <a:lstStyle/>
+          <a:p>
+            <a:pPr algn="r"/>
+            <a:r>
+              <a:rPr sz="1000" b="0">
+                <a:solidFill>
+                  <a:srgbClr val="5A6678"/>
+                </a:solidFill>
+              </a:rPr>
+              <a:t>21 / 38</a:t>
             </a:r>
           </a:p>
         </p:txBody>
@@ -23790,7 +24232,41 @@
                   <a:srgbClr val="5A6678"/>
                 </a:solidFill>
               </a:rPr>
-              <a:t>GA-ENFORC · Ulusal Değerlendirme Toplantısı · 09.08.2026</a:t>
+              <a:t>GA-ENFORC · Değerlendirme Toplantısı · 09.08.2026</a:t>
+            </a:r>
+          </a:p>
+        </p:txBody>
+      </p:sp>
+      <p:sp>
+        <p:nvSpPr>
+          <p:cNvPr id="36" name="TextBox 35"/>
+          <p:cNvSpPr txBox="1"/>
+          <p:nvPr/>
+        </p:nvSpPr>
+        <p:spPr>
+          <a:xfrm>
+            <a:off x="10515600" y="6473952"/>
+            <a:ext cx="1219200" cy="274320"/>
+          </a:xfrm>
+          <a:prstGeom prst="rect">
+            <a:avLst/>
+          </a:prstGeom>
+          <a:noFill/>
+        </p:spPr>
+        <p:txBody>
+          <a:bodyPr wrap="none">
+            <a:spAutoFit/>
+          </a:bodyPr>
+          <a:lstStyle/>
+          <a:p>
+            <a:pPr algn="r"/>
+            <a:r>
+              <a:rPr sz="1000" b="0">
+                <a:solidFill>
+                  <a:srgbClr val="5A6678"/>
+                </a:solidFill>
+              </a:rPr>
+              <a:t>22 / 38</a:t>
             </a:r>
           </a:p>
         </p:txBody>
@@ -25334,7 +25810,41 @@
                   <a:srgbClr val="5A6678"/>
                 </a:solidFill>
               </a:rPr>
-              <a:t>GA-BAND-2 · Ulusal Değerlendirme Toplantısı · 09.08.2026</a:t>
+              <a:t>GA-BAND-2 · Değerlendirme Toplantısı · 09.08.2026</a:t>
+            </a:r>
+          </a:p>
+        </p:txBody>
+      </p:sp>
+      <p:sp>
+        <p:nvSpPr>
+          <p:cNvPr id="36" name="TextBox 35"/>
+          <p:cNvSpPr txBox="1"/>
+          <p:nvPr/>
+        </p:nvSpPr>
+        <p:spPr>
+          <a:xfrm>
+            <a:off x="10515600" y="6473952"/>
+            <a:ext cx="1219200" cy="274320"/>
+          </a:xfrm>
+          <a:prstGeom prst="rect">
+            <a:avLst/>
+          </a:prstGeom>
+          <a:noFill/>
+        </p:spPr>
+        <p:txBody>
+          <a:bodyPr wrap="none">
+            <a:spAutoFit/>
+          </a:bodyPr>
+          <a:lstStyle/>
+          <a:p>
+            <a:pPr algn="r"/>
+            <a:r>
+              <a:rPr sz="1000" b="0">
+                <a:solidFill>
+                  <a:srgbClr val="5A6678"/>
+                </a:solidFill>
+              </a:rPr>
+              <a:t>23 / 38</a:t>
             </a:r>
           </a:p>
         </p:txBody>
@@ -26878,7 +27388,41 @@
                   <a:srgbClr val="5A6678"/>
                 </a:solidFill>
               </a:rPr>
-              <a:t>GA-BAND-3 · Ulusal Değerlendirme Toplantısı · 09.08.2026</a:t>
+              <a:t>GA-BAND-3 · Değerlendirme Toplantısı · 09.08.2026</a:t>
+            </a:r>
+          </a:p>
+        </p:txBody>
+      </p:sp>
+      <p:sp>
+        <p:nvSpPr>
+          <p:cNvPr id="36" name="TextBox 35"/>
+          <p:cNvSpPr txBox="1"/>
+          <p:nvPr/>
+        </p:nvSpPr>
+        <p:spPr>
+          <a:xfrm>
+            <a:off x="10515600" y="6473952"/>
+            <a:ext cx="1219200" cy="274320"/>
+          </a:xfrm>
+          <a:prstGeom prst="rect">
+            <a:avLst/>
+          </a:prstGeom>
+          <a:noFill/>
+        </p:spPr>
+        <p:txBody>
+          <a:bodyPr wrap="none">
+            <a:spAutoFit/>
+          </a:bodyPr>
+          <a:lstStyle/>
+          <a:p>
+            <a:pPr algn="r"/>
+            <a:r>
+              <a:rPr sz="1000" b="0">
+                <a:solidFill>
+                  <a:srgbClr val="5A6678"/>
+                </a:solidFill>
+              </a:rPr>
+              <a:t>24 / 38</a:t>
             </a:r>
           </a:p>
         </p:txBody>
@@ -28422,7 +28966,41 @@
                   <a:srgbClr val="5A6678"/>
                 </a:solidFill>
               </a:rPr>
-              <a:t>GA-ARAC · Ulusal Değerlendirme Toplantısı · 09.08.2026</a:t>
+              <a:t>GA-ARAC · Değerlendirme Toplantısı · 09.08.2026</a:t>
+            </a:r>
+          </a:p>
+        </p:txBody>
+      </p:sp>
+      <p:sp>
+        <p:nvSpPr>
+          <p:cNvPr id="36" name="TextBox 35"/>
+          <p:cNvSpPr txBox="1"/>
+          <p:nvPr/>
+        </p:nvSpPr>
+        <p:spPr>
+          <a:xfrm>
+            <a:off x="10515600" y="6473952"/>
+            <a:ext cx="1219200" cy="274320"/>
+          </a:xfrm>
+          <a:prstGeom prst="rect">
+            <a:avLst/>
+          </a:prstGeom>
+          <a:noFill/>
+        </p:spPr>
+        <p:txBody>
+          <a:bodyPr wrap="none">
+            <a:spAutoFit/>
+          </a:bodyPr>
+          <a:lstStyle/>
+          <a:p>
+            <a:pPr algn="r"/>
+            <a:r>
+              <a:rPr sz="1000" b="0">
+                <a:solidFill>
+                  <a:srgbClr val="5A6678"/>
+                </a:solidFill>
+              </a:rPr>
+              <a:t>25 / 38</a:t>
             </a:r>
           </a:p>
         </p:txBody>
@@ -29966,7 +30544,41 @@
                   <a:srgbClr val="5A6678"/>
                 </a:solidFill>
               </a:rPr>
-              <a:t>GA-POTA · Ulusal Değerlendirme Toplantısı · 09.08.2026</a:t>
+              <a:t>GA-POTA · Değerlendirme Toplantısı · 09.08.2026</a:t>
+            </a:r>
+          </a:p>
+        </p:txBody>
+      </p:sp>
+      <p:sp>
+        <p:nvSpPr>
+          <p:cNvPr id="36" name="TextBox 35"/>
+          <p:cNvSpPr txBox="1"/>
+          <p:nvPr/>
+        </p:nvSpPr>
+        <p:spPr>
+          <a:xfrm>
+            <a:off x="10515600" y="6473952"/>
+            <a:ext cx="1219200" cy="274320"/>
+          </a:xfrm>
+          <a:prstGeom prst="rect">
+            <a:avLst/>
+          </a:prstGeom>
+          <a:noFill/>
+        </p:spPr>
+        <p:txBody>
+          <a:bodyPr wrap="none">
+            <a:spAutoFit/>
+          </a:bodyPr>
+          <a:lstStyle/>
+          <a:p>
+            <a:pPr algn="r"/>
+            <a:r>
+              <a:rPr sz="1000" b="0">
+                <a:solidFill>
+                  <a:srgbClr val="5A6678"/>
+                </a:solidFill>
+              </a:rPr>
+              <a:t>26 / 38</a:t>
             </a:r>
           </a:p>
         </p:txBody>
@@ -31510,7 +32122,41 @@
                   <a:srgbClr val="5A6678"/>
                 </a:solidFill>
               </a:rPr>
-              <a:t>GA-AREDN · Ulusal Değerlendirme Toplantısı · 09.08.2026</a:t>
+              <a:t>GA-AREDN · Değerlendirme Toplantısı · 09.08.2026</a:t>
+            </a:r>
+          </a:p>
+        </p:txBody>
+      </p:sp>
+      <p:sp>
+        <p:nvSpPr>
+          <p:cNvPr id="36" name="TextBox 35"/>
+          <p:cNvSpPr txBox="1"/>
+          <p:nvPr/>
+        </p:nvSpPr>
+        <p:spPr>
+          <a:xfrm>
+            <a:off x="10515600" y="6473952"/>
+            <a:ext cx="1219200" cy="274320"/>
+          </a:xfrm>
+          <a:prstGeom prst="rect">
+            <a:avLst/>
+          </a:prstGeom>
+          <a:noFill/>
+        </p:spPr>
+        <p:txBody>
+          <a:bodyPr wrap="none">
+            <a:spAutoFit/>
+          </a:bodyPr>
+          <a:lstStyle/>
+          <a:p>
+            <a:pPr algn="r"/>
+            <a:r>
+              <a:rPr sz="1000" b="0">
+                <a:solidFill>
+                  <a:srgbClr val="5A6678"/>
+                </a:solidFill>
+              </a:rPr>
+              <a:t>27 / 38</a:t>
             </a:r>
           </a:p>
         </p:txBody>
@@ -33054,7 +33700,41 @@
                   <a:srgbClr val="5A6678"/>
                 </a:solidFill>
               </a:rPr>
-              <a:t>GA-LORA · Ulusal Değerlendirme Toplantısı · 09.08.2026</a:t>
+              <a:t>GA-LORA · Değerlendirme Toplantısı · 09.08.2026</a:t>
+            </a:r>
+          </a:p>
+        </p:txBody>
+      </p:sp>
+      <p:sp>
+        <p:nvSpPr>
+          <p:cNvPr id="36" name="TextBox 35"/>
+          <p:cNvSpPr txBox="1"/>
+          <p:nvPr/>
+        </p:nvSpPr>
+        <p:spPr>
+          <a:xfrm>
+            <a:off x="10515600" y="6473952"/>
+            <a:ext cx="1219200" cy="274320"/>
+          </a:xfrm>
+          <a:prstGeom prst="rect">
+            <a:avLst/>
+          </a:prstGeom>
+          <a:noFill/>
+        </p:spPr>
+        <p:txBody>
+          <a:bodyPr wrap="none">
+            <a:spAutoFit/>
+          </a:bodyPr>
+          <a:lstStyle/>
+          <a:p>
+            <a:pPr algn="r"/>
+            <a:r>
+              <a:rPr sz="1000" b="0">
+                <a:solidFill>
+                  <a:srgbClr val="5A6678"/>
+                </a:solidFill>
+              </a:rPr>
+              <a:t>28 / 38</a:t>
             </a:r>
           </a:p>
         </p:txBody>
@@ -34598,7 +35278,41 @@
                   <a:srgbClr val="5A6678"/>
                 </a:solidFill>
               </a:rPr>
-              <a:t>GA-4 · Ulusal Değerlendirme Toplantısı · 09.08.2026</a:t>
+              <a:t>GA-4 · Değerlendirme Toplantısı · 09.08.2026</a:t>
+            </a:r>
+          </a:p>
+        </p:txBody>
+      </p:sp>
+      <p:sp>
+        <p:nvSpPr>
+          <p:cNvPr id="36" name="TextBox 35"/>
+          <p:cNvSpPr txBox="1"/>
+          <p:nvPr/>
+        </p:nvSpPr>
+        <p:spPr>
+          <a:xfrm>
+            <a:off x="10515600" y="6473952"/>
+            <a:ext cx="1219200" cy="274320"/>
+          </a:xfrm>
+          <a:prstGeom prst="rect">
+            <a:avLst/>
+          </a:prstGeom>
+          <a:noFill/>
+        </p:spPr>
+        <p:txBody>
+          <a:bodyPr wrap="none">
+            <a:spAutoFit/>
+          </a:bodyPr>
+          <a:lstStyle/>
+          <a:p>
+            <a:pPr algn="r"/>
+            <a:r>
+              <a:rPr sz="1000" b="0">
+                <a:solidFill>
+                  <a:srgbClr val="5A6678"/>
+                </a:solidFill>
+              </a:rPr>
+              <a:t>29 / 38</a:t>
             </a:r>
           </a:p>
         </p:txBody>
@@ -35244,7 +35958,41 @@
                   <a:srgbClr val="5A6678"/>
                 </a:solidFill>
               </a:rPr>
-              <a:t>Ulusal Değerlendirme Toplantısı · 09.08.2026</a:t>
+              <a:t>Değerlendirme Toplantısı · 09.08.2026</a:t>
+            </a:r>
+          </a:p>
+        </p:txBody>
+      </p:sp>
+      <p:sp>
+        <p:nvSpPr>
+          <p:cNvPr id="12" name="TextBox 11"/>
+          <p:cNvSpPr txBox="1"/>
+          <p:nvPr/>
+        </p:nvSpPr>
+        <p:spPr>
+          <a:xfrm>
+            <a:off x="10515600" y="6473952"/>
+            <a:ext cx="1219200" cy="274320"/>
+          </a:xfrm>
+          <a:prstGeom prst="rect">
+            <a:avLst/>
+          </a:prstGeom>
+          <a:noFill/>
+        </p:spPr>
+        <p:txBody>
+          <a:bodyPr wrap="none">
+            <a:spAutoFit/>
+          </a:bodyPr>
+          <a:lstStyle/>
+          <a:p>
+            <a:pPr algn="r"/>
+            <a:r>
+              <a:rPr sz="1000" b="0">
+                <a:solidFill>
+                  <a:srgbClr val="5A6678"/>
+                </a:solidFill>
+              </a:rPr>
+              <a:t>3 / 38</a:t>
             </a:r>
           </a:p>
         </p:txBody>
@@ -36788,7 +37536,41 @@
                   <a:srgbClr val="5A6678"/>
                 </a:solidFill>
               </a:rPr>
-              <a:t>GA-SK · Ulusal Değerlendirme Toplantısı · 09.08.2026</a:t>
+              <a:t>GA-SK · Değerlendirme Toplantısı · 09.08.2026</a:t>
+            </a:r>
+          </a:p>
+        </p:txBody>
+      </p:sp>
+      <p:sp>
+        <p:nvSpPr>
+          <p:cNvPr id="36" name="TextBox 35"/>
+          <p:cNvSpPr txBox="1"/>
+          <p:nvPr/>
+        </p:nvSpPr>
+        <p:spPr>
+          <a:xfrm>
+            <a:off x="10515600" y="6473952"/>
+            <a:ext cx="1219200" cy="274320"/>
+          </a:xfrm>
+          <a:prstGeom prst="rect">
+            <a:avLst/>
+          </a:prstGeom>
+          <a:noFill/>
+        </p:spPr>
+        <p:txBody>
+          <a:bodyPr wrap="none">
+            <a:spAutoFit/>
+          </a:bodyPr>
+          <a:lstStyle/>
+          <a:p>
+            <a:pPr algn="r"/>
+            <a:r>
+              <a:rPr sz="1000" b="0">
+                <a:solidFill>
+                  <a:srgbClr val="5A6678"/>
+                </a:solidFill>
+              </a:rPr>
+              <a:t>30 / 38</a:t>
             </a:r>
           </a:p>
         </p:txBody>
@@ -38332,7 +39114,41 @@
                   <a:srgbClr val="5A6678"/>
                 </a:solidFill>
               </a:rPr>
-              <a:t>GA-CALL · Ulusal Değerlendirme Toplantısı · 09.08.2026</a:t>
+              <a:t>GA-CALL · Değerlendirme Toplantısı · 09.08.2026</a:t>
+            </a:r>
+          </a:p>
+        </p:txBody>
+      </p:sp>
+      <p:sp>
+        <p:nvSpPr>
+          <p:cNvPr id="36" name="TextBox 35"/>
+          <p:cNvSpPr txBox="1"/>
+          <p:nvPr/>
+        </p:nvSpPr>
+        <p:spPr>
+          <a:xfrm>
+            <a:off x="10515600" y="6473952"/>
+            <a:ext cx="1219200" cy="274320"/>
+          </a:xfrm>
+          <a:prstGeom prst="rect">
+            <a:avLst/>
+          </a:prstGeom>
+          <a:noFill/>
+        </p:spPr>
+        <p:txBody>
+          <a:bodyPr wrap="none">
+            <a:spAutoFit/>
+          </a:bodyPr>
+          <a:lstStyle/>
+          <a:p>
+            <a:pPr algn="r"/>
+            <a:r>
+              <a:rPr sz="1000" b="0">
+                <a:solidFill>
+                  <a:srgbClr val="5A6678"/>
+                </a:solidFill>
+              </a:rPr>
+              <a:t>31 / 38</a:t>
             </a:r>
           </a:p>
         </p:txBody>
@@ -38901,7 +39717,41 @@
                   <a:srgbClr val="5A6678"/>
                 </a:solidFill>
               </a:rPr>
-              <a:t>Ulusal Değerlendirme Toplantısı · 09.08.2026</a:t>
+              <a:t>Değerlendirme Toplantısı · 09.08.2026</a:t>
+            </a:r>
+          </a:p>
+        </p:txBody>
+      </p:sp>
+      <p:sp>
+        <p:nvSpPr>
+          <p:cNvPr id="11" name="TextBox 10"/>
+          <p:cNvSpPr txBox="1"/>
+          <p:nvPr/>
+        </p:nvSpPr>
+        <p:spPr>
+          <a:xfrm>
+            <a:off x="10515600" y="6473952"/>
+            <a:ext cx="1219200" cy="274320"/>
+          </a:xfrm>
+          <a:prstGeom prst="rect">
+            <a:avLst/>
+          </a:prstGeom>
+          <a:noFill/>
+        </p:spPr>
+        <p:txBody>
+          <a:bodyPr wrap="none">
+            <a:spAutoFit/>
+          </a:bodyPr>
+          <a:lstStyle/>
+          <a:p>
+            <a:pPr algn="r"/>
+            <a:r>
+              <a:rPr sz="1000" b="0">
+                <a:solidFill>
+                  <a:srgbClr val="5A6678"/>
+                </a:solidFill>
+              </a:rPr>
+              <a:t>32 / 38</a:t>
             </a:r>
           </a:p>
         </p:txBody>
@@ -39187,6 +40037,40 @@
           </a:p>
         </p:txBody>
       </p:sp>
+      <p:sp>
+        <p:nvSpPr>
+          <p:cNvPr id="7" name="TextBox 6"/>
+          <p:cNvSpPr txBox="1"/>
+          <p:nvPr/>
+        </p:nvSpPr>
+        <p:spPr>
+          <a:xfrm>
+            <a:off x="10515600" y="6473952"/>
+            <a:ext cx="1219200" cy="274320"/>
+          </a:xfrm>
+          <a:prstGeom prst="rect">
+            <a:avLst/>
+          </a:prstGeom>
+          <a:noFill/>
+        </p:spPr>
+        <p:txBody>
+          <a:bodyPr wrap="none">
+            <a:spAutoFit/>
+          </a:bodyPr>
+          <a:lstStyle/>
+          <a:p>
+            <a:pPr algn="r"/>
+            <a:r>
+              <a:rPr sz="1000" b="0">
+                <a:solidFill>
+                  <a:srgbClr val="5A6678"/>
+                </a:solidFill>
+              </a:rPr>
+              <a:t>33 / 38</a:t>
+            </a:r>
+          </a:p>
+        </p:txBody>
+      </p:sp>
     </p:spTree>
   </p:cSld>
   <p:clrMapOvr>
@@ -40157,6 +41041,40 @@
           </a:p>
         </p:txBody>
       </p:sp>
+      <p:sp>
+        <p:nvSpPr>
+          <p:cNvPr id="23" name="TextBox 22"/>
+          <p:cNvSpPr txBox="1"/>
+          <p:nvPr/>
+        </p:nvSpPr>
+        <p:spPr>
+          <a:xfrm>
+            <a:off x="10515600" y="6473952"/>
+            <a:ext cx="1219200" cy="274320"/>
+          </a:xfrm>
+          <a:prstGeom prst="rect">
+            <a:avLst/>
+          </a:prstGeom>
+          <a:noFill/>
+        </p:spPr>
+        <p:txBody>
+          <a:bodyPr wrap="none">
+            <a:spAutoFit/>
+          </a:bodyPr>
+          <a:lstStyle/>
+          <a:p>
+            <a:pPr algn="r"/>
+            <a:r>
+              <a:rPr sz="1000" b="0">
+                <a:solidFill>
+                  <a:srgbClr val="5A6678"/>
+                </a:solidFill>
+              </a:rPr>
+              <a:t>34 / 38</a:t>
+            </a:r>
+          </a:p>
+        </p:txBody>
+      </p:sp>
     </p:spTree>
   </p:cSld>
   <p:clrMapOvr>
@@ -41120,6 +42038,40 @@
           </a:p>
         </p:txBody>
       </p:sp>
+      <p:sp>
+        <p:nvSpPr>
+          <p:cNvPr id="23" name="TextBox 22"/>
+          <p:cNvSpPr txBox="1"/>
+          <p:nvPr/>
+        </p:nvSpPr>
+        <p:spPr>
+          <a:xfrm>
+            <a:off x="10515600" y="6473952"/>
+            <a:ext cx="1219200" cy="274320"/>
+          </a:xfrm>
+          <a:prstGeom prst="rect">
+            <a:avLst/>
+          </a:prstGeom>
+          <a:noFill/>
+        </p:spPr>
+        <p:txBody>
+          <a:bodyPr wrap="none">
+            <a:spAutoFit/>
+          </a:bodyPr>
+          <a:lstStyle/>
+          <a:p>
+            <a:pPr algn="r"/>
+            <a:r>
+              <a:rPr sz="1000" b="0">
+                <a:solidFill>
+                  <a:srgbClr val="5A6678"/>
+                </a:solidFill>
+              </a:rPr>
+              <a:t>35 / 38</a:t>
+            </a:r>
+          </a:p>
+        </p:txBody>
+      </p:sp>
     </p:spTree>
   </p:cSld>
   <p:clrMapOvr>
@@ -42212,6 +43164,40 @@
           </a:p>
         </p:txBody>
       </p:sp>
+      <p:sp>
+        <p:nvSpPr>
+          <p:cNvPr id="26" name="TextBox 25"/>
+          <p:cNvSpPr txBox="1"/>
+          <p:nvPr/>
+        </p:nvSpPr>
+        <p:spPr>
+          <a:xfrm>
+            <a:off x="10515600" y="6473952"/>
+            <a:ext cx="1219200" cy="274320"/>
+          </a:xfrm>
+          <a:prstGeom prst="rect">
+            <a:avLst/>
+          </a:prstGeom>
+          <a:noFill/>
+        </p:spPr>
+        <p:txBody>
+          <a:bodyPr wrap="none">
+            <a:spAutoFit/>
+          </a:bodyPr>
+          <a:lstStyle/>
+          <a:p>
+            <a:pPr algn="r"/>
+            <a:r>
+              <a:rPr sz="1000" b="0">
+                <a:solidFill>
+                  <a:srgbClr val="5A6678"/>
+                </a:solidFill>
+              </a:rPr>
+              <a:t>36 / 38</a:t>
+            </a:r>
+          </a:p>
+        </p:txBody>
+      </p:sp>
     </p:spTree>
   </p:cSld>
   <p:clrMapOvr>
@@ -43433,6 +44419,40 @@
           </a:p>
         </p:txBody>
       </p:sp>
+      <p:sp>
+        <p:nvSpPr>
+          <p:cNvPr id="29" name="TextBox 28"/>
+          <p:cNvSpPr txBox="1"/>
+          <p:nvPr/>
+        </p:nvSpPr>
+        <p:spPr>
+          <a:xfrm>
+            <a:off x="10515600" y="6473952"/>
+            <a:ext cx="1219200" cy="274320"/>
+          </a:xfrm>
+          <a:prstGeom prst="rect">
+            <a:avLst/>
+          </a:prstGeom>
+          <a:noFill/>
+        </p:spPr>
+        <p:txBody>
+          <a:bodyPr wrap="none">
+            <a:spAutoFit/>
+          </a:bodyPr>
+          <a:lstStyle/>
+          <a:p>
+            <a:pPr algn="r"/>
+            <a:r>
+              <a:rPr sz="1000" b="0">
+                <a:solidFill>
+                  <a:srgbClr val="5A6678"/>
+                </a:solidFill>
+              </a:rPr>
+              <a:t>37 / 38</a:t>
+            </a:r>
+          </a:p>
+        </p:txBody>
+      </p:sp>
     </p:spTree>
   </p:cSld>
   <p:clrMapOvr>
@@ -44783,6 +45803,40 @@
           </a:p>
         </p:txBody>
       </p:sp>
+      <p:sp>
+        <p:nvSpPr>
+          <p:cNvPr id="32" name="TextBox 31"/>
+          <p:cNvSpPr txBox="1"/>
+          <p:nvPr/>
+        </p:nvSpPr>
+        <p:spPr>
+          <a:xfrm>
+            <a:off x="10515600" y="6473952"/>
+            <a:ext cx="1219200" cy="274320"/>
+          </a:xfrm>
+          <a:prstGeom prst="rect">
+            <a:avLst/>
+          </a:prstGeom>
+          <a:noFill/>
+        </p:spPr>
+        <p:txBody>
+          <a:bodyPr wrap="none">
+            <a:spAutoFit/>
+          </a:bodyPr>
+          <a:lstStyle/>
+          <a:p>
+            <a:pPr algn="r"/>
+            <a:r>
+              <a:rPr sz="1000" b="0">
+                <a:solidFill>
+                  <a:srgbClr val="5A6678"/>
+                </a:solidFill>
+              </a:rPr>
+              <a:t>38 / 38</a:t>
+            </a:r>
+          </a:p>
+        </p:txBody>
+      </p:sp>
     </p:spTree>
   </p:cSld>
   <p:clrMapOvr>
@@ -45600,7 +46654,41 @@
                   <a:srgbClr val="5A6678"/>
                 </a:solidFill>
               </a:rPr>
-              <a:t>Ulusal Değerlendirme Toplantısı · 09.08.2026</a:t>
+              <a:t>Değerlendirme Toplantısı · 09.08.2026</a:t>
+            </a:r>
+          </a:p>
+        </p:txBody>
+      </p:sp>
+      <p:sp>
+        <p:nvSpPr>
+          <p:cNvPr id="19" name="TextBox 18"/>
+          <p:cNvSpPr txBox="1"/>
+          <p:nvPr/>
+        </p:nvSpPr>
+        <p:spPr>
+          <a:xfrm>
+            <a:off x="10515600" y="6473952"/>
+            <a:ext cx="1219200" cy="274320"/>
+          </a:xfrm>
+          <a:prstGeom prst="rect">
+            <a:avLst/>
+          </a:prstGeom>
+          <a:noFill/>
+        </p:spPr>
+        <p:txBody>
+          <a:bodyPr wrap="none">
+            <a:spAutoFit/>
+          </a:bodyPr>
+          <a:lstStyle/>
+          <a:p>
+            <a:pPr algn="r"/>
+            <a:r>
+              <a:rPr sz="1000" b="0">
+                <a:solidFill>
+                  <a:srgbClr val="5A6678"/>
+                </a:solidFill>
+              </a:rPr>
+              <a:t>4 / 38</a:t>
             </a:r>
           </a:p>
         </p:txBody>
@@ -46787,7 +47875,41 @@
                   <a:srgbClr val="5A6678"/>
                 </a:solidFill>
               </a:rPr>
-              <a:t>Ulusal Değerlendirme Toplantısı · 09.08.2026</a:t>
+              <a:t>Değerlendirme Toplantısı · 09.08.2026</a:t>
+            </a:r>
+          </a:p>
+        </p:txBody>
+      </p:sp>
+      <p:sp>
+        <p:nvSpPr>
+          <p:cNvPr id="29" name="TextBox 28"/>
+          <p:cNvSpPr txBox="1"/>
+          <p:nvPr/>
+        </p:nvSpPr>
+        <p:spPr>
+          <a:xfrm>
+            <a:off x="10515600" y="6473952"/>
+            <a:ext cx="1219200" cy="274320"/>
+          </a:xfrm>
+          <a:prstGeom prst="rect">
+            <a:avLst/>
+          </a:prstGeom>
+          <a:noFill/>
+        </p:spPr>
+        <p:txBody>
+          <a:bodyPr wrap="none">
+            <a:spAutoFit/>
+          </a:bodyPr>
+          <a:lstStyle/>
+          <a:p>
+            <a:pPr algn="r"/>
+            <a:r>
+              <a:rPr sz="1000" b="0">
+                <a:solidFill>
+                  <a:srgbClr val="5A6678"/>
+                </a:solidFill>
+              </a:rPr>
+              <a:t>5 / 38</a:t>
             </a:r>
           </a:p>
         </p:txBody>
@@ -48029,7 +49151,41 @@
                   <a:srgbClr val="A8C8E8"/>
                 </a:solidFill>
               </a:rPr>
-              <a:t>Ulusal Değerlendirme Toplantısı · 09.08.2026</a:t>
+              <a:t>Değerlendirme Toplantısı · 09.08.2026</a:t>
+            </a:r>
+          </a:p>
+        </p:txBody>
+      </p:sp>
+      <p:sp>
+        <p:nvSpPr>
+          <p:cNvPr id="28" name="TextBox 27"/>
+          <p:cNvSpPr txBox="1"/>
+          <p:nvPr/>
+        </p:nvSpPr>
+        <p:spPr>
+          <a:xfrm>
+            <a:off x="10515600" y="6473952"/>
+            <a:ext cx="1219200" cy="274320"/>
+          </a:xfrm>
+          <a:prstGeom prst="rect">
+            <a:avLst/>
+          </a:prstGeom>
+          <a:noFill/>
+        </p:spPr>
+        <p:txBody>
+          <a:bodyPr wrap="none">
+            <a:spAutoFit/>
+          </a:bodyPr>
+          <a:lstStyle/>
+          <a:p>
+            <a:pPr algn="r"/>
+            <a:r>
+              <a:rPr sz="1000" b="0">
+                <a:solidFill>
+                  <a:srgbClr val="5A6678"/>
+                </a:solidFill>
+              </a:rPr>
+              <a:t>6 / 38</a:t>
             </a:r>
           </a:p>
         </p:txBody>
@@ -49279,7 +50435,41 @@
                   <a:srgbClr val="5A6678"/>
                 </a:solidFill>
               </a:rPr>
-              <a:t>Ulusal Değerlendirme Toplantısı · 09.08.2026</a:t>
+              <a:t>Değerlendirme Toplantısı · 09.08.2026</a:t>
+            </a:r>
+          </a:p>
+        </p:txBody>
+      </p:sp>
+      <p:sp>
+        <p:nvSpPr>
+          <p:cNvPr id="28" name="TextBox 27"/>
+          <p:cNvSpPr txBox="1"/>
+          <p:nvPr/>
+        </p:nvSpPr>
+        <p:spPr>
+          <a:xfrm>
+            <a:off x="10515600" y="6473952"/>
+            <a:ext cx="1219200" cy="274320"/>
+          </a:xfrm>
+          <a:prstGeom prst="rect">
+            <a:avLst/>
+          </a:prstGeom>
+          <a:noFill/>
+        </p:spPr>
+        <p:txBody>
+          <a:bodyPr wrap="none">
+            <a:spAutoFit/>
+          </a:bodyPr>
+          <a:lstStyle/>
+          <a:p>
+            <a:pPr algn="r"/>
+            <a:r>
+              <a:rPr sz="1000" b="0">
+                <a:solidFill>
+                  <a:srgbClr val="5A6678"/>
+                </a:solidFill>
+              </a:rPr>
+              <a:t>7 / 38</a:t>
             </a:r>
           </a:p>
         </p:txBody>
@@ -49528,6 +50718,40 @@
           </a:p>
         </p:txBody>
       </p:sp>
+      <p:sp>
+        <p:nvSpPr>
+          <p:cNvPr id="6" name="TextBox 5"/>
+          <p:cNvSpPr txBox="1"/>
+          <p:nvPr/>
+        </p:nvSpPr>
+        <p:spPr>
+          <a:xfrm>
+            <a:off x="10515600" y="6473952"/>
+            <a:ext cx="1219200" cy="274320"/>
+          </a:xfrm>
+          <a:prstGeom prst="rect">
+            <a:avLst/>
+          </a:prstGeom>
+          <a:noFill/>
+        </p:spPr>
+        <p:txBody>
+          <a:bodyPr wrap="none">
+            <a:spAutoFit/>
+          </a:bodyPr>
+          <a:lstStyle/>
+          <a:p>
+            <a:pPr algn="r"/>
+            <a:r>
+              <a:rPr sz="1000" b="0">
+                <a:solidFill>
+                  <a:srgbClr val="5A6678"/>
+                </a:solidFill>
+              </a:rPr>
+              <a:t>8 / 38</a:t>
+            </a:r>
+          </a:p>
+        </p:txBody>
+      </p:sp>
     </p:spTree>
   </p:cSld>
   <p:clrMapOvr>
@@ -51067,7 +52291,7 @@
                   <a:srgbClr val="5A6678"/>
                 </a:solidFill>
               </a:rPr>
-              <a:t>GA-1 · Ulusal Değerlendirme Toplantısı · 09.08.2026</a:t>
+              <a:t>GA-1 · Değerlendirme Toplantısı · 09.08.2026</a:t>
             </a:r>
           </a:p>
         </p:txBody>
@@ -51140,6 +52364,40 @@
           <a:p>
             <a:pPr algn="ctr"/>
             <a:endParaRPr lang="tr-TR"/>
+          </a:p>
+        </p:txBody>
+      </p:sp>
+      <p:sp>
+        <p:nvSpPr>
+          <p:cNvPr id="1028" name="TextBox 1027"/>
+          <p:cNvSpPr txBox="1"/>
+          <p:nvPr/>
+        </p:nvSpPr>
+        <p:spPr>
+          <a:xfrm>
+            <a:off x="10515600" y="6473952"/>
+            <a:ext cx="1219200" cy="274320"/>
+          </a:xfrm>
+          <a:prstGeom prst="rect">
+            <a:avLst/>
+          </a:prstGeom>
+          <a:noFill/>
+        </p:spPr>
+        <p:txBody>
+          <a:bodyPr wrap="none">
+            <a:spAutoFit/>
+          </a:bodyPr>
+          <a:lstStyle/>
+          <a:p>
+            <a:pPr algn="r"/>
+            <a:r>
+              <a:rPr sz="1000" b="0">
+                <a:solidFill>
+                  <a:srgbClr val="5A6678"/>
+                </a:solidFill>
+              </a:rPr>
+              <a:t>9 / 38</a:t>
+            </a:r>
           </a:p>
         </p:txBody>
       </p:sp>
